--- a/08_上台簡報準備/園藝公司設立與首年稅務規劃 (統一風格版).pptx
+++ b/08_上台簡報準備/園藝公司設立與首年稅務規劃 (統一風格版).pptx
@@ -7280,154 +7280,6 @@
         </p:grpSpPr>
         <p:sp>
           <p:nvSpPr>
-            <p:cNvPr id="61" name="Google Shape;61;p14"/>
-            <p:cNvSpPr/>
-            <p:nvPr/>
-          </p:nvSpPr>
-          <p:spPr>
-            <a:xfrm>
-              <a:off x="0" y="0"/>
-              <a:ext cx="304800" cy="304800"/>
-            </a:xfrm>
-            <a:custGeom>
-              <a:avLst/>
-              <a:gdLst/>
-              <a:ahLst/>
-              <a:cxnLst/>
-              <a:rect l="l" t="t" r="r" b="b"/>
-              <a:pathLst>
-                <a:path w="120000" h="120000" extrusionOk="0">
-                  <a:moveTo>
-                    <a:pt x="0" y="60000"/>
-                  </a:moveTo>
-                  <a:cubicBezTo>
-                    <a:pt x="0" y="0"/>
-                    <a:pt x="60000" y="0"/>
-                    <a:pt x="60000" y="0"/>
-                  </a:cubicBezTo>
-                  <a:cubicBezTo>
-                    <a:pt x="120000" y="0"/>
-                    <a:pt x="120000" y="60000"/>
-                    <a:pt x="120000" y="60000"/>
-                  </a:cubicBezTo>
-                  <a:cubicBezTo>
-                    <a:pt x="120000" y="120000"/>
-                    <a:pt x="60000" y="120000"/>
-                    <a:pt x="60000" y="120000"/>
-                  </a:cubicBezTo>
-                  <a:cubicBezTo>
-                    <a:pt x="0" y="120000"/>
-                    <a:pt x="0" y="60000"/>
-                    <a:pt x="0" y="60000"/>
-                  </a:cubicBezTo>
-                  <a:close/>
-                </a:path>
-              </a:pathLst>
-            </a:custGeom>
-            <a:solidFill>
-              <a:srgbClr val="5A7557">
-                <a:alpha val="80000"/>
-              </a:srgbClr>
-            </a:solidFill>
-            <a:ln>
-              <a:noFill/>
-            </a:ln>
-          </p:spPr>
-          <p:txBody>
-            <a:bodyPr spcFirstLastPara="1" wrap="square" lIns="0" tIns="0" rIns="0" bIns="0" anchor="ctr" anchorCtr="0">
-              <a:noAutofit/>
-            </a:bodyPr>
-            <a:lstStyle/>
-            <a:p>
-              <a:pPr marL="0" lvl="0" indent="0" algn="l" rtl="0">
-                <a:spcBef>
-                  <a:spcPts val="0"/>
-                </a:spcBef>
-                <a:spcAft>
-                  <a:spcPts val="0"/>
-                </a:spcAft>
-                <a:buNone/>
-              </a:pPr>
-              <a:endParaRPr/>
-            </a:p>
-          </p:txBody>
-        </p:sp>
-        <p:sp>
-          <p:nvSpPr>
-            <p:cNvPr id="62" name="Google Shape;62;p14"/>
-            <p:cNvSpPr/>
-            <p:nvPr/>
-          </p:nvSpPr>
-          <p:spPr>
-            <a:xfrm>
-              <a:off x="114300" y="76200"/>
-              <a:ext cx="304800" cy="304800"/>
-            </a:xfrm>
-            <a:custGeom>
-              <a:avLst/>
-              <a:gdLst/>
-              <a:ahLst/>
-              <a:cxnLst/>
-              <a:rect l="l" t="t" r="r" b="b"/>
-              <a:pathLst>
-                <a:path w="120000" h="120000" extrusionOk="0">
-                  <a:moveTo>
-                    <a:pt x="0" y="60000"/>
-                  </a:moveTo>
-                  <a:cubicBezTo>
-                    <a:pt x="0" y="0"/>
-                    <a:pt x="60000" y="0"/>
-                    <a:pt x="60000" y="0"/>
-                  </a:cubicBezTo>
-                  <a:cubicBezTo>
-                    <a:pt x="120000" y="0"/>
-                    <a:pt x="120000" y="60000"/>
-                    <a:pt x="120000" y="60000"/>
-                  </a:cubicBezTo>
-                  <a:cubicBezTo>
-                    <a:pt x="120000" y="120000"/>
-                    <a:pt x="60000" y="120000"/>
-                    <a:pt x="60000" y="120000"/>
-                  </a:cubicBezTo>
-                  <a:cubicBezTo>
-                    <a:pt x="0" y="120000"/>
-                    <a:pt x="0" y="60000"/>
-                    <a:pt x="0" y="60000"/>
-                  </a:cubicBezTo>
-                  <a:close/>
-                </a:path>
-              </a:pathLst>
-            </a:custGeom>
-            <a:solidFill>
-              <a:srgbClr val="7C9878">
-                <a:alpha val="60000"/>
-              </a:srgbClr>
-            </a:solidFill>
-            <a:ln>
-              <a:noFill/>
-            </a:ln>
-          </p:spPr>
-          <p:txBody>
-            <a:bodyPr spcFirstLastPara="1" wrap="square" lIns="0" tIns="0" rIns="0" bIns="0" anchor="ctr" anchorCtr="0">
-              <a:noAutofit/>
-            </a:bodyPr>
-            <a:lstStyle/>
-            <a:p>
-              <a:pPr marL="0" lvl="0" indent="0" algn="l" rtl="0">
-                <a:spcBef>
-                  <a:spcPts val="0"/>
-                </a:spcBef>
-                <a:spcAft>
-                  <a:spcPts val="0"/>
-                </a:spcAft>
-                <a:buNone/>
-              </a:pPr>
-              <a:endParaRPr/>
-            </a:p>
-          </p:txBody>
-        </p:sp>
-        <p:sp>
-          <p:nvSpPr>
             <p:cNvPr id="63" name="Google Shape;63;p14"/>
             <p:cNvSpPr txBox="1"/>
             <p:nvPr/>
@@ -7901,154 +7753,6 @@
         </p:grpSpPr>
         <p:sp>
           <p:nvSpPr>
-            <p:cNvPr id="330" name="Google Shape;330;p23"/>
-            <p:cNvSpPr/>
-            <p:nvPr/>
-          </p:nvSpPr>
-          <p:spPr>
-            <a:xfrm>
-              <a:off x="0" y="0"/>
-              <a:ext cx="304800" cy="304800"/>
-            </a:xfrm>
-            <a:custGeom>
-              <a:avLst/>
-              <a:gdLst/>
-              <a:ahLst/>
-              <a:cxnLst/>
-              <a:rect l="l" t="t" r="r" b="b"/>
-              <a:pathLst>
-                <a:path w="120000" h="120000" extrusionOk="0">
-                  <a:moveTo>
-                    <a:pt x="0" y="60000"/>
-                  </a:moveTo>
-                  <a:cubicBezTo>
-                    <a:pt x="0" y="0"/>
-                    <a:pt x="60000" y="0"/>
-                    <a:pt x="60000" y="0"/>
-                  </a:cubicBezTo>
-                  <a:cubicBezTo>
-                    <a:pt x="120000" y="0"/>
-                    <a:pt x="120000" y="60000"/>
-                    <a:pt x="120000" y="60000"/>
-                  </a:cubicBezTo>
-                  <a:cubicBezTo>
-                    <a:pt x="120000" y="120000"/>
-                    <a:pt x="60000" y="120000"/>
-                    <a:pt x="60000" y="120000"/>
-                  </a:cubicBezTo>
-                  <a:cubicBezTo>
-                    <a:pt x="0" y="120000"/>
-                    <a:pt x="0" y="60000"/>
-                    <a:pt x="0" y="60000"/>
-                  </a:cubicBezTo>
-                  <a:close/>
-                </a:path>
-              </a:pathLst>
-            </a:custGeom>
-            <a:solidFill>
-              <a:srgbClr val="5A7557">
-                <a:alpha val="80000"/>
-              </a:srgbClr>
-            </a:solidFill>
-            <a:ln>
-              <a:noFill/>
-            </a:ln>
-          </p:spPr>
-          <p:txBody>
-            <a:bodyPr spcFirstLastPara="1" wrap="square" lIns="0" tIns="0" rIns="0" bIns="0" anchor="ctr" anchorCtr="0">
-              <a:noAutofit/>
-            </a:bodyPr>
-            <a:lstStyle/>
-            <a:p>
-              <a:pPr marL="0" lvl="0" indent="0" algn="l" rtl="0">
-                <a:spcBef>
-                  <a:spcPts val="0"/>
-                </a:spcBef>
-                <a:spcAft>
-                  <a:spcPts val="0"/>
-                </a:spcAft>
-                <a:buNone/>
-              </a:pPr>
-              <a:endParaRPr/>
-            </a:p>
-          </p:txBody>
-        </p:sp>
-        <p:sp>
-          <p:nvSpPr>
-            <p:cNvPr id="331" name="Google Shape;331;p23"/>
-            <p:cNvSpPr/>
-            <p:nvPr/>
-          </p:nvSpPr>
-          <p:spPr>
-            <a:xfrm>
-              <a:off x="114300" y="76200"/>
-              <a:ext cx="304800" cy="304800"/>
-            </a:xfrm>
-            <a:custGeom>
-              <a:avLst/>
-              <a:gdLst/>
-              <a:ahLst/>
-              <a:cxnLst/>
-              <a:rect l="l" t="t" r="r" b="b"/>
-              <a:pathLst>
-                <a:path w="120000" h="120000" extrusionOk="0">
-                  <a:moveTo>
-                    <a:pt x="0" y="60000"/>
-                  </a:moveTo>
-                  <a:cubicBezTo>
-                    <a:pt x="0" y="0"/>
-                    <a:pt x="60000" y="0"/>
-                    <a:pt x="60000" y="0"/>
-                  </a:cubicBezTo>
-                  <a:cubicBezTo>
-                    <a:pt x="120000" y="0"/>
-                    <a:pt x="120000" y="60000"/>
-                    <a:pt x="120000" y="60000"/>
-                  </a:cubicBezTo>
-                  <a:cubicBezTo>
-                    <a:pt x="120000" y="120000"/>
-                    <a:pt x="60000" y="120000"/>
-                    <a:pt x="60000" y="120000"/>
-                  </a:cubicBezTo>
-                  <a:cubicBezTo>
-                    <a:pt x="0" y="120000"/>
-                    <a:pt x="0" y="60000"/>
-                    <a:pt x="0" y="60000"/>
-                  </a:cubicBezTo>
-                  <a:close/>
-                </a:path>
-              </a:pathLst>
-            </a:custGeom>
-            <a:solidFill>
-              <a:srgbClr val="7C9878">
-                <a:alpha val="60000"/>
-              </a:srgbClr>
-            </a:solidFill>
-            <a:ln>
-              <a:noFill/>
-            </a:ln>
-          </p:spPr>
-          <p:txBody>
-            <a:bodyPr spcFirstLastPara="1" wrap="square" lIns="0" tIns="0" rIns="0" bIns="0" anchor="ctr" anchorCtr="0">
-              <a:noAutofit/>
-            </a:bodyPr>
-            <a:lstStyle/>
-            <a:p>
-              <a:pPr marL="0" lvl="0" indent="0" algn="l" rtl="0">
-                <a:spcBef>
-                  <a:spcPts val="0"/>
-                </a:spcBef>
-                <a:spcAft>
-                  <a:spcPts val="0"/>
-                </a:spcAft>
-                <a:buNone/>
-              </a:pPr>
-              <a:endParaRPr/>
-            </a:p>
-          </p:txBody>
-        </p:sp>
-        <p:sp>
-          <p:nvSpPr>
             <p:cNvPr id="332" name="Google Shape;332;p23"/>
             <p:cNvSpPr txBox="1"/>
             <p:nvPr/>
@@ -8206,7 +7910,7 @@
                   <a:cs typeface="Noto Sans TC"/>
                   <a:sym typeface="Noto Sans TC"/>
                 </a:rPr>
-                <a:t>▲ TRAP ALERT</a:t>
+                <a:t>TRAP ALERT</a:t>
               </a:r>
               <a:endParaRPr sz="900" b="1">
                 <a:solidFill>
@@ -8401,114 +8105,6 @@
         </p:sp>
         <p:sp>
           <p:nvSpPr>
-            <p:cNvPr id="340" name="Google Shape;340;p23"/>
-            <p:cNvSpPr/>
-            <p:nvPr/>
-          </p:nvSpPr>
-          <p:spPr>
-            <a:xfrm>
-              <a:off x="152400" y="152400"/>
-              <a:ext cx="228600" cy="228600"/>
-            </a:xfrm>
-            <a:prstGeom prst="ellipse">
-              <a:avLst/>
-            </a:prstGeom>
-            <a:solidFill>
-              <a:srgbClr val="C55D4D"/>
-            </a:solidFill>
-            <a:ln>
-              <a:noFill/>
-            </a:ln>
-          </p:spPr>
-          <p:txBody>
-            <a:bodyPr spcFirstLastPara="1" wrap="square" lIns="0" tIns="0" rIns="0" bIns="0" anchor="ctr" anchorCtr="0">
-              <a:noAutofit/>
-            </a:bodyPr>
-            <a:lstStyle/>
-            <a:p>
-              <a:pPr marL="0" lvl="0" indent="0" algn="l" rtl="0">
-                <a:spcBef>
-                  <a:spcPts val="0"/>
-                </a:spcBef>
-                <a:spcAft>
-                  <a:spcPts val="0"/>
-                </a:spcAft>
-                <a:buNone/>
-              </a:pPr>
-              <a:endParaRPr/>
-            </a:p>
-          </p:txBody>
-        </p:sp>
-        <p:sp>
-          <p:nvSpPr>
-            <p:cNvPr id="341" name="Google Shape;341;p23"/>
-            <p:cNvSpPr/>
-            <p:nvPr/>
-          </p:nvSpPr>
-          <p:spPr>
-            <a:xfrm>
-              <a:off x="219075" y="219075"/>
-              <a:ext cx="95400" cy="95400"/>
-            </a:xfrm>
-            <a:custGeom>
-              <a:avLst/>
-              <a:gdLst/>
-              <a:ahLst/>
-              <a:cxnLst/>
-              <a:rect l="l" t="t" r="r" b="b"/>
-              <a:pathLst>
-                <a:path w="120000" h="120000" extrusionOk="0">
-                  <a:moveTo>
-                    <a:pt x="0" y="0"/>
-                  </a:moveTo>
-                  <a:lnTo>
-                    <a:pt x="120000" y="120000"/>
-                  </a:lnTo>
-                  <a:moveTo>
-                    <a:pt x="120000" y="0"/>
-                  </a:moveTo>
-                  <a:lnTo>
-                    <a:pt x="0" y="120000"/>
-                  </a:lnTo>
-                </a:path>
-              </a:pathLst>
-            </a:custGeom>
-            <a:solidFill>
-              <a:srgbClr val="000000">
-                <a:alpha val="0"/>
-              </a:srgbClr>
-            </a:solidFill>
-            <a:ln w="19050" cap="flat" cmpd="sng">
-              <a:solidFill>
-                <a:srgbClr val="FFFFFF"/>
-              </a:solidFill>
-              <a:prstDash val="solid"/>
-              <a:round/>
-              <a:headEnd type="none" w="sm" len="sm"/>
-              <a:tailEnd type="none" w="sm" len="sm"/>
-            </a:ln>
-          </p:spPr>
-          <p:txBody>
-            <a:bodyPr spcFirstLastPara="1" wrap="square" lIns="0" tIns="0" rIns="0" bIns="0" anchor="ctr" anchorCtr="0">
-              <a:noAutofit/>
-            </a:bodyPr>
-            <a:lstStyle/>
-            <a:p>
-              <a:pPr marL="0" lvl="0" indent="0" algn="l" rtl="0">
-                <a:spcBef>
-                  <a:spcPts val="0"/>
-                </a:spcBef>
-                <a:spcAft>
-                  <a:spcPts val="0"/>
-                </a:spcAft>
-                <a:buNone/>
-              </a:pPr>
-              <a:endParaRPr/>
-            </a:p>
-          </p:txBody>
-        </p:sp>
-        <p:sp>
-          <p:nvSpPr>
             <p:cNvPr id="342" name="Google Shape;342;p23"/>
             <p:cNvSpPr txBox="1"/>
             <p:nvPr/>
@@ -8551,7 +8147,7 @@
                   <a:cs typeface="Noto Sans TC"/>
                   <a:sym typeface="Noto Sans TC"/>
                 </a:rPr>
-                <a:t>✘ 常見錯誤</a:t>
+                <a:t>常見錯誤</a:t>
               </a:r>
               <a:endParaRPr sz="1500" b="1">
                 <a:solidFill>
@@ -8726,111 +8322,6 @@
         </p:sp>
         <p:sp>
           <p:nvSpPr>
-            <p:cNvPr id="345" name="Google Shape;345;p23"/>
-            <p:cNvSpPr/>
-            <p:nvPr/>
-          </p:nvSpPr>
-          <p:spPr>
-            <a:xfrm>
-              <a:off x="152400" y="152400"/>
-              <a:ext cx="228600" cy="228600"/>
-            </a:xfrm>
-            <a:prstGeom prst="ellipse">
-              <a:avLst/>
-            </a:prstGeom>
-            <a:solidFill>
-              <a:srgbClr val="5A7557"/>
-            </a:solidFill>
-            <a:ln>
-              <a:noFill/>
-            </a:ln>
-          </p:spPr>
-          <p:txBody>
-            <a:bodyPr spcFirstLastPara="1" wrap="square" lIns="0" tIns="0" rIns="0" bIns="0" anchor="ctr" anchorCtr="0">
-              <a:noAutofit/>
-            </a:bodyPr>
-            <a:lstStyle/>
-            <a:p>
-              <a:pPr marL="0" lvl="0" indent="0" algn="l" rtl="0">
-                <a:spcBef>
-                  <a:spcPts val="0"/>
-                </a:spcBef>
-                <a:spcAft>
-                  <a:spcPts val="0"/>
-                </a:spcAft>
-                <a:buNone/>
-              </a:pPr>
-              <a:endParaRPr/>
-            </a:p>
-          </p:txBody>
-        </p:sp>
-        <p:sp>
-          <p:nvSpPr>
-            <p:cNvPr id="346" name="Google Shape;346;p23"/>
-            <p:cNvSpPr/>
-            <p:nvPr/>
-          </p:nvSpPr>
-          <p:spPr>
-            <a:xfrm>
-              <a:off x="219075" y="219075"/>
-              <a:ext cx="95400" cy="85800"/>
-            </a:xfrm>
-            <a:custGeom>
-              <a:avLst/>
-              <a:gdLst/>
-              <a:ahLst/>
-              <a:cxnLst/>
-              <a:rect l="l" t="t" r="r" b="b"/>
-              <a:pathLst>
-                <a:path w="120000" h="120000" extrusionOk="0">
-                  <a:moveTo>
-                    <a:pt x="0" y="66667"/>
-                  </a:moveTo>
-                  <a:lnTo>
-                    <a:pt x="48000" y="120000"/>
-                  </a:lnTo>
-                  <a:lnTo>
-                    <a:pt x="120000" y="0"/>
-                  </a:lnTo>
-                </a:path>
-              </a:pathLst>
-            </a:custGeom>
-            <a:solidFill>
-              <a:srgbClr val="000000">
-                <a:alpha val="0"/>
-              </a:srgbClr>
-            </a:solidFill>
-            <a:ln w="19050" cap="flat" cmpd="sng">
-              <a:solidFill>
-                <a:srgbClr val="FFFFFF"/>
-              </a:solidFill>
-              <a:prstDash val="solid"/>
-              <a:round/>
-              <a:headEnd type="none" w="sm" len="sm"/>
-              <a:tailEnd type="none" w="sm" len="sm"/>
-            </a:ln>
-          </p:spPr>
-          <p:txBody>
-            <a:bodyPr spcFirstLastPara="1" wrap="square" lIns="0" tIns="0" rIns="0" bIns="0" anchor="ctr" anchorCtr="0">
-              <a:noAutofit/>
-            </a:bodyPr>
-            <a:lstStyle/>
-            <a:p>
-              <a:pPr marL="0" lvl="0" indent="0" algn="l" rtl="0">
-                <a:spcBef>
-                  <a:spcPts val="0"/>
-                </a:spcBef>
-                <a:spcAft>
-                  <a:spcPts val="0"/>
-                </a:spcAft>
-                <a:buNone/>
-              </a:pPr>
-              <a:endParaRPr/>
-            </a:p>
-          </p:txBody>
-        </p:sp>
-        <p:sp>
-          <p:nvSpPr>
             <p:cNvPr id="347" name="Google Shape;347;p23"/>
             <p:cNvSpPr txBox="1"/>
             <p:nvPr/>
@@ -8873,7 +8364,7 @@
                   <a:cs typeface="Noto Sans TC"/>
                   <a:sym typeface="Noto Sans TC"/>
                 </a:rPr>
-                <a:t>■ 正確算法</a:t>
+                <a:t>正確算法</a:t>
               </a:r>
               <a:endParaRPr sz="1500" b="1">
                 <a:solidFill>
@@ -9524,154 +9015,6 @@
           </p:grpSpPr>
           <p:sp>
             <p:nvSpPr>
-              <p:cNvPr id="364" name="Google Shape;364;p24"/>
-              <p:cNvSpPr/>
-              <p:nvPr/>
-            </p:nvSpPr>
-            <p:spPr>
-              <a:xfrm>
-                <a:off x="0" y="0"/>
-                <a:ext cx="304800" cy="304800"/>
-              </a:xfrm>
-              <a:custGeom>
-                <a:avLst/>
-                <a:gdLst/>
-                <a:ahLst/>
-                <a:cxnLst/>
-                <a:rect l="l" t="t" r="r" b="b"/>
-                <a:pathLst>
-                  <a:path w="120000" h="120000" extrusionOk="0">
-                    <a:moveTo>
-                      <a:pt x="0" y="60000"/>
-                    </a:moveTo>
-                    <a:cubicBezTo>
-                      <a:pt x="0" y="0"/>
-                      <a:pt x="60000" y="0"/>
-                      <a:pt x="60000" y="0"/>
-                    </a:cubicBezTo>
-                    <a:cubicBezTo>
-                      <a:pt x="120000" y="0"/>
-                      <a:pt x="120000" y="60000"/>
-                      <a:pt x="120000" y="60000"/>
-                    </a:cubicBezTo>
-                    <a:cubicBezTo>
-                      <a:pt x="120000" y="120000"/>
-                      <a:pt x="60000" y="120000"/>
-                      <a:pt x="60000" y="120000"/>
-                    </a:cubicBezTo>
-                    <a:cubicBezTo>
-                      <a:pt x="0" y="120000"/>
-                      <a:pt x="0" y="60000"/>
-                      <a:pt x="0" y="60000"/>
-                    </a:cubicBezTo>
-                    <a:close/>
-                  </a:path>
-                </a:pathLst>
-              </a:custGeom>
-              <a:solidFill>
-                <a:srgbClr val="5A7557">
-                  <a:alpha val="80000"/>
-                </a:srgbClr>
-              </a:solidFill>
-              <a:ln>
-                <a:noFill/>
-              </a:ln>
-            </p:spPr>
-            <p:txBody>
-              <a:bodyPr spcFirstLastPara="1" wrap="square" lIns="0" tIns="0" rIns="0" bIns="0" anchor="ctr" anchorCtr="0">
-                <a:noAutofit/>
-              </a:bodyPr>
-              <a:lstStyle/>
-              <a:p>
-                <a:pPr marL="0" lvl="0" indent="0" algn="l" rtl="0">
-                  <a:spcBef>
-                    <a:spcPts val="0"/>
-                  </a:spcBef>
-                  <a:spcAft>
-                    <a:spcPts val="0"/>
-                  </a:spcAft>
-                  <a:buNone/>
-                </a:pPr>
-                <a:endParaRPr/>
-              </a:p>
-            </p:txBody>
-          </p:sp>
-          <p:sp>
-            <p:nvSpPr>
-              <p:cNvPr id="365" name="Google Shape;365;p24"/>
-              <p:cNvSpPr/>
-              <p:nvPr/>
-            </p:nvSpPr>
-            <p:spPr>
-              <a:xfrm>
-                <a:off x="114300" y="76200"/>
-                <a:ext cx="304800" cy="304800"/>
-              </a:xfrm>
-              <a:custGeom>
-                <a:avLst/>
-                <a:gdLst/>
-                <a:ahLst/>
-                <a:cxnLst/>
-                <a:rect l="l" t="t" r="r" b="b"/>
-                <a:pathLst>
-                  <a:path w="120000" h="120000" extrusionOk="0">
-                    <a:moveTo>
-                      <a:pt x="0" y="60000"/>
-                    </a:moveTo>
-                    <a:cubicBezTo>
-                      <a:pt x="0" y="0"/>
-                      <a:pt x="60000" y="0"/>
-                      <a:pt x="60000" y="0"/>
-                    </a:cubicBezTo>
-                    <a:cubicBezTo>
-                      <a:pt x="120000" y="0"/>
-                      <a:pt x="120000" y="60000"/>
-                      <a:pt x="120000" y="60000"/>
-                    </a:cubicBezTo>
-                    <a:cubicBezTo>
-                      <a:pt x="120000" y="120000"/>
-                      <a:pt x="60000" y="120000"/>
-                      <a:pt x="60000" y="120000"/>
-                    </a:cubicBezTo>
-                    <a:cubicBezTo>
-                      <a:pt x="0" y="120000"/>
-                      <a:pt x="0" y="60000"/>
-                      <a:pt x="0" y="60000"/>
-                    </a:cubicBezTo>
-                    <a:close/>
-                  </a:path>
-                </a:pathLst>
-              </a:custGeom>
-              <a:solidFill>
-                <a:srgbClr val="7C9878">
-                  <a:alpha val="60000"/>
-                </a:srgbClr>
-              </a:solidFill>
-              <a:ln>
-                <a:noFill/>
-              </a:ln>
-            </p:spPr>
-            <p:txBody>
-              <a:bodyPr spcFirstLastPara="1" wrap="square" lIns="0" tIns="0" rIns="0" bIns="0" anchor="ctr" anchorCtr="0">
-                <a:noAutofit/>
-              </a:bodyPr>
-              <a:lstStyle/>
-              <a:p>
-                <a:pPr marL="0" lvl="0" indent="0" algn="l" rtl="0">
-                  <a:spcBef>
-                    <a:spcPts val="0"/>
-                  </a:spcBef>
-                  <a:spcAft>
-                    <a:spcPts val="0"/>
-                  </a:spcAft>
-                  <a:buNone/>
-                </a:pPr>
-                <a:endParaRPr/>
-              </a:p>
-            </p:txBody>
-          </p:sp>
-          <p:sp>
-            <p:nvSpPr>
               <p:cNvPr id="366" name="Google Shape;366;p24"/>
               <p:cNvSpPr txBox="1"/>
               <p:nvPr/>
@@ -9743,48 +9086,6 @@
               <a:chExt cx="7772400" cy="952500"/>
             </a:xfrm>
           </p:grpSpPr>
-          <p:sp>
-            <p:nvSpPr>
-              <p:cNvPr id="368" name="Google Shape;368;p24"/>
-              <p:cNvSpPr/>
-              <p:nvPr/>
-            </p:nvSpPr>
-            <p:spPr>
-              <a:xfrm>
-                <a:off x="0" y="76200"/>
-                <a:ext cx="38100" cy="228600"/>
-              </a:xfrm>
-              <a:prstGeom prst="roundRect">
-                <a:avLst>
-                  <a:gd name="adj" fmla="val 50000"/>
-                </a:avLst>
-              </a:prstGeom>
-              <a:solidFill>
-                <a:srgbClr val="5A7557"/>
-              </a:solidFill>
-              <a:ln>
-                <a:noFill/>
-              </a:ln>
-            </p:spPr>
-            <p:txBody>
-              <a:bodyPr spcFirstLastPara="1" wrap="square" lIns="0" tIns="0" rIns="0" bIns="0" anchor="ctr" anchorCtr="0">
-                <a:noAutofit/>
-              </a:bodyPr>
-              <a:lstStyle/>
-              <a:p>
-                <a:pPr marL="0" lvl="0" indent="0" algn="l" rtl="0">
-                  <a:spcBef>
-                    <a:spcPts val="0"/>
-                  </a:spcBef>
-                  <a:spcAft>
-                    <a:spcPts val="0"/>
-                  </a:spcAft>
-                  <a:buNone/>
-                </a:pPr>
-                <a:endParaRPr/>
-              </a:p>
-            </p:txBody>
-          </p:sp>
           <p:sp>
             <p:nvSpPr>
               <p:cNvPr id="369" name="Google Shape;369;p24"/>
@@ -9861,7 +9162,7 @@
                     <a:cs typeface="Noto Sans TC"/>
                     <a:sym typeface="Noto Sans TC"/>
                   </a:rPr>
-                  <a:t>恭喜老闆 首年免暫繳 ★</a:t>
+                  <a:t>恭喜老闆 首年免暫繳 </a:t>
                 </a:r>
                 <a:endParaRPr sz="2700" b="1">
                   <a:solidFill>
@@ -10182,7 +9483,7 @@
                       <a:cs typeface="Noto Sans TC"/>
                       <a:sym typeface="Noto Sans TC"/>
                     </a:rPr>
-                    <a:t>▲ 溫馨提醒：第二年 9 月起就要提前準備。</a:t>
+                    <a:t>溫馨提醒：第二年 9 月起就要提前準備。</a:t>
                   </a:r>
                   <a:endParaRPr sz="1050" b="1">
                     <a:solidFill>
@@ -10468,154 +9769,6 @@
         </p:grpSpPr>
         <p:sp>
           <p:nvSpPr>
-            <p:cNvPr id="385" name="Google Shape;385;p25"/>
-            <p:cNvSpPr/>
-            <p:nvPr/>
-          </p:nvSpPr>
-          <p:spPr>
-            <a:xfrm>
-              <a:off x="0" y="0"/>
-              <a:ext cx="304800" cy="304800"/>
-            </a:xfrm>
-            <a:custGeom>
-              <a:avLst/>
-              <a:gdLst/>
-              <a:ahLst/>
-              <a:cxnLst/>
-              <a:rect l="l" t="t" r="r" b="b"/>
-              <a:pathLst>
-                <a:path w="120000" h="120000" extrusionOk="0">
-                  <a:moveTo>
-                    <a:pt x="0" y="60000"/>
-                  </a:moveTo>
-                  <a:cubicBezTo>
-                    <a:pt x="0" y="0"/>
-                    <a:pt x="60000" y="0"/>
-                    <a:pt x="60000" y="0"/>
-                  </a:cubicBezTo>
-                  <a:cubicBezTo>
-                    <a:pt x="120000" y="0"/>
-                    <a:pt x="120000" y="60000"/>
-                    <a:pt x="120000" y="60000"/>
-                  </a:cubicBezTo>
-                  <a:cubicBezTo>
-                    <a:pt x="120000" y="120000"/>
-                    <a:pt x="60000" y="120000"/>
-                    <a:pt x="60000" y="120000"/>
-                  </a:cubicBezTo>
-                  <a:cubicBezTo>
-                    <a:pt x="0" y="120000"/>
-                    <a:pt x="0" y="60000"/>
-                    <a:pt x="0" y="60000"/>
-                  </a:cubicBezTo>
-                  <a:close/>
-                </a:path>
-              </a:pathLst>
-            </a:custGeom>
-            <a:solidFill>
-              <a:srgbClr val="5A7557">
-                <a:alpha val="80000"/>
-              </a:srgbClr>
-            </a:solidFill>
-            <a:ln>
-              <a:noFill/>
-            </a:ln>
-          </p:spPr>
-          <p:txBody>
-            <a:bodyPr spcFirstLastPara="1" wrap="square" lIns="0" tIns="0" rIns="0" bIns="0" anchor="ctr" anchorCtr="0">
-              <a:noAutofit/>
-            </a:bodyPr>
-            <a:lstStyle/>
-            <a:p>
-              <a:pPr marL="0" lvl="0" indent="0" algn="l" rtl="0">
-                <a:spcBef>
-                  <a:spcPts val="0"/>
-                </a:spcBef>
-                <a:spcAft>
-                  <a:spcPts val="0"/>
-                </a:spcAft>
-                <a:buNone/>
-              </a:pPr>
-              <a:endParaRPr/>
-            </a:p>
-          </p:txBody>
-        </p:sp>
-        <p:sp>
-          <p:nvSpPr>
-            <p:cNvPr id="386" name="Google Shape;386;p25"/>
-            <p:cNvSpPr/>
-            <p:nvPr/>
-          </p:nvSpPr>
-          <p:spPr>
-            <a:xfrm>
-              <a:off x="114300" y="76200"/>
-              <a:ext cx="304800" cy="304800"/>
-            </a:xfrm>
-            <a:custGeom>
-              <a:avLst/>
-              <a:gdLst/>
-              <a:ahLst/>
-              <a:cxnLst/>
-              <a:rect l="l" t="t" r="r" b="b"/>
-              <a:pathLst>
-                <a:path w="120000" h="120000" extrusionOk="0">
-                  <a:moveTo>
-                    <a:pt x="0" y="60000"/>
-                  </a:moveTo>
-                  <a:cubicBezTo>
-                    <a:pt x="0" y="0"/>
-                    <a:pt x="60000" y="0"/>
-                    <a:pt x="60000" y="0"/>
-                  </a:cubicBezTo>
-                  <a:cubicBezTo>
-                    <a:pt x="120000" y="0"/>
-                    <a:pt x="120000" y="60000"/>
-                    <a:pt x="120000" y="60000"/>
-                  </a:cubicBezTo>
-                  <a:cubicBezTo>
-                    <a:pt x="120000" y="120000"/>
-                    <a:pt x="60000" y="120000"/>
-                    <a:pt x="60000" y="120000"/>
-                  </a:cubicBezTo>
-                  <a:cubicBezTo>
-                    <a:pt x="0" y="120000"/>
-                    <a:pt x="0" y="60000"/>
-                    <a:pt x="0" y="60000"/>
-                  </a:cubicBezTo>
-                  <a:close/>
-                </a:path>
-              </a:pathLst>
-            </a:custGeom>
-            <a:solidFill>
-              <a:srgbClr val="7C9878">
-                <a:alpha val="60000"/>
-              </a:srgbClr>
-            </a:solidFill>
-            <a:ln>
-              <a:noFill/>
-            </a:ln>
-          </p:spPr>
-          <p:txBody>
-            <a:bodyPr spcFirstLastPara="1" wrap="square" lIns="0" tIns="0" rIns="0" bIns="0" anchor="ctr" anchorCtr="0">
-              <a:noAutofit/>
-            </a:bodyPr>
-            <a:lstStyle/>
-            <a:p>
-              <a:pPr marL="0" lvl="0" indent="0" algn="l" rtl="0">
-                <a:spcBef>
-                  <a:spcPts val="0"/>
-                </a:spcBef>
-                <a:spcAft>
-                  <a:spcPts val="0"/>
-                </a:spcAft>
-                <a:buNone/>
-              </a:pPr>
-              <a:endParaRPr/>
-            </a:p>
-          </p:txBody>
-        </p:sp>
-        <p:sp>
-          <p:nvSpPr>
             <p:cNvPr id="387" name="Google Shape;387;p25"/>
             <p:cNvSpPr txBox="1"/>
             <p:nvPr/>
@@ -10687,48 +9840,6 @@
             <a:chExt cx="6819900" cy="952500"/>
           </a:xfrm>
         </p:grpSpPr>
-        <p:sp>
-          <p:nvSpPr>
-            <p:cNvPr id="389" name="Google Shape;389;p25"/>
-            <p:cNvSpPr/>
-            <p:nvPr/>
-          </p:nvSpPr>
-          <p:spPr>
-            <a:xfrm>
-              <a:off x="0" y="76200"/>
-              <a:ext cx="38100" cy="228600"/>
-            </a:xfrm>
-            <a:prstGeom prst="roundRect">
-              <a:avLst>
-                <a:gd name="adj" fmla="val 50000"/>
-              </a:avLst>
-            </a:prstGeom>
-            <a:solidFill>
-              <a:srgbClr val="5A7557"/>
-            </a:solidFill>
-            <a:ln>
-              <a:noFill/>
-            </a:ln>
-          </p:spPr>
-          <p:txBody>
-            <a:bodyPr spcFirstLastPara="1" wrap="square" lIns="0" tIns="0" rIns="0" bIns="0" anchor="ctr" anchorCtr="0">
-              <a:noAutofit/>
-            </a:bodyPr>
-            <a:lstStyle/>
-            <a:p>
-              <a:pPr marL="0" lvl="0" indent="0" algn="l" rtl="0">
-                <a:spcBef>
-                  <a:spcPts val="0"/>
-                </a:spcBef>
-                <a:spcAft>
-                  <a:spcPts val="0"/>
-                </a:spcAft>
-                <a:buNone/>
-              </a:pPr>
-              <a:endParaRPr/>
-            </a:p>
-          </p:txBody>
-        </p:sp>
         <p:sp>
           <p:nvSpPr>
             <p:cNvPr id="390" name="Google Shape;390;p25"/>
@@ -10882,126 +9993,6 @@
             </a:p>
           </p:txBody>
         </p:sp>
-        <p:grpSp>
-          <p:nvGrpSpPr>
-            <p:cNvPr id="393" name="Google Shape;393;p25"/>
-            <p:cNvGrpSpPr/>
-            <p:nvPr/>
-          </p:nvGrpSpPr>
-          <p:grpSpPr>
-            <a:xfrm>
-              <a:off x="228600" y="228600"/>
-              <a:ext cx="228600" cy="228600"/>
-              <a:chOff x="0" y="0"/>
-              <a:chExt cx="228600" cy="228600"/>
-            </a:xfrm>
-          </p:grpSpPr>
-          <p:sp>
-            <p:nvSpPr>
-              <p:cNvPr id="394" name="Google Shape;394;p25"/>
-              <p:cNvSpPr/>
-              <p:nvPr/>
-            </p:nvSpPr>
-            <p:spPr>
-              <a:xfrm>
-                <a:off x="0" y="0"/>
-                <a:ext cx="228600" cy="228600"/>
-              </a:xfrm>
-              <a:prstGeom prst="ellipse">
-                <a:avLst/>
-              </a:prstGeom>
-              <a:solidFill>
-                <a:srgbClr val="5A7557"/>
-              </a:solidFill>
-              <a:ln>
-                <a:noFill/>
-              </a:ln>
-            </p:spPr>
-            <p:txBody>
-              <a:bodyPr spcFirstLastPara="1" wrap="square" lIns="0" tIns="0" rIns="0" bIns="0" anchor="ctr" anchorCtr="0">
-                <a:noAutofit/>
-              </a:bodyPr>
-              <a:lstStyle/>
-              <a:p>
-                <a:pPr marL="0" lvl="0" indent="0" algn="l" rtl="0">
-                  <a:spcBef>
-                    <a:spcPts val="0"/>
-                  </a:spcBef>
-                  <a:spcAft>
-                    <a:spcPts val="0"/>
-                  </a:spcAft>
-                  <a:buNone/>
-                </a:pPr>
-                <a:endParaRPr/>
-              </a:p>
-            </p:txBody>
-          </p:sp>
-          <p:sp>
-            <p:nvSpPr>
-              <p:cNvPr id="395" name="Google Shape;395;p25"/>
-              <p:cNvSpPr/>
-              <p:nvPr/>
-            </p:nvSpPr>
-            <p:spPr>
-              <a:xfrm>
-                <a:off x="66675" y="76200"/>
-                <a:ext cx="95400" cy="76200"/>
-              </a:xfrm>
-              <a:custGeom>
-                <a:avLst/>
-                <a:gdLst/>
-                <a:ahLst/>
-                <a:cxnLst/>
-                <a:rect l="l" t="t" r="r" b="b"/>
-                <a:pathLst>
-                  <a:path w="120000" h="120000" extrusionOk="0">
-                    <a:moveTo>
-                      <a:pt x="0" y="60000"/>
-                    </a:moveTo>
-                    <a:lnTo>
-                      <a:pt x="48000" y="120000"/>
-                    </a:lnTo>
-                    <a:lnTo>
-                      <a:pt x="120000" y="0"/>
-                    </a:lnTo>
-                  </a:path>
-                </a:pathLst>
-              </a:custGeom>
-              <a:solidFill>
-                <a:srgbClr val="000000">
-                  <a:alpha val="0"/>
-                </a:srgbClr>
-              </a:solidFill>
-              <a:ln w="19050" cap="flat" cmpd="sng">
-                <a:solidFill>
-                  <a:srgbClr val="FFFFFF"/>
-                </a:solidFill>
-                <a:prstDash val="solid"/>
-                <a:round/>
-                <a:headEnd type="none" w="sm" len="sm"/>
-                <a:tailEnd type="none" w="sm" len="sm"/>
-              </a:ln>
-            </p:spPr>
-            <p:txBody>
-              <a:bodyPr spcFirstLastPara="1" wrap="square" lIns="0" tIns="0" rIns="0" bIns="0" anchor="ctr" anchorCtr="0">
-                <a:noAutofit/>
-              </a:bodyPr>
-              <a:lstStyle/>
-              <a:p>
-                <a:pPr marL="0" lvl="0" indent="0" algn="l" rtl="0">
-                  <a:spcBef>
-                    <a:spcPts val="0"/>
-                  </a:spcBef>
-                  <a:spcAft>
-                    <a:spcPts val="0"/>
-                  </a:spcAft>
-                  <a:buNone/>
-                </a:pPr>
-                <a:endParaRPr/>
-              </a:p>
-            </p:txBody>
-          </p:sp>
-        </p:grpSp>
         <p:sp>
           <p:nvSpPr>
             <p:cNvPr id="396" name="Google Shape;396;p25"/>
@@ -11046,7 +10037,7 @@
                   <a:cs typeface="Noto Sans TC"/>
                   <a:sym typeface="Noto Sans TC"/>
                 </a:rPr>
-                <a:t>■ 合法拿錢</a:t>
+                <a:t>合法拿錢</a:t>
               </a:r>
               <a:endParaRPr sz="1350" b="1">
                 <a:solidFill>
@@ -11350,129 +10341,6 @@
             </a:p>
           </p:txBody>
         </p:sp>
-        <p:grpSp>
-          <p:nvGrpSpPr>
-            <p:cNvPr id="402" name="Google Shape;402;p25"/>
-            <p:cNvGrpSpPr/>
-            <p:nvPr/>
-          </p:nvGrpSpPr>
-          <p:grpSpPr>
-            <a:xfrm>
-              <a:off x="228600" y="228600"/>
-              <a:ext cx="228600" cy="228600"/>
-              <a:chOff x="0" y="0"/>
-              <a:chExt cx="228600" cy="228600"/>
-            </a:xfrm>
-          </p:grpSpPr>
-          <p:sp>
-            <p:nvSpPr>
-              <p:cNvPr id="403" name="Google Shape;403;p25"/>
-              <p:cNvSpPr/>
-              <p:nvPr/>
-            </p:nvSpPr>
-            <p:spPr>
-              <a:xfrm>
-                <a:off x="0" y="0"/>
-                <a:ext cx="228600" cy="228600"/>
-              </a:xfrm>
-              <a:prstGeom prst="ellipse">
-                <a:avLst/>
-              </a:prstGeom>
-              <a:solidFill>
-                <a:srgbClr val="C55D4D"/>
-              </a:solidFill>
-              <a:ln>
-                <a:noFill/>
-              </a:ln>
-            </p:spPr>
-            <p:txBody>
-              <a:bodyPr spcFirstLastPara="1" wrap="square" lIns="0" tIns="0" rIns="0" bIns="0" anchor="ctr" anchorCtr="0">
-                <a:noAutofit/>
-              </a:bodyPr>
-              <a:lstStyle/>
-              <a:p>
-                <a:pPr marL="0" lvl="0" indent="0" algn="l" rtl="0">
-                  <a:spcBef>
-                    <a:spcPts val="0"/>
-                  </a:spcBef>
-                  <a:spcAft>
-                    <a:spcPts val="0"/>
-                  </a:spcAft>
-                  <a:buNone/>
-                </a:pPr>
-                <a:endParaRPr/>
-              </a:p>
-            </p:txBody>
-          </p:sp>
-          <p:sp>
-            <p:nvSpPr>
-              <p:cNvPr id="404" name="Google Shape;404;p25"/>
-              <p:cNvSpPr/>
-              <p:nvPr/>
-            </p:nvSpPr>
-            <p:spPr>
-              <a:xfrm>
-                <a:off x="66675" y="66675"/>
-                <a:ext cx="95400" cy="95400"/>
-              </a:xfrm>
-              <a:custGeom>
-                <a:avLst/>
-                <a:gdLst/>
-                <a:ahLst/>
-                <a:cxnLst/>
-                <a:rect l="l" t="t" r="r" b="b"/>
-                <a:pathLst>
-                  <a:path w="120000" h="120000" extrusionOk="0">
-                    <a:moveTo>
-                      <a:pt x="0" y="0"/>
-                    </a:moveTo>
-                    <a:lnTo>
-                      <a:pt x="120000" y="120000"/>
-                    </a:lnTo>
-                    <a:moveTo>
-                      <a:pt x="120000" y="0"/>
-                    </a:moveTo>
-                    <a:lnTo>
-                      <a:pt x="0" y="120000"/>
-                    </a:lnTo>
-                  </a:path>
-                </a:pathLst>
-              </a:custGeom>
-              <a:solidFill>
-                <a:srgbClr val="000000">
-                  <a:alpha val="0"/>
-                </a:srgbClr>
-              </a:solidFill>
-              <a:ln w="19050" cap="flat" cmpd="sng">
-                <a:solidFill>
-                  <a:srgbClr val="FFFFFF"/>
-                </a:solidFill>
-                <a:prstDash val="solid"/>
-                <a:round/>
-                <a:headEnd type="none" w="sm" len="sm"/>
-                <a:tailEnd type="none" w="sm" len="sm"/>
-              </a:ln>
-            </p:spPr>
-            <p:txBody>
-              <a:bodyPr spcFirstLastPara="1" wrap="square" lIns="0" tIns="0" rIns="0" bIns="0" anchor="ctr" anchorCtr="0">
-                <a:noAutofit/>
-              </a:bodyPr>
-              <a:lstStyle/>
-              <a:p>
-                <a:pPr marL="0" lvl="0" indent="0" algn="l" rtl="0">
-                  <a:spcBef>
-                    <a:spcPts val="0"/>
-                  </a:spcBef>
-                  <a:spcAft>
-                    <a:spcPts val="0"/>
-                  </a:spcAft>
-                  <a:buNone/>
-                </a:pPr>
-                <a:endParaRPr/>
-              </a:p>
-            </p:txBody>
-          </p:sp>
-        </p:grpSp>
         <p:sp>
           <p:nvSpPr>
             <p:cNvPr id="405" name="Google Shape;405;p25"/>
@@ -11517,7 +10385,7 @@
                   <a:cs typeface="Noto Sans TC"/>
                   <a:sym typeface="Noto Sans TC"/>
                 </a:rPr>
-                <a:t>✘ 違法拿錢</a:t>
+                <a:t>違法拿錢</a:t>
               </a:r>
               <a:endParaRPr sz="1350" b="1">
                 <a:solidFill>
@@ -11951,154 +10819,6 @@
         </p:grpSpPr>
         <p:sp>
           <p:nvSpPr>
-            <p:cNvPr id="417" name="Google Shape;417;p26"/>
-            <p:cNvSpPr/>
-            <p:nvPr/>
-          </p:nvSpPr>
-          <p:spPr>
-            <a:xfrm>
-              <a:off x="0" y="0"/>
-              <a:ext cx="304800" cy="304800"/>
-            </a:xfrm>
-            <a:custGeom>
-              <a:avLst/>
-              <a:gdLst/>
-              <a:ahLst/>
-              <a:cxnLst/>
-              <a:rect l="l" t="t" r="r" b="b"/>
-              <a:pathLst>
-                <a:path w="120000" h="120000" extrusionOk="0">
-                  <a:moveTo>
-                    <a:pt x="0" y="60000"/>
-                  </a:moveTo>
-                  <a:cubicBezTo>
-                    <a:pt x="0" y="0"/>
-                    <a:pt x="60000" y="0"/>
-                    <a:pt x="60000" y="0"/>
-                  </a:cubicBezTo>
-                  <a:cubicBezTo>
-                    <a:pt x="120000" y="0"/>
-                    <a:pt x="120000" y="60000"/>
-                    <a:pt x="120000" y="60000"/>
-                  </a:cubicBezTo>
-                  <a:cubicBezTo>
-                    <a:pt x="120000" y="120000"/>
-                    <a:pt x="60000" y="120000"/>
-                    <a:pt x="60000" y="120000"/>
-                  </a:cubicBezTo>
-                  <a:cubicBezTo>
-                    <a:pt x="0" y="120000"/>
-                    <a:pt x="0" y="60000"/>
-                    <a:pt x="0" y="60000"/>
-                  </a:cubicBezTo>
-                  <a:close/>
-                </a:path>
-              </a:pathLst>
-            </a:custGeom>
-            <a:solidFill>
-              <a:srgbClr val="5A7557">
-                <a:alpha val="80000"/>
-              </a:srgbClr>
-            </a:solidFill>
-            <a:ln>
-              <a:noFill/>
-            </a:ln>
-          </p:spPr>
-          <p:txBody>
-            <a:bodyPr spcFirstLastPara="1" wrap="square" lIns="0" tIns="0" rIns="0" bIns="0" anchor="ctr" anchorCtr="0">
-              <a:noAutofit/>
-            </a:bodyPr>
-            <a:lstStyle/>
-            <a:p>
-              <a:pPr marL="0" lvl="0" indent="0" algn="l" rtl="0">
-                <a:spcBef>
-                  <a:spcPts val="0"/>
-                </a:spcBef>
-                <a:spcAft>
-                  <a:spcPts val="0"/>
-                </a:spcAft>
-                <a:buNone/>
-              </a:pPr>
-              <a:endParaRPr/>
-            </a:p>
-          </p:txBody>
-        </p:sp>
-        <p:sp>
-          <p:nvSpPr>
-            <p:cNvPr id="418" name="Google Shape;418;p26"/>
-            <p:cNvSpPr/>
-            <p:nvPr/>
-          </p:nvSpPr>
-          <p:spPr>
-            <a:xfrm>
-              <a:off x="114300" y="76200"/>
-              <a:ext cx="304800" cy="304800"/>
-            </a:xfrm>
-            <a:custGeom>
-              <a:avLst/>
-              <a:gdLst/>
-              <a:ahLst/>
-              <a:cxnLst/>
-              <a:rect l="l" t="t" r="r" b="b"/>
-              <a:pathLst>
-                <a:path w="120000" h="120000" extrusionOk="0">
-                  <a:moveTo>
-                    <a:pt x="0" y="60000"/>
-                  </a:moveTo>
-                  <a:cubicBezTo>
-                    <a:pt x="0" y="0"/>
-                    <a:pt x="60000" y="0"/>
-                    <a:pt x="60000" y="0"/>
-                  </a:cubicBezTo>
-                  <a:cubicBezTo>
-                    <a:pt x="120000" y="0"/>
-                    <a:pt x="120000" y="60000"/>
-                    <a:pt x="120000" y="60000"/>
-                  </a:cubicBezTo>
-                  <a:cubicBezTo>
-                    <a:pt x="120000" y="120000"/>
-                    <a:pt x="60000" y="120000"/>
-                    <a:pt x="60000" y="120000"/>
-                  </a:cubicBezTo>
-                  <a:cubicBezTo>
-                    <a:pt x="0" y="120000"/>
-                    <a:pt x="0" y="60000"/>
-                    <a:pt x="0" y="60000"/>
-                  </a:cubicBezTo>
-                  <a:close/>
-                </a:path>
-              </a:pathLst>
-            </a:custGeom>
-            <a:solidFill>
-              <a:srgbClr val="7C9878">
-                <a:alpha val="60000"/>
-              </a:srgbClr>
-            </a:solidFill>
-            <a:ln>
-              <a:noFill/>
-            </a:ln>
-          </p:spPr>
-          <p:txBody>
-            <a:bodyPr spcFirstLastPara="1" wrap="square" lIns="0" tIns="0" rIns="0" bIns="0" anchor="ctr" anchorCtr="0">
-              <a:noAutofit/>
-            </a:bodyPr>
-            <a:lstStyle/>
-            <a:p>
-              <a:pPr marL="0" lvl="0" indent="0" algn="l" rtl="0">
-                <a:spcBef>
-                  <a:spcPts val="0"/>
-                </a:spcBef>
-                <a:spcAft>
-                  <a:spcPts val="0"/>
-                </a:spcAft>
-                <a:buNone/>
-              </a:pPr>
-              <a:endParaRPr/>
-            </a:p>
-          </p:txBody>
-        </p:sp>
-        <p:sp>
-          <p:nvSpPr>
             <p:cNvPr id="419" name="Google Shape;419;p26"/>
             <p:cNvSpPr txBox="1"/>
             <p:nvPr/>
@@ -12170,48 +10890,6 @@
             <a:chExt cx="7772400" cy="762000"/>
           </a:xfrm>
         </p:grpSpPr>
-        <p:sp>
-          <p:nvSpPr>
-            <p:cNvPr id="421" name="Google Shape;421;p26"/>
-            <p:cNvSpPr/>
-            <p:nvPr/>
-          </p:nvSpPr>
-          <p:spPr>
-            <a:xfrm>
-              <a:off x="0" y="76200"/>
-              <a:ext cx="38100" cy="228600"/>
-            </a:xfrm>
-            <a:prstGeom prst="roundRect">
-              <a:avLst>
-                <a:gd name="adj" fmla="val 50000"/>
-              </a:avLst>
-            </a:prstGeom>
-            <a:solidFill>
-              <a:srgbClr val="5A7557"/>
-            </a:solidFill>
-            <a:ln>
-              <a:noFill/>
-            </a:ln>
-          </p:spPr>
-          <p:txBody>
-            <a:bodyPr spcFirstLastPara="1" wrap="square" lIns="0" tIns="0" rIns="0" bIns="0" anchor="ctr" anchorCtr="0">
-              <a:noAutofit/>
-            </a:bodyPr>
-            <a:lstStyle/>
-            <a:p>
-              <a:pPr marL="0" lvl="0" indent="0" algn="l" rtl="0">
-                <a:spcBef>
-                  <a:spcPts val="0"/>
-                </a:spcBef>
-                <a:spcAft>
-                  <a:spcPts val="0"/>
-                </a:spcAft>
-                <a:buNone/>
-              </a:pPr>
-              <a:endParaRPr/>
-            </a:p>
-          </p:txBody>
-        </p:sp>
         <p:sp>
           <p:nvSpPr>
             <p:cNvPr id="422" name="Google Shape;422;p26"/>
@@ -12551,7 +11229,7 @@
                   <a:cs typeface="Noto Sans TC"/>
                   <a:sym typeface="Noto Sans TC"/>
                 </a:rPr>
-                <a:t>★ 節稅解法：實質投資</a:t>
+                <a:t>節稅解法：實質投資</a:t>
               </a:r>
               <a:endParaRPr sz="1500" b="1">
                 <a:solidFill>
@@ -13068,154 +11746,6 @@
         </p:grpSpPr>
         <p:sp>
           <p:nvSpPr>
-            <p:cNvPr id="442" name="Google Shape;442;p27"/>
-            <p:cNvSpPr/>
-            <p:nvPr/>
-          </p:nvSpPr>
-          <p:spPr>
-            <a:xfrm>
-              <a:off x="0" y="0"/>
-              <a:ext cx="304800" cy="304800"/>
-            </a:xfrm>
-            <a:custGeom>
-              <a:avLst/>
-              <a:gdLst/>
-              <a:ahLst/>
-              <a:cxnLst/>
-              <a:rect l="l" t="t" r="r" b="b"/>
-              <a:pathLst>
-                <a:path w="120000" h="120000" extrusionOk="0">
-                  <a:moveTo>
-                    <a:pt x="0" y="60000"/>
-                  </a:moveTo>
-                  <a:cubicBezTo>
-                    <a:pt x="0" y="0"/>
-                    <a:pt x="60000" y="0"/>
-                    <a:pt x="60000" y="0"/>
-                  </a:cubicBezTo>
-                  <a:cubicBezTo>
-                    <a:pt x="120000" y="0"/>
-                    <a:pt x="120000" y="60000"/>
-                    <a:pt x="120000" y="60000"/>
-                  </a:cubicBezTo>
-                  <a:cubicBezTo>
-                    <a:pt x="120000" y="120000"/>
-                    <a:pt x="60000" y="120000"/>
-                    <a:pt x="60000" y="120000"/>
-                  </a:cubicBezTo>
-                  <a:cubicBezTo>
-                    <a:pt x="0" y="120000"/>
-                    <a:pt x="0" y="60000"/>
-                    <a:pt x="0" y="60000"/>
-                  </a:cubicBezTo>
-                  <a:close/>
-                </a:path>
-              </a:pathLst>
-            </a:custGeom>
-            <a:solidFill>
-              <a:srgbClr val="5A7557">
-                <a:alpha val="80000"/>
-              </a:srgbClr>
-            </a:solidFill>
-            <a:ln>
-              <a:noFill/>
-            </a:ln>
-          </p:spPr>
-          <p:txBody>
-            <a:bodyPr spcFirstLastPara="1" wrap="square" lIns="0" tIns="0" rIns="0" bIns="0" anchor="ctr" anchorCtr="0">
-              <a:noAutofit/>
-            </a:bodyPr>
-            <a:lstStyle/>
-            <a:p>
-              <a:pPr marL="0" lvl="0" indent="0" algn="l" rtl="0">
-                <a:spcBef>
-                  <a:spcPts val="0"/>
-                </a:spcBef>
-                <a:spcAft>
-                  <a:spcPts val="0"/>
-                </a:spcAft>
-                <a:buNone/>
-              </a:pPr>
-              <a:endParaRPr/>
-            </a:p>
-          </p:txBody>
-        </p:sp>
-        <p:sp>
-          <p:nvSpPr>
-            <p:cNvPr id="443" name="Google Shape;443;p27"/>
-            <p:cNvSpPr/>
-            <p:nvPr/>
-          </p:nvSpPr>
-          <p:spPr>
-            <a:xfrm>
-              <a:off x="114300" y="76200"/>
-              <a:ext cx="304800" cy="304800"/>
-            </a:xfrm>
-            <a:custGeom>
-              <a:avLst/>
-              <a:gdLst/>
-              <a:ahLst/>
-              <a:cxnLst/>
-              <a:rect l="l" t="t" r="r" b="b"/>
-              <a:pathLst>
-                <a:path w="120000" h="120000" extrusionOk="0">
-                  <a:moveTo>
-                    <a:pt x="0" y="60000"/>
-                  </a:moveTo>
-                  <a:cubicBezTo>
-                    <a:pt x="0" y="0"/>
-                    <a:pt x="60000" y="0"/>
-                    <a:pt x="60000" y="0"/>
-                  </a:cubicBezTo>
-                  <a:cubicBezTo>
-                    <a:pt x="120000" y="0"/>
-                    <a:pt x="120000" y="60000"/>
-                    <a:pt x="120000" y="60000"/>
-                  </a:cubicBezTo>
-                  <a:cubicBezTo>
-                    <a:pt x="120000" y="120000"/>
-                    <a:pt x="60000" y="120000"/>
-                    <a:pt x="60000" y="120000"/>
-                  </a:cubicBezTo>
-                  <a:cubicBezTo>
-                    <a:pt x="0" y="120000"/>
-                    <a:pt x="0" y="60000"/>
-                    <a:pt x="0" y="60000"/>
-                  </a:cubicBezTo>
-                  <a:close/>
-                </a:path>
-              </a:pathLst>
-            </a:custGeom>
-            <a:solidFill>
-              <a:srgbClr val="7C9878">
-                <a:alpha val="60000"/>
-              </a:srgbClr>
-            </a:solidFill>
-            <a:ln>
-              <a:noFill/>
-            </a:ln>
-          </p:spPr>
-          <p:txBody>
-            <a:bodyPr spcFirstLastPara="1" wrap="square" lIns="0" tIns="0" rIns="0" bIns="0" anchor="ctr" anchorCtr="0">
-              <a:noAutofit/>
-            </a:bodyPr>
-            <a:lstStyle/>
-            <a:p>
-              <a:pPr marL="0" lvl="0" indent="0" algn="l" rtl="0">
-                <a:spcBef>
-                  <a:spcPts val="0"/>
-                </a:spcBef>
-                <a:spcAft>
-                  <a:spcPts val="0"/>
-                </a:spcAft>
-                <a:buNone/>
-              </a:pPr>
-              <a:endParaRPr/>
-            </a:p>
-          </p:txBody>
-        </p:sp>
-        <p:sp>
-          <p:nvSpPr>
             <p:cNvPr id="444" name="Google Shape;444;p27"/>
             <p:cNvSpPr txBox="1"/>
             <p:nvPr/>
@@ -13287,48 +11817,6 @@
             <a:chExt cx="7772400" cy="762000"/>
           </a:xfrm>
         </p:grpSpPr>
-        <p:sp>
-          <p:nvSpPr>
-            <p:cNvPr id="446" name="Google Shape;446;p27"/>
-            <p:cNvSpPr/>
-            <p:nvPr/>
-          </p:nvSpPr>
-          <p:spPr>
-            <a:xfrm>
-              <a:off x="0" y="76200"/>
-              <a:ext cx="38100" cy="228600"/>
-            </a:xfrm>
-            <a:prstGeom prst="roundRect">
-              <a:avLst>
-                <a:gd name="adj" fmla="val 50000"/>
-              </a:avLst>
-            </a:prstGeom>
-            <a:solidFill>
-              <a:srgbClr val="5A7557"/>
-            </a:solidFill>
-            <a:ln>
-              <a:noFill/>
-            </a:ln>
-          </p:spPr>
-          <p:txBody>
-            <a:bodyPr spcFirstLastPara="1" wrap="square" lIns="0" tIns="0" rIns="0" bIns="0" anchor="ctr" anchorCtr="0">
-              <a:noAutofit/>
-            </a:bodyPr>
-            <a:lstStyle/>
-            <a:p>
-              <a:pPr marL="0" lvl="0" indent="0" algn="l" rtl="0">
-                <a:spcBef>
-                  <a:spcPts val="0"/>
-                </a:spcBef>
-                <a:spcAft>
-                  <a:spcPts val="0"/>
-                </a:spcAft>
-                <a:buNone/>
-              </a:pPr>
-              <a:endParaRPr/>
-            </a:p>
-          </p:txBody>
-        </p:sp>
         <p:sp>
           <p:nvSpPr>
             <p:cNvPr id="447" name="Google Shape;447;p27"/>
@@ -13476,86 +11964,6 @@
               <a:chExt cx="1333500" cy="1238250"/>
             </a:xfrm>
           </p:grpSpPr>
-          <p:sp>
-            <p:nvSpPr>
-              <p:cNvPr id="451" name="Google Shape;451;p27"/>
-              <p:cNvSpPr/>
-              <p:nvPr/>
-            </p:nvSpPr>
-            <p:spPr>
-              <a:xfrm>
-                <a:off x="-95250" y="-95250"/>
-                <a:ext cx="190500" cy="190500"/>
-              </a:xfrm>
-              <a:prstGeom prst="ellipse">
-                <a:avLst/>
-              </a:prstGeom>
-              <a:solidFill>
-                <a:srgbClr val="5A7557"/>
-              </a:solidFill>
-              <a:ln>
-                <a:noFill/>
-              </a:ln>
-            </p:spPr>
-            <p:txBody>
-              <a:bodyPr spcFirstLastPara="1" wrap="square" lIns="0" tIns="0" rIns="0" bIns="0" anchor="ctr" anchorCtr="0">
-                <a:noAutofit/>
-              </a:bodyPr>
-              <a:lstStyle/>
-              <a:p>
-                <a:pPr marL="0" lvl="0" indent="0" algn="l" rtl="0">
-                  <a:spcBef>
-                    <a:spcPts val="0"/>
-                  </a:spcBef>
-                  <a:spcAft>
-                    <a:spcPts val="0"/>
-                  </a:spcAft>
-                  <a:buNone/>
-                </a:pPr>
-                <a:endParaRPr/>
-              </a:p>
-            </p:txBody>
-          </p:sp>
-          <p:sp>
-            <p:nvSpPr>
-              <p:cNvPr id="452" name="Google Shape;452;p27"/>
-              <p:cNvSpPr/>
-              <p:nvPr/>
-            </p:nvSpPr>
-            <p:spPr>
-              <a:xfrm>
-                <a:off x="-38100" y="-38100"/>
-                <a:ext cx="76200" cy="76200"/>
-              </a:xfrm>
-              <a:prstGeom prst="ellipse">
-                <a:avLst/>
-              </a:prstGeom>
-              <a:solidFill>
-                <a:srgbClr val="FFFFFF"/>
-              </a:solidFill>
-              <a:ln>
-                <a:noFill/>
-              </a:ln>
-            </p:spPr>
-            <p:txBody>
-              <a:bodyPr spcFirstLastPara="1" wrap="square" lIns="0" tIns="0" rIns="0" bIns="0" anchor="ctr" anchorCtr="0">
-                <a:noAutofit/>
-              </a:bodyPr>
-              <a:lstStyle/>
-              <a:p>
-                <a:pPr marL="0" lvl="0" indent="0" algn="l" rtl="0">
-                  <a:spcBef>
-                    <a:spcPts val="0"/>
-                  </a:spcBef>
-                  <a:spcAft>
-                    <a:spcPts val="0"/>
-                  </a:spcAft>
-                  <a:buNone/>
-                </a:pPr>
-                <a:endParaRPr/>
-              </a:p>
-            </p:txBody>
-          </p:sp>
           <p:pic>
             <p:nvPicPr>
               <p:cNvPr id="453" name="Google Shape;453;p27"/>
@@ -13688,86 +12096,6 @@
               <a:chExt cx="1333500" cy="1286025"/>
             </a:xfrm>
           </p:grpSpPr>
-          <p:sp>
-            <p:nvSpPr>
-              <p:cNvPr id="456" name="Google Shape;456;p27"/>
-              <p:cNvSpPr/>
-              <p:nvPr/>
-            </p:nvSpPr>
-            <p:spPr>
-              <a:xfrm>
-                <a:off x="-95250" y="-95250"/>
-                <a:ext cx="190500" cy="190500"/>
-              </a:xfrm>
-              <a:prstGeom prst="ellipse">
-                <a:avLst/>
-              </a:prstGeom>
-              <a:solidFill>
-                <a:srgbClr val="5A7557"/>
-              </a:solidFill>
-              <a:ln>
-                <a:noFill/>
-              </a:ln>
-            </p:spPr>
-            <p:txBody>
-              <a:bodyPr spcFirstLastPara="1" wrap="square" lIns="0" tIns="0" rIns="0" bIns="0" anchor="ctr" anchorCtr="0">
-                <a:noAutofit/>
-              </a:bodyPr>
-              <a:lstStyle/>
-              <a:p>
-                <a:pPr marL="0" lvl="0" indent="0" algn="l" rtl="0">
-                  <a:spcBef>
-                    <a:spcPts val="0"/>
-                  </a:spcBef>
-                  <a:spcAft>
-                    <a:spcPts val="0"/>
-                  </a:spcAft>
-                  <a:buNone/>
-                </a:pPr>
-                <a:endParaRPr/>
-              </a:p>
-            </p:txBody>
-          </p:sp>
-          <p:sp>
-            <p:nvSpPr>
-              <p:cNvPr id="457" name="Google Shape;457;p27"/>
-              <p:cNvSpPr/>
-              <p:nvPr/>
-            </p:nvSpPr>
-            <p:spPr>
-              <a:xfrm>
-                <a:off x="-38100" y="-38100"/>
-                <a:ext cx="76200" cy="76200"/>
-              </a:xfrm>
-              <a:prstGeom prst="ellipse">
-                <a:avLst/>
-              </a:prstGeom>
-              <a:solidFill>
-                <a:srgbClr val="FFFFFF"/>
-              </a:solidFill>
-              <a:ln>
-                <a:noFill/>
-              </a:ln>
-            </p:spPr>
-            <p:txBody>
-              <a:bodyPr spcFirstLastPara="1" wrap="square" lIns="0" tIns="0" rIns="0" bIns="0" anchor="ctr" anchorCtr="0">
-                <a:noAutofit/>
-              </a:bodyPr>
-              <a:lstStyle/>
-              <a:p>
-                <a:pPr marL="0" lvl="0" indent="0" algn="l" rtl="0">
-                  <a:spcBef>
-                    <a:spcPts val="0"/>
-                  </a:spcBef>
-                  <a:spcAft>
-                    <a:spcPts val="0"/>
-                  </a:spcAft>
-                  <a:buNone/>
-                </a:pPr>
-                <a:endParaRPr/>
-              </a:p>
-            </p:txBody>
-          </p:sp>
           <p:pic>
             <p:nvPicPr>
               <p:cNvPr id="458" name="Google Shape;458;p27"/>
@@ -13900,86 +12228,6 @@
               <a:chExt cx="1333500" cy="1238250"/>
             </a:xfrm>
           </p:grpSpPr>
-          <p:sp>
-            <p:nvSpPr>
-              <p:cNvPr id="461" name="Google Shape;461;p27"/>
-              <p:cNvSpPr/>
-              <p:nvPr/>
-            </p:nvSpPr>
-            <p:spPr>
-              <a:xfrm>
-                <a:off x="-95250" y="-95250"/>
-                <a:ext cx="190500" cy="190500"/>
-              </a:xfrm>
-              <a:prstGeom prst="ellipse">
-                <a:avLst/>
-              </a:prstGeom>
-              <a:solidFill>
-                <a:srgbClr val="5A7557"/>
-              </a:solidFill>
-              <a:ln>
-                <a:noFill/>
-              </a:ln>
-            </p:spPr>
-            <p:txBody>
-              <a:bodyPr spcFirstLastPara="1" wrap="square" lIns="0" tIns="0" rIns="0" bIns="0" anchor="ctr" anchorCtr="0">
-                <a:noAutofit/>
-              </a:bodyPr>
-              <a:lstStyle/>
-              <a:p>
-                <a:pPr marL="0" lvl="0" indent="0" algn="l" rtl="0">
-                  <a:spcBef>
-                    <a:spcPts val="0"/>
-                  </a:spcBef>
-                  <a:spcAft>
-                    <a:spcPts val="0"/>
-                  </a:spcAft>
-                  <a:buNone/>
-                </a:pPr>
-                <a:endParaRPr/>
-              </a:p>
-            </p:txBody>
-          </p:sp>
-          <p:sp>
-            <p:nvSpPr>
-              <p:cNvPr id="462" name="Google Shape;462;p27"/>
-              <p:cNvSpPr/>
-              <p:nvPr/>
-            </p:nvSpPr>
-            <p:spPr>
-              <a:xfrm>
-                <a:off x="-38100" y="-38100"/>
-                <a:ext cx="76200" cy="76200"/>
-              </a:xfrm>
-              <a:prstGeom prst="ellipse">
-                <a:avLst/>
-              </a:prstGeom>
-              <a:solidFill>
-                <a:srgbClr val="FFFFFF"/>
-              </a:solidFill>
-              <a:ln>
-                <a:noFill/>
-              </a:ln>
-            </p:spPr>
-            <p:txBody>
-              <a:bodyPr spcFirstLastPara="1" wrap="square" lIns="0" tIns="0" rIns="0" bIns="0" anchor="ctr" anchorCtr="0">
-                <a:noAutofit/>
-              </a:bodyPr>
-              <a:lstStyle/>
-              <a:p>
-                <a:pPr marL="0" lvl="0" indent="0" algn="l" rtl="0">
-                  <a:spcBef>
-                    <a:spcPts val="0"/>
-                  </a:spcBef>
-                  <a:spcAft>
-                    <a:spcPts val="0"/>
-                  </a:spcAft>
-                  <a:buNone/>
-                </a:pPr>
-                <a:endParaRPr/>
-              </a:p>
-            </p:txBody>
-          </p:sp>
           <p:pic>
             <p:nvPicPr>
               <p:cNvPr id="463" name="Google Shape;463;p27"/>
@@ -14112,86 +12360,6 @@
               <a:chExt cx="1333500" cy="1286025"/>
             </a:xfrm>
           </p:grpSpPr>
-          <p:sp>
-            <p:nvSpPr>
-              <p:cNvPr id="466" name="Google Shape;466;p27"/>
-              <p:cNvSpPr/>
-              <p:nvPr/>
-            </p:nvSpPr>
-            <p:spPr>
-              <a:xfrm>
-                <a:off x="-95250" y="-95250"/>
-                <a:ext cx="190500" cy="190500"/>
-              </a:xfrm>
-              <a:prstGeom prst="ellipse">
-                <a:avLst/>
-              </a:prstGeom>
-              <a:solidFill>
-                <a:srgbClr val="5A7557"/>
-              </a:solidFill>
-              <a:ln>
-                <a:noFill/>
-              </a:ln>
-            </p:spPr>
-            <p:txBody>
-              <a:bodyPr spcFirstLastPara="1" wrap="square" lIns="0" tIns="0" rIns="0" bIns="0" anchor="ctr" anchorCtr="0">
-                <a:noAutofit/>
-              </a:bodyPr>
-              <a:lstStyle/>
-              <a:p>
-                <a:pPr marL="0" lvl="0" indent="0" algn="l" rtl="0">
-                  <a:spcBef>
-                    <a:spcPts val="0"/>
-                  </a:spcBef>
-                  <a:spcAft>
-                    <a:spcPts val="0"/>
-                  </a:spcAft>
-                  <a:buNone/>
-                </a:pPr>
-                <a:endParaRPr/>
-              </a:p>
-            </p:txBody>
-          </p:sp>
-          <p:sp>
-            <p:nvSpPr>
-              <p:cNvPr id="467" name="Google Shape;467;p27"/>
-              <p:cNvSpPr/>
-              <p:nvPr/>
-            </p:nvSpPr>
-            <p:spPr>
-              <a:xfrm>
-                <a:off x="-38100" y="-38100"/>
-                <a:ext cx="76200" cy="76200"/>
-              </a:xfrm>
-              <a:prstGeom prst="ellipse">
-                <a:avLst/>
-              </a:prstGeom>
-              <a:solidFill>
-                <a:srgbClr val="FFFFFF"/>
-              </a:solidFill>
-              <a:ln>
-                <a:noFill/>
-              </a:ln>
-            </p:spPr>
-            <p:txBody>
-              <a:bodyPr spcFirstLastPara="1" wrap="square" lIns="0" tIns="0" rIns="0" bIns="0" anchor="ctr" anchorCtr="0">
-                <a:noAutofit/>
-              </a:bodyPr>
-              <a:lstStyle/>
-              <a:p>
-                <a:pPr marL="0" lvl="0" indent="0" algn="l" rtl="0">
-                  <a:spcBef>
-                    <a:spcPts val="0"/>
-                  </a:spcBef>
-                  <a:spcAft>
-                    <a:spcPts val="0"/>
-                  </a:spcAft>
-                  <a:buNone/>
-                </a:pPr>
-                <a:endParaRPr/>
-              </a:p>
-            </p:txBody>
-          </p:sp>
           <p:pic>
             <p:nvPicPr>
               <p:cNvPr id="468" name="Google Shape;468;p27"/>
@@ -14295,7 +12463,7 @@
                     <a:cs typeface="Noto Sans TC"/>
                     <a:sym typeface="Noto Sans TC"/>
                   </a:rPr>
-                  <a:t>★ 首年免暫繳</a:t>
+                  <a:t>首年免暫繳</a:t>
                 </a:r>
                 <a:endParaRPr sz="1050" b="1">
                   <a:solidFill>
@@ -14324,86 +12492,6 @@
               <a:chExt cx="1333500" cy="1238250"/>
             </a:xfrm>
           </p:grpSpPr>
-          <p:sp>
-            <p:nvSpPr>
-              <p:cNvPr id="471" name="Google Shape;471;p27"/>
-              <p:cNvSpPr/>
-              <p:nvPr/>
-            </p:nvSpPr>
-            <p:spPr>
-              <a:xfrm>
-                <a:off x="-95250" y="-95250"/>
-                <a:ext cx="190500" cy="190500"/>
-              </a:xfrm>
-              <a:prstGeom prst="ellipse">
-                <a:avLst/>
-              </a:prstGeom>
-              <a:solidFill>
-                <a:srgbClr val="C55D4D"/>
-              </a:solidFill>
-              <a:ln>
-                <a:noFill/>
-              </a:ln>
-            </p:spPr>
-            <p:txBody>
-              <a:bodyPr spcFirstLastPara="1" wrap="square" lIns="0" tIns="0" rIns="0" bIns="0" anchor="ctr" anchorCtr="0">
-                <a:noAutofit/>
-              </a:bodyPr>
-              <a:lstStyle/>
-              <a:p>
-                <a:pPr marL="0" lvl="0" indent="0" algn="l" rtl="0">
-                  <a:spcBef>
-                    <a:spcPts val="0"/>
-                  </a:spcBef>
-                  <a:spcAft>
-                    <a:spcPts val="0"/>
-                  </a:spcAft>
-                  <a:buNone/>
-                </a:pPr>
-                <a:endParaRPr/>
-              </a:p>
-            </p:txBody>
-          </p:sp>
-          <p:sp>
-            <p:nvSpPr>
-              <p:cNvPr id="472" name="Google Shape;472;p27"/>
-              <p:cNvSpPr/>
-              <p:nvPr/>
-            </p:nvSpPr>
-            <p:spPr>
-              <a:xfrm>
-                <a:off x="-38100" y="-38100"/>
-                <a:ext cx="76200" cy="76200"/>
-              </a:xfrm>
-              <a:prstGeom prst="ellipse">
-                <a:avLst/>
-              </a:prstGeom>
-              <a:solidFill>
-                <a:srgbClr val="FFFFFF"/>
-              </a:solidFill>
-              <a:ln>
-                <a:noFill/>
-              </a:ln>
-            </p:spPr>
-            <p:txBody>
-              <a:bodyPr spcFirstLastPara="1" wrap="square" lIns="0" tIns="0" rIns="0" bIns="0" anchor="ctr" anchorCtr="0">
-                <a:noAutofit/>
-              </a:bodyPr>
-              <a:lstStyle/>
-              <a:p>
-                <a:pPr marL="0" lvl="0" indent="0" algn="l" rtl="0">
-                  <a:spcBef>
-                    <a:spcPts val="0"/>
-                  </a:spcBef>
-                  <a:spcAft>
-                    <a:spcPts val="0"/>
-                  </a:spcAft>
-                  <a:buNone/>
-                </a:pPr>
-                <a:endParaRPr/>
-              </a:p>
-            </p:txBody>
-          </p:sp>
           <p:pic>
             <p:nvPicPr>
               <p:cNvPr id="473" name="Google Shape;473;p27"/>
@@ -14503,7 +12591,7 @@
                     <a:cs typeface="Noto Sans TC"/>
                     <a:sym typeface="Noto Sans TC"/>
                   </a:rPr>
-                  <a:t>▲</a:t>
+                  <a:t/>
                 </a:r>
                 <a:r>
                   <a:rPr lang="zh-TW" sz="1050" b="1" dirty="0" smtClean="0">
@@ -14556,86 +12644,6 @@
               <a:chExt cx="1428900" cy="1286025"/>
             </a:xfrm>
           </p:grpSpPr>
-          <p:sp>
-            <p:nvSpPr>
-              <p:cNvPr id="476" name="Google Shape;476;p27"/>
-              <p:cNvSpPr/>
-              <p:nvPr/>
-            </p:nvSpPr>
-            <p:spPr>
-              <a:xfrm>
-                <a:off x="-95250" y="-95250"/>
-                <a:ext cx="190500" cy="190500"/>
-              </a:xfrm>
-              <a:prstGeom prst="ellipse">
-                <a:avLst/>
-              </a:prstGeom>
-              <a:solidFill>
-                <a:srgbClr val="C55D4D"/>
-              </a:solidFill>
-              <a:ln>
-                <a:noFill/>
-              </a:ln>
-            </p:spPr>
-            <p:txBody>
-              <a:bodyPr spcFirstLastPara="1" wrap="square" lIns="0" tIns="0" rIns="0" bIns="0" anchor="ctr" anchorCtr="0">
-                <a:noAutofit/>
-              </a:bodyPr>
-              <a:lstStyle/>
-              <a:p>
-                <a:pPr marL="0" lvl="0" indent="0" algn="l" rtl="0">
-                  <a:spcBef>
-                    <a:spcPts val="0"/>
-                  </a:spcBef>
-                  <a:spcAft>
-                    <a:spcPts val="0"/>
-                  </a:spcAft>
-                  <a:buNone/>
-                </a:pPr>
-                <a:endParaRPr/>
-              </a:p>
-            </p:txBody>
-          </p:sp>
-          <p:sp>
-            <p:nvSpPr>
-              <p:cNvPr id="477" name="Google Shape;477;p27"/>
-              <p:cNvSpPr/>
-              <p:nvPr/>
-            </p:nvSpPr>
-            <p:spPr>
-              <a:xfrm>
-                <a:off x="-38100" y="-38100"/>
-                <a:ext cx="76200" cy="76200"/>
-              </a:xfrm>
-              <a:prstGeom prst="ellipse">
-                <a:avLst/>
-              </a:prstGeom>
-              <a:solidFill>
-                <a:srgbClr val="FFFFFF"/>
-              </a:solidFill>
-              <a:ln>
-                <a:noFill/>
-              </a:ln>
-            </p:spPr>
-            <p:txBody>
-              <a:bodyPr spcFirstLastPara="1" wrap="square" lIns="0" tIns="0" rIns="0" bIns="0" anchor="ctr" anchorCtr="0">
-                <a:noAutofit/>
-              </a:bodyPr>
-              <a:lstStyle/>
-              <a:p>
-                <a:pPr marL="0" lvl="0" indent="0" algn="l" rtl="0">
-                  <a:spcBef>
-                    <a:spcPts val="0"/>
-                  </a:spcBef>
-                  <a:spcAft>
-                    <a:spcPts val="0"/>
-                  </a:spcAft>
-                  <a:buNone/>
-                </a:pPr>
-                <a:endParaRPr/>
-              </a:p>
-            </p:txBody>
-          </p:sp>
           <p:pic>
             <p:nvPicPr>
               <p:cNvPr id="478" name="Google Shape;478;p27"/>
@@ -14739,7 +12747,7 @@
                     <a:cs typeface="Noto Sans TC"/>
                     <a:sym typeface="Noto Sans TC"/>
                   </a:rPr>
-                  <a:t>▲ </a:t>
+                  <a:t/>
                 </a:r>
                 <a:r>
                   <a:rPr lang="zh-TW" sz="1050" b="1" dirty="0">
@@ -14867,7 +12875,7 @@
                   <a:cs typeface="Noto Sans TC"/>
                   <a:sym typeface="Noto Sans TC"/>
                 </a:rPr>
-                <a:t>全程由顧問團隊專業把關，關鍵節點提前提醒 ■</a:t>
+                <a:t>全程由顧問團隊專業把關，關鍵節點提前提醒 </a:t>
               </a:r>
               <a:endParaRPr sz="1050" b="1">
                 <a:solidFill>
@@ -15193,154 +13201,6 @@
         </p:grpSpPr>
         <p:sp>
           <p:nvSpPr>
-            <p:cNvPr id="494" name="Google Shape;494;p28"/>
-            <p:cNvSpPr/>
-            <p:nvPr/>
-          </p:nvSpPr>
-          <p:spPr>
-            <a:xfrm>
-              <a:off x="0" y="0"/>
-              <a:ext cx="304800" cy="304800"/>
-            </a:xfrm>
-            <a:custGeom>
-              <a:avLst/>
-              <a:gdLst/>
-              <a:ahLst/>
-              <a:cxnLst/>
-              <a:rect l="l" t="t" r="r" b="b"/>
-              <a:pathLst>
-                <a:path w="120000" h="120000" extrusionOk="0">
-                  <a:moveTo>
-                    <a:pt x="0" y="60000"/>
-                  </a:moveTo>
-                  <a:cubicBezTo>
-                    <a:pt x="0" y="0"/>
-                    <a:pt x="60000" y="0"/>
-                    <a:pt x="60000" y="0"/>
-                  </a:cubicBezTo>
-                  <a:cubicBezTo>
-                    <a:pt x="120000" y="0"/>
-                    <a:pt x="120000" y="60000"/>
-                    <a:pt x="120000" y="60000"/>
-                  </a:cubicBezTo>
-                  <a:cubicBezTo>
-                    <a:pt x="120000" y="120000"/>
-                    <a:pt x="60000" y="120000"/>
-                    <a:pt x="60000" y="120000"/>
-                  </a:cubicBezTo>
-                  <a:cubicBezTo>
-                    <a:pt x="0" y="120000"/>
-                    <a:pt x="0" y="60000"/>
-                    <a:pt x="0" y="60000"/>
-                  </a:cubicBezTo>
-                  <a:close/>
-                </a:path>
-              </a:pathLst>
-            </a:custGeom>
-            <a:solidFill>
-              <a:srgbClr val="5A7557">
-                <a:alpha val="80000"/>
-              </a:srgbClr>
-            </a:solidFill>
-            <a:ln>
-              <a:noFill/>
-            </a:ln>
-          </p:spPr>
-          <p:txBody>
-            <a:bodyPr spcFirstLastPara="1" wrap="square" lIns="0" tIns="0" rIns="0" bIns="0" anchor="ctr" anchorCtr="0">
-              <a:noAutofit/>
-            </a:bodyPr>
-            <a:lstStyle/>
-            <a:p>
-              <a:pPr marL="0" lvl="0" indent="0" algn="l" rtl="0">
-                <a:spcBef>
-                  <a:spcPts val="0"/>
-                </a:spcBef>
-                <a:spcAft>
-                  <a:spcPts val="0"/>
-                </a:spcAft>
-                <a:buNone/>
-              </a:pPr>
-              <a:endParaRPr/>
-            </a:p>
-          </p:txBody>
-        </p:sp>
-        <p:sp>
-          <p:nvSpPr>
-            <p:cNvPr id="495" name="Google Shape;495;p28"/>
-            <p:cNvSpPr/>
-            <p:nvPr/>
-          </p:nvSpPr>
-          <p:spPr>
-            <a:xfrm>
-              <a:off x="114300" y="76200"/>
-              <a:ext cx="304800" cy="304800"/>
-            </a:xfrm>
-            <a:custGeom>
-              <a:avLst/>
-              <a:gdLst/>
-              <a:ahLst/>
-              <a:cxnLst/>
-              <a:rect l="l" t="t" r="r" b="b"/>
-              <a:pathLst>
-                <a:path w="120000" h="120000" extrusionOk="0">
-                  <a:moveTo>
-                    <a:pt x="0" y="60000"/>
-                  </a:moveTo>
-                  <a:cubicBezTo>
-                    <a:pt x="0" y="0"/>
-                    <a:pt x="60000" y="0"/>
-                    <a:pt x="60000" y="0"/>
-                  </a:cubicBezTo>
-                  <a:cubicBezTo>
-                    <a:pt x="120000" y="0"/>
-                    <a:pt x="120000" y="60000"/>
-                    <a:pt x="120000" y="60000"/>
-                  </a:cubicBezTo>
-                  <a:cubicBezTo>
-                    <a:pt x="120000" y="120000"/>
-                    <a:pt x="60000" y="120000"/>
-                    <a:pt x="60000" y="120000"/>
-                  </a:cubicBezTo>
-                  <a:cubicBezTo>
-                    <a:pt x="0" y="120000"/>
-                    <a:pt x="0" y="60000"/>
-                    <a:pt x="0" y="60000"/>
-                  </a:cubicBezTo>
-                  <a:close/>
-                </a:path>
-              </a:pathLst>
-            </a:custGeom>
-            <a:solidFill>
-              <a:srgbClr val="7C9878">
-                <a:alpha val="60000"/>
-              </a:srgbClr>
-            </a:solidFill>
-            <a:ln>
-              <a:noFill/>
-            </a:ln>
-          </p:spPr>
-          <p:txBody>
-            <a:bodyPr spcFirstLastPara="1" wrap="square" lIns="0" tIns="0" rIns="0" bIns="0" anchor="ctr" anchorCtr="0">
-              <a:noAutofit/>
-            </a:bodyPr>
-            <a:lstStyle/>
-            <a:p>
-              <a:pPr marL="0" lvl="0" indent="0" algn="l" rtl="0">
-                <a:spcBef>
-                  <a:spcPts val="0"/>
-                </a:spcBef>
-                <a:spcAft>
-                  <a:spcPts val="0"/>
-                </a:spcAft>
-                <a:buNone/>
-              </a:pPr>
-              <a:endParaRPr/>
-            </a:p>
-          </p:txBody>
-        </p:sp>
-        <p:sp>
-          <p:nvSpPr>
             <p:cNvPr id="496" name="Google Shape;496;p28"/>
             <p:cNvSpPr txBox="1"/>
             <p:nvPr/>
@@ -16020,154 +13880,6 @@
           </p:grpSpPr>
           <p:sp>
             <p:nvSpPr>
-              <p:cNvPr id="77" name="Google Shape;77;p15"/>
-              <p:cNvSpPr/>
-              <p:nvPr/>
-            </p:nvSpPr>
-            <p:spPr>
-              <a:xfrm>
-                <a:off x="0" y="0"/>
-                <a:ext cx="304800" cy="304800"/>
-              </a:xfrm>
-              <a:custGeom>
-                <a:avLst/>
-                <a:gdLst/>
-                <a:ahLst/>
-                <a:cxnLst/>
-                <a:rect l="l" t="t" r="r" b="b"/>
-                <a:pathLst>
-                  <a:path w="120000" h="120000" extrusionOk="0">
-                    <a:moveTo>
-                      <a:pt x="0" y="60000"/>
-                    </a:moveTo>
-                    <a:cubicBezTo>
-                      <a:pt x="0" y="0"/>
-                      <a:pt x="60000" y="0"/>
-                      <a:pt x="60000" y="0"/>
-                    </a:cubicBezTo>
-                    <a:cubicBezTo>
-                      <a:pt x="120000" y="0"/>
-                      <a:pt x="120000" y="60000"/>
-                      <a:pt x="120000" y="60000"/>
-                    </a:cubicBezTo>
-                    <a:cubicBezTo>
-                      <a:pt x="120000" y="120000"/>
-                      <a:pt x="60000" y="120000"/>
-                      <a:pt x="60000" y="120000"/>
-                    </a:cubicBezTo>
-                    <a:cubicBezTo>
-                      <a:pt x="0" y="120000"/>
-                      <a:pt x="0" y="60000"/>
-                      <a:pt x="0" y="60000"/>
-                    </a:cubicBezTo>
-                    <a:close/>
-                  </a:path>
-                </a:pathLst>
-              </a:custGeom>
-              <a:solidFill>
-                <a:srgbClr val="5A7557">
-                  <a:alpha val="80000"/>
-                </a:srgbClr>
-              </a:solidFill>
-              <a:ln>
-                <a:noFill/>
-              </a:ln>
-            </p:spPr>
-            <p:txBody>
-              <a:bodyPr spcFirstLastPara="1" wrap="square" lIns="0" tIns="0" rIns="0" bIns="0" anchor="ctr" anchorCtr="0">
-                <a:noAutofit/>
-              </a:bodyPr>
-              <a:lstStyle/>
-              <a:p>
-                <a:pPr marL="0" lvl="0" indent="0" algn="l" rtl="0">
-                  <a:spcBef>
-                    <a:spcPts val="0"/>
-                  </a:spcBef>
-                  <a:spcAft>
-                    <a:spcPts val="0"/>
-                  </a:spcAft>
-                  <a:buNone/>
-                </a:pPr>
-                <a:endParaRPr/>
-              </a:p>
-            </p:txBody>
-          </p:sp>
-          <p:sp>
-            <p:nvSpPr>
-              <p:cNvPr id="78" name="Google Shape;78;p15"/>
-              <p:cNvSpPr/>
-              <p:nvPr/>
-            </p:nvSpPr>
-            <p:spPr>
-              <a:xfrm>
-                <a:off x="114300" y="76200"/>
-                <a:ext cx="304800" cy="304800"/>
-              </a:xfrm>
-              <a:custGeom>
-                <a:avLst/>
-                <a:gdLst/>
-                <a:ahLst/>
-                <a:cxnLst/>
-                <a:rect l="l" t="t" r="r" b="b"/>
-                <a:pathLst>
-                  <a:path w="120000" h="120000" extrusionOk="0">
-                    <a:moveTo>
-                      <a:pt x="0" y="60000"/>
-                    </a:moveTo>
-                    <a:cubicBezTo>
-                      <a:pt x="0" y="0"/>
-                      <a:pt x="60000" y="0"/>
-                      <a:pt x="60000" y="0"/>
-                    </a:cubicBezTo>
-                    <a:cubicBezTo>
-                      <a:pt x="120000" y="0"/>
-                      <a:pt x="120000" y="60000"/>
-                      <a:pt x="120000" y="60000"/>
-                    </a:cubicBezTo>
-                    <a:cubicBezTo>
-                      <a:pt x="120000" y="120000"/>
-                      <a:pt x="60000" y="120000"/>
-                      <a:pt x="60000" y="120000"/>
-                    </a:cubicBezTo>
-                    <a:cubicBezTo>
-                      <a:pt x="0" y="120000"/>
-                      <a:pt x="0" y="60000"/>
-                      <a:pt x="0" y="60000"/>
-                    </a:cubicBezTo>
-                    <a:close/>
-                  </a:path>
-                </a:pathLst>
-              </a:custGeom>
-              <a:solidFill>
-                <a:srgbClr val="7C9878">
-                  <a:alpha val="60000"/>
-                </a:srgbClr>
-              </a:solidFill>
-              <a:ln>
-                <a:noFill/>
-              </a:ln>
-            </p:spPr>
-            <p:txBody>
-              <a:bodyPr spcFirstLastPara="1" wrap="square" lIns="0" tIns="0" rIns="0" bIns="0" anchor="ctr" anchorCtr="0">
-                <a:noAutofit/>
-              </a:bodyPr>
-              <a:lstStyle/>
-              <a:p>
-                <a:pPr marL="0" lvl="0" indent="0" algn="l" rtl="0">
-                  <a:spcBef>
-                    <a:spcPts val="0"/>
-                  </a:spcBef>
-                  <a:spcAft>
-                    <a:spcPts val="0"/>
-                  </a:spcAft>
-                  <a:buNone/>
-                </a:pPr>
-                <a:endParaRPr/>
-              </a:p>
-            </p:txBody>
-          </p:sp>
-          <p:sp>
-            <p:nvSpPr>
               <p:cNvPr id="79" name="Google Shape;79;p15"/>
               <p:cNvSpPr txBox="1"/>
               <p:nvPr/>
@@ -16239,48 +13951,6 @@
               <a:chExt cx="7772400" cy="762000"/>
             </a:xfrm>
           </p:grpSpPr>
-          <p:sp>
-            <p:nvSpPr>
-              <p:cNvPr id="81" name="Google Shape;81;p15"/>
-              <p:cNvSpPr/>
-              <p:nvPr/>
-            </p:nvSpPr>
-            <p:spPr>
-              <a:xfrm>
-                <a:off x="0" y="76200"/>
-                <a:ext cx="38100" cy="228600"/>
-              </a:xfrm>
-              <a:prstGeom prst="roundRect">
-                <a:avLst>
-                  <a:gd name="adj" fmla="val 50000"/>
-                </a:avLst>
-              </a:prstGeom>
-              <a:solidFill>
-                <a:srgbClr val="5A7557"/>
-              </a:solidFill>
-              <a:ln>
-                <a:noFill/>
-              </a:ln>
-            </p:spPr>
-            <p:txBody>
-              <a:bodyPr spcFirstLastPara="1" wrap="square" lIns="0" tIns="0" rIns="0" bIns="0" anchor="ctr" anchorCtr="0">
-                <a:noAutofit/>
-              </a:bodyPr>
-              <a:lstStyle/>
-              <a:p>
-                <a:pPr marL="0" lvl="0" indent="0" algn="l" rtl="0">
-                  <a:spcBef>
-                    <a:spcPts val="0"/>
-                  </a:spcBef>
-                  <a:spcAft>
-                    <a:spcPts val="0"/>
-                  </a:spcAft>
-                  <a:buNone/>
-                </a:pPr>
-                <a:endParaRPr/>
-              </a:p>
-            </p:txBody>
-          </p:sp>
           <p:sp>
             <p:nvSpPr>
               <p:cNvPr id="82" name="Google Shape;82;p15"/>
@@ -16493,7 +14163,7 @@
                     <a:cs typeface="Noto Sans TC"/>
                     <a:sym typeface="Noto Sans TC"/>
                   </a:rPr>
-                  <a:t>■ 公司設立</a:t>
+                  <a:t>公司設立</a:t>
                 </a:r>
                 <a:endParaRPr sz="1650" b="1">
                   <a:solidFill>
@@ -16646,7 +14316,7 @@
                     <a:cs typeface="Noto Sans TC"/>
                     <a:sym typeface="Noto Sans TC"/>
                   </a:rPr>
-                  <a:t>■ 營業稅申報</a:t>
+                  <a:t>營業稅申報</a:t>
                 </a:r>
                 <a:endParaRPr sz="1650" b="1">
                   <a:solidFill>
@@ -16799,7 +14469,7 @@
                     <a:cs typeface="Noto Sans TC"/>
                     <a:sym typeface="Noto Sans TC"/>
                   </a:rPr>
-                  <a:t>■ 營所稅結算</a:t>
+                  <a:t>營所稅結算</a:t>
                 </a:r>
                 <a:endParaRPr sz="1650" b="1">
                   <a:solidFill>
@@ -16952,7 +14622,7 @@
                     <a:cs typeface="Noto Sans TC"/>
                     <a:sym typeface="Noto Sans TC"/>
                   </a:rPr>
-                  <a:t>■ 盈餘分配</a:t>
+                  <a:t>盈餘分配</a:t>
                 </a:r>
                 <a:endParaRPr sz="1650" b="1">
                   <a:solidFill>
@@ -17252,154 +14922,6 @@
         </p:grpSpPr>
         <p:sp>
           <p:nvSpPr>
-            <p:cNvPr id="106" name="Google Shape;106;p16"/>
-            <p:cNvSpPr/>
-            <p:nvPr/>
-          </p:nvSpPr>
-          <p:spPr>
-            <a:xfrm>
-              <a:off x="0" y="0"/>
-              <a:ext cx="304800" cy="304800"/>
-            </a:xfrm>
-            <a:custGeom>
-              <a:avLst/>
-              <a:gdLst/>
-              <a:ahLst/>
-              <a:cxnLst/>
-              <a:rect l="l" t="t" r="r" b="b"/>
-              <a:pathLst>
-                <a:path w="120000" h="120000" extrusionOk="0">
-                  <a:moveTo>
-                    <a:pt x="0" y="60000"/>
-                  </a:moveTo>
-                  <a:cubicBezTo>
-                    <a:pt x="0" y="0"/>
-                    <a:pt x="60000" y="0"/>
-                    <a:pt x="60000" y="0"/>
-                  </a:cubicBezTo>
-                  <a:cubicBezTo>
-                    <a:pt x="120000" y="0"/>
-                    <a:pt x="120000" y="60000"/>
-                    <a:pt x="120000" y="60000"/>
-                  </a:cubicBezTo>
-                  <a:cubicBezTo>
-                    <a:pt x="120000" y="120000"/>
-                    <a:pt x="60000" y="120000"/>
-                    <a:pt x="60000" y="120000"/>
-                  </a:cubicBezTo>
-                  <a:cubicBezTo>
-                    <a:pt x="0" y="120000"/>
-                    <a:pt x="0" y="60000"/>
-                    <a:pt x="0" y="60000"/>
-                  </a:cubicBezTo>
-                  <a:close/>
-                </a:path>
-              </a:pathLst>
-            </a:custGeom>
-            <a:solidFill>
-              <a:srgbClr val="5A7557">
-                <a:alpha val="80000"/>
-              </a:srgbClr>
-            </a:solidFill>
-            <a:ln>
-              <a:noFill/>
-            </a:ln>
-          </p:spPr>
-          <p:txBody>
-            <a:bodyPr spcFirstLastPara="1" wrap="square" lIns="0" tIns="0" rIns="0" bIns="0" anchor="ctr" anchorCtr="0">
-              <a:noAutofit/>
-            </a:bodyPr>
-            <a:lstStyle/>
-            <a:p>
-              <a:pPr marL="0" lvl="0" indent="0" algn="l" rtl="0">
-                <a:spcBef>
-                  <a:spcPts val="0"/>
-                </a:spcBef>
-                <a:spcAft>
-                  <a:spcPts val="0"/>
-                </a:spcAft>
-                <a:buNone/>
-              </a:pPr>
-              <a:endParaRPr/>
-            </a:p>
-          </p:txBody>
-        </p:sp>
-        <p:sp>
-          <p:nvSpPr>
-            <p:cNvPr id="107" name="Google Shape;107;p16"/>
-            <p:cNvSpPr/>
-            <p:nvPr/>
-          </p:nvSpPr>
-          <p:spPr>
-            <a:xfrm>
-              <a:off x="114300" y="76200"/>
-              <a:ext cx="304800" cy="304800"/>
-            </a:xfrm>
-            <a:custGeom>
-              <a:avLst/>
-              <a:gdLst/>
-              <a:ahLst/>
-              <a:cxnLst/>
-              <a:rect l="l" t="t" r="r" b="b"/>
-              <a:pathLst>
-                <a:path w="120000" h="120000" extrusionOk="0">
-                  <a:moveTo>
-                    <a:pt x="0" y="60000"/>
-                  </a:moveTo>
-                  <a:cubicBezTo>
-                    <a:pt x="0" y="0"/>
-                    <a:pt x="60000" y="0"/>
-                    <a:pt x="60000" y="0"/>
-                  </a:cubicBezTo>
-                  <a:cubicBezTo>
-                    <a:pt x="120000" y="0"/>
-                    <a:pt x="120000" y="60000"/>
-                    <a:pt x="120000" y="60000"/>
-                  </a:cubicBezTo>
-                  <a:cubicBezTo>
-                    <a:pt x="120000" y="120000"/>
-                    <a:pt x="60000" y="120000"/>
-                    <a:pt x="60000" y="120000"/>
-                  </a:cubicBezTo>
-                  <a:cubicBezTo>
-                    <a:pt x="0" y="120000"/>
-                    <a:pt x="0" y="60000"/>
-                    <a:pt x="0" y="60000"/>
-                  </a:cubicBezTo>
-                  <a:close/>
-                </a:path>
-              </a:pathLst>
-            </a:custGeom>
-            <a:solidFill>
-              <a:srgbClr val="7C9878">
-                <a:alpha val="60000"/>
-              </a:srgbClr>
-            </a:solidFill>
-            <a:ln>
-              <a:noFill/>
-            </a:ln>
-          </p:spPr>
-          <p:txBody>
-            <a:bodyPr spcFirstLastPara="1" wrap="square" lIns="0" tIns="0" rIns="0" bIns="0" anchor="ctr" anchorCtr="0">
-              <a:noAutofit/>
-            </a:bodyPr>
-            <a:lstStyle/>
-            <a:p>
-              <a:pPr marL="0" lvl="0" indent="0" algn="l" rtl="0">
-                <a:spcBef>
-                  <a:spcPts val="0"/>
-                </a:spcBef>
-                <a:spcAft>
-                  <a:spcPts val="0"/>
-                </a:spcAft>
-                <a:buNone/>
-              </a:pPr>
-              <a:endParaRPr/>
-            </a:p>
-          </p:txBody>
-        </p:sp>
-        <p:sp>
-          <p:nvSpPr>
             <p:cNvPr id="108" name="Google Shape;108;p16"/>
             <p:cNvSpPr txBox="1"/>
             <p:nvPr/>
@@ -17513,48 +15035,6 @@
             <a:chExt cx="4914900" cy="762000"/>
           </a:xfrm>
         </p:grpSpPr>
-        <p:sp>
-          <p:nvSpPr>
-            <p:cNvPr id="111" name="Google Shape;111;p16"/>
-            <p:cNvSpPr/>
-            <p:nvPr/>
-          </p:nvSpPr>
-          <p:spPr>
-            <a:xfrm>
-              <a:off x="0" y="76200"/>
-              <a:ext cx="38100" cy="228600"/>
-            </a:xfrm>
-            <a:prstGeom prst="roundRect">
-              <a:avLst>
-                <a:gd name="adj" fmla="val 50000"/>
-              </a:avLst>
-            </a:prstGeom>
-            <a:solidFill>
-              <a:srgbClr val="5A7557"/>
-            </a:solidFill>
-            <a:ln>
-              <a:noFill/>
-            </a:ln>
-          </p:spPr>
-          <p:txBody>
-            <a:bodyPr spcFirstLastPara="1" wrap="square" lIns="0" tIns="0" rIns="0" bIns="0" anchor="ctr" anchorCtr="0">
-              <a:noAutofit/>
-            </a:bodyPr>
-            <a:lstStyle/>
-            <a:p>
-              <a:pPr marL="0" lvl="0" indent="0" algn="l" rtl="0">
-                <a:spcBef>
-                  <a:spcPts val="0"/>
-                </a:spcBef>
-                <a:spcAft>
-                  <a:spcPts val="0"/>
-                </a:spcAft>
-                <a:buNone/>
-              </a:pPr>
-              <a:endParaRPr/>
-            </a:p>
-          </p:txBody>
-        </p:sp>
         <p:sp>
           <p:nvSpPr>
             <p:cNvPr id="112" name="Google Shape;112;p16"/>
@@ -17687,48 +15167,6 @@
               <a:round/>
               <a:headEnd type="none" w="sm" len="sm"/>
               <a:tailEnd type="none" w="sm" len="sm"/>
-            </a:ln>
-          </p:spPr>
-          <p:txBody>
-            <a:bodyPr spcFirstLastPara="1" wrap="square" lIns="0" tIns="0" rIns="0" bIns="0" anchor="ctr" anchorCtr="0">
-              <a:noAutofit/>
-            </a:bodyPr>
-            <a:lstStyle/>
-            <a:p>
-              <a:pPr marL="0" lvl="0" indent="0" algn="l" rtl="0">
-                <a:spcBef>
-                  <a:spcPts val="0"/>
-                </a:spcBef>
-                <a:spcAft>
-                  <a:spcPts val="0"/>
-                </a:spcAft>
-                <a:buNone/>
-              </a:pPr>
-              <a:endParaRPr/>
-            </a:p>
-          </p:txBody>
-        </p:sp>
-        <p:sp>
-          <p:nvSpPr>
-            <p:cNvPr id="115" name="Google Shape;115;p16"/>
-            <p:cNvSpPr/>
-            <p:nvPr/>
-          </p:nvSpPr>
-          <p:spPr>
-            <a:xfrm>
-              <a:off x="228600" y="228600"/>
-              <a:ext cx="38100" cy="209700"/>
-            </a:xfrm>
-            <a:prstGeom prst="roundRect">
-              <a:avLst>
-                <a:gd name="adj" fmla="val 50000"/>
-              </a:avLst>
-            </a:prstGeom>
-            <a:solidFill>
-              <a:srgbClr val="5A7557"/>
-            </a:solidFill>
-            <a:ln>
-              <a:noFill/>
             </a:ln>
           </p:spPr>
           <p:txBody>
@@ -18017,48 +15455,6 @@
         </p:sp>
         <p:sp>
           <p:nvSpPr>
-            <p:cNvPr id="119" name="Google Shape;119;p16"/>
-            <p:cNvSpPr/>
-            <p:nvPr/>
-          </p:nvSpPr>
-          <p:spPr>
-            <a:xfrm>
-              <a:off x="228600" y="228600"/>
-              <a:ext cx="38100" cy="209700"/>
-            </a:xfrm>
-            <a:prstGeom prst="roundRect">
-              <a:avLst>
-                <a:gd name="adj" fmla="val 50000"/>
-              </a:avLst>
-            </a:prstGeom>
-            <a:solidFill>
-              <a:srgbClr val="C55D4D"/>
-            </a:solidFill>
-            <a:ln>
-              <a:noFill/>
-            </a:ln>
-          </p:spPr>
-          <p:txBody>
-            <a:bodyPr spcFirstLastPara="1" wrap="square" lIns="0" tIns="0" rIns="0" bIns="0" anchor="ctr" anchorCtr="0">
-              <a:noAutofit/>
-            </a:bodyPr>
-            <a:lstStyle/>
-            <a:p>
-              <a:pPr marL="0" lvl="0" indent="0" algn="l" rtl="0">
-                <a:spcBef>
-                  <a:spcPts val="0"/>
-                </a:spcBef>
-                <a:spcAft>
-                  <a:spcPts val="0"/>
-                </a:spcAft>
-                <a:buNone/>
-              </a:pPr>
-              <a:endParaRPr/>
-            </a:p>
-          </p:txBody>
-        </p:sp>
-        <p:sp>
-          <p:nvSpPr>
             <p:cNvPr id="120" name="Google Shape;120;p16"/>
             <p:cNvSpPr txBox="1"/>
             <p:nvPr/>
@@ -18360,7 +15756,7 @@
                   <a:cs typeface="Noto Sans TC"/>
                   <a:sym typeface="Noto Sans TC"/>
                 </a:rPr>
-                <a:t>►</a:t>
+                <a:t/>
               </a:r>
               <a:r>
                 <a:rPr lang="zh-TW" sz="1050" b="1">
@@ -18673,154 +16069,6 @@
         </p:grpSpPr>
         <p:sp>
           <p:nvSpPr>
-            <p:cNvPr id="134" name="Google Shape;134;p17"/>
-            <p:cNvSpPr/>
-            <p:nvPr/>
-          </p:nvSpPr>
-          <p:spPr>
-            <a:xfrm>
-              <a:off x="0" y="0"/>
-              <a:ext cx="304800" cy="304800"/>
-            </a:xfrm>
-            <a:custGeom>
-              <a:avLst/>
-              <a:gdLst/>
-              <a:ahLst/>
-              <a:cxnLst/>
-              <a:rect l="l" t="t" r="r" b="b"/>
-              <a:pathLst>
-                <a:path w="120000" h="120000" extrusionOk="0">
-                  <a:moveTo>
-                    <a:pt x="0" y="60000"/>
-                  </a:moveTo>
-                  <a:cubicBezTo>
-                    <a:pt x="0" y="0"/>
-                    <a:pt x="60000" y="0"/>
-                    <a:pt x="60000" y="0"/>
-                  </a:cubicBezTo>
-                  <a:cubicBezTo>
-                    <a:pt x="120000" y="0"/>
-                    <a:pt x="120000" y="60000"/>
-                    <a:pt x="120000" y="60000"/>
-                  </a:cubicBezTo>
-                  <a:cubicBezTo>
-                    <a:pt x="120000" y="120000"/>
-                    <a:pt x="60000" y="120000"/>
-                    <a:pt x="60000" y="120000"/>
-                  </a:cubicBezTo>
-                  <a:cubicBezTo>
-                    <a:pt x="0" y="120000"/>
-                    <a:pt x="0" y="60000"/>
-                    <a:pt x="0" y="60000"/>
-                  </a:cubicBezTo>
-                  <a:close/>
-                </a:path>
-              </a:pathLst>
-            </a:custGeom>
-            <a:solidFill>
-              <a:srgbClr val="5A7557">
-                <a:alpha val="80000"/>
-              </a:srgbClr>
-            </a:solidFill>
-            <a:ln>
-              <a:noFill/>
-            </a:ln>
-          </p:spPr>
-          <p:txBody>
-            <a:bodyPr spcFirstLastPara="1" wrap="square" lIns="0" tIns="0" rIns="0" bIns="0" anchor="ctr" anchorCtr="0">
-              <a:noAutofit/>
-            </a:bodyPr>
-            <a:lstStyle/>
-            <a:p>
-              <a:pPr marL="0" lvl="0" indent="0" algn="l" rtl="0">
-                <a:spcBef>
-                  <a:spcPts val="0"/>
-                </a:spcBef>
-                <a:spcAft>
-                  <a:spcPts val="0"/>
-                </a:spcAft>
-                <a:buNone/>
-              </a:pPr>
-              <a:endParaRPr/>
-            </a:p>
-          </p:txBody>
-        </p:sp>
-        <p:sp>
-          <p:nvSpPr>
-            <p:cNvPr id="135" name="Google Shape;135;p17"/>
-            <p:cNvSpPr/>
-            <p:nvPr/>
-          </p:nvSpPr>
-          <p:spPr>
-            <a:xfrm>
-              <a:off x="114300" y="76200"/>
-              <a:ext cx="304800" cy="304800"/>
-            </a:xfrm>
-            <a:custGeom>
-              <a:avLst/>
-              <a:gdLst/>
-              <a:ahLst/>
-              <a:cxnLst/>
-              <a:rect l="l" t="t" r="r" b="b"/>
-              <a:pathLst>
-                <a:path w="120000" h="120000" extrusionOk="0">
-                  <a:moveTo>
-                    <a:pt x="0" y="60000"/>
-                  </a:moveTo>
-                  <a:cubicBezTo>
-                    <a:pt x="0" y="0"/>
-                    <a:pt x="60000" y="0"/>
-                    <a:pt x="60000" y="0"/>
-                  </a:cubicBezTo>
-                  <a:cubicBezTo>
-                    <a:pt x="120000" y="0"/>
-                    <a:pt x="120000" y="60000"/>
-                    <a:pt x="120000" y="60000"/>
-                  </a:cubicBezTo>
-                  <a:cubicBezTo>
-                    <a:pt x="120000" y="120000"/>
-                    <a:pt x="60000" y="120000"/>
-                    <a:pt x="60000" y="120000"/>
-                  </a:cubicBezTo>
-                  <a:cubicBezTo>
-                    <a:pt x="0" y="120000"/>
-                    <a:pt x="0" y="60000"/>
-                    <a:pt x="0" y="60000"/>
-                  </a:cubicBezTo>
-                  <a:close/>
-                </a:path>
-              </a:pathLst>
-            </a:custGeom>
-            <a:solidFill>
-              <a:srgbClr val="7C9878">
-                <a:alpha val="60000"/>
-              </a:srgbClr>
-            </a:solidFill>
-            <a:ln>
-              <a:noFill/>
-            </a:ln>
-          </p:spPr>
-          <p:txBody>
-            <a:bodyPr spcFirstLastPara="1" wrap="square" lIns="0" tIns="0" rIns="0" bIns="0" anchor="ctr" anchorCtr="0">
-              <a:noAutofit/>
-            </a:bodyPr>
-            <a:lstStyle/>
-            <a:p>
-              <a:pPr marL="0" lvl="0" indent="0" algn="l" rtl="0">
-                <a:spcBef>
-                  <a:spcPts val="0"/>
-                </a:spcBef>
-                <a:spcAft>
-                  <a:spcPts val="0"/>
-                </a:spcAft>
-                <a:buNone/>
-              </a:pPr>
-              <a:endParaRPr/>
-            </a:p>
-          </p:txBody>
-        </p:sp>
-        <p:sp>
-          <p:nvSpPr>
             <p:cNvPr id="136" name="Google Shape;136;p17"/>
             <p:cNvSpPr txBox="1"/>
             <p:nvPr/>
@@ -18892,48 +16140,6 @@
             <a:chExt cx="7772400" cy="762000"/>
           </a:xfrm>
         </p:grpSpPr>
-        <p:sp>
-          <p:nvSpPr>
-            <p:cNvPr id="138" name="Google Shape;138;p17"/>
-            <p:cNvSpPr/>
-            <p:nvPr/>
-          </p:nvSpPr>
-          <p:spPr>
-            <a:xfrm>
-              <a:off x="0" y="76200"/>
-              <a:ext cx="38100" cy="228600"/>
-            </a:xfrm>
-            <a:prstGeom prst="roundRect">
-              <a:avLst>
-                <a:gd name="adj" fmla="val 50000"/>
-              </a:avLst>
-            </a:prstGeom>
-            <a:solidFill>
-              <a:srgbClr val="5A7557"/>
-            </a:solidFill>
-            <a:ln>
-              <a:noFill/>
-            </a:ln>
-          </p:spPr>
-          <p:txBody>
-            <a:bodyPr spcFirstLastPara="1" wrap="square" lIns="0" tIns="0" rIns="0" bIns="0" anchor="ctr" anchorCtr="0">
-              <a:noAutofit/>
-            </a:bodyPr>
-            <a:lstStyle/>
-            <a:p>
-              <a:pPr marL="0" lvl="0" indent="0" algn="l" rtl="0">
-                <a:spcBef>
-                  <a:spcPts val="0"/>
-                </a:spcBef>
-                <a:spcAft>
-                  <a:spcPts val="0"/>
-                </a:spcAft>
-                <a:buNone/>
-              </a:pPr>
-              <a:endParaRPr/>
-            </a:p>
-          </p:txBody>
-        </p:sp>
         <p:sp>
           <p:nvSpPr>
             <p:cNvPr id="139" name="Google Shape;139;p17"/>
@@ -19053,46 +16259,6 @@
               <a:chExt cx="1143000" cy="895500"/>
             </a:xfrm>
           </p:grpSpPr>
-          <p:sp>
-            <p:nvSpPr>
-              <p:cNvPr id="142" name="Google Shape;142;p17"/>
-              <p:cNvSpPr/>
-              <p:nvPr/>
-            </p:nvSpPr>
-            <p:spPr>
-              <a:xfrm>
-                <a:off x="0" y="0"/>
-                <a:ext cx="304800" cy="304800"/>
-              </a:xfrm>
-              <a:prstGeom prst="ellipse">
-                <a:avLst/>
-              </a:prstGeom>
-              <a:solidFill>
-                <a:srgbClr val="5A7557"/>
-              </a:solidFill>
-              <a:ln>
-                <a:noFill/>
-              </a:ln>
-            </p:spPr>
-            <p:txBody>
-              <a:bodyPr spcFirstLastPara="1" wrap="square" lIns="0" tIns="0" rIns="0" bIns="0" anchor="ctr" anchorCtr="0">
-                <a:noAutofit/>
-              </a:bodyPr>
-              <a:lstStyle/>
-              <a:p>
-                <a:pPr marL="0" lvl="0" indent="0" algn="l" rtl="0">
-                  <a:spcBef>
-                    <a:spcPts val="0"/>
-                  </a:spcBef>
-                  <a:spcAft>
-                    <a:spcPts val="0"/>
-                  </a:spcAft>
-                  <a:buNone/>
-                </a:pPr>
-                <a:endParaRPr/>
-              </a:p>
-            </p:txBody>
-          </p:sp>
           <p:sp>
             <p:nvSpPr>
               <p:cNvPr id="143" name="Google Shape;143;p17"/>
@@ -19210,67 +16376,6 @@
             </p:txBody>
           </p:sp>
         </p:grpSp>
-        <p:sp>
-          <p:nvSpPr>
-            <p:cNvPr id="145" name="Google Shape;145;p17"/>
-            <p:cNvSpPr/>
-            <p:nvPr/>
-          </p:nvSpPr>
-          <p:spPr>
-            <a:xfrm>
-              <a:off x="714375" y="57150"/>
-              <a:ext cx="114300" cy="190500"/>
-            </a:xfrm>
-            <a:custGeom>
-              <a:avLst/>
-              <a:gdLst/>
-              <a:ahLst/>
-              <a:cxnLst/>
-              <a:rect l="l" t="t" r="r" b="b"/>
-              <a:pathLst>
-                <a:path w="120000" h="120000" extrusionOk="0">
-                  <a:moveTo>
-                    <a:pt x="0" y="0"/>
-                  </a:moveTo>
-                  <a:lnTo>
-                    <a:pt x="120000" y="60000"/>
-                  </a:lnTo>
-                  <a:lnTo>
-                    <a:pt x="0" y="120000"/>
-                  </a:lnTo>
-                  <a:lnTo>
-                    <a:pt x="30000" y="60000"/>
-                  </a:lnTo>
-                  <a:close/>
-                </a:path>
-              </a:pathLst>
-            </a:custGeom>
-            <a:solidFill>
-              <a:srgbClr val="E8E5DA"/>
-            </a:solidFill>
-            <a:ln>
-              <a:noFill/>
-            </a:ln>
-          </p:spPr>
-          <p:txBody>
-            <a:bodyPr spcFirstLastPara="1" wrap="square" lIns="0" tIns="0" rIns="0" bIns="0" anchor="ctr" anchorCtr="0">
-              <a:noAutofit/>
-            </a:bodyPr>
-            <a:lstStyle/>
-            <a:p>
-              <a:pPr marL="0" lvl="0" indent="0" algn="l" rtl="0">
-                <a:spcBef>
-                  <a:spcPts val="0"/>
-                </a:spcBef>
-                <a:spcAft>
-                  <a:spcPts val="0"/>
-                </a:spcAft>
-                <a:buNone/>
-              </a:pPr>
-              <a:endParaRPr/>
-            </a:p>
-          </p:txBody>
-        </p:sp>
         <p:grpSp>
           <p:nvGrpSpPr>
             <p:cNvPr id="146" name="Google Shape;146;p17"/>
@@ -19285,46 +16390,6 @@
               <a:chExt cx="1143000" cy="895500"/>
             </a:xfrm>
           </p:grpSpPr>
-          <p:sp>
-            <p:nvSpPr>
-              <p:cNvPr id="147" name="Google Shape;147;p17"/>
-              <p:cNvSpPr/>
-              <p:nvPr/>
-            </p:nvSpPr>
-            <p:spPr>
-              <a:xfrm>
-                <a:off x="0" y="0"/>
-                <a:ext cx="304800" cy="304800"/>
-              </a:xfrm>
-              <a:prstGeom prst="ellipse">
-                <a:avLst/>
-              </a:prstGeom>
-              <a:solidFill>
-                <a:srgbClr val="5A7557"/>
-              </a:solidFill>
-              <a:ln>
-                <a:noFill/>
-              </a:ln>
-            </p:spPr>
-            <p:txBody>
-              <a:bodyPr spcFirstLastPara="1" wrap="square" lIns="0" tIns="0" rIns="0" bIns="0" anchor="ctr" anchorCtr="0">
-                <a:noAutofit/>
-              </a:bodyPr>
-              <a:lstStyle/>
-              <a:p>
-                <a:pPr marL="0" lvl="0" indent="0" algn="l" rtl="0">
-                  <a:spcBef>
-                    <a:spcPts val="0"/>
-                  </a:spcBef>
-                  <a:spcAft>
-                    <a:spcPts val="0"/>
-                  </a:spcAft>
-                  <a:buNone/>
-                </a:pPr>
-                <a:endParaRPr/>
-              </a:p>
-            </p:txBody>
-          </p:sp>
           <p:sp>
             <p:nvSpPr>
               <p:cNvPr id="148" name="Google Shape;148;p17"/>
@@ -19442,67 +16507,6 @@
             </p:txBody>
           </p:sp>
         </p:grpSp>
-        <p:sp>
-          <p:nvSpPr>
-            <p:cNvPr id="150" name="Google Shape;150;p17"/>
-            <p:cNvSpPr/>
-            <p:nvPr/>
-          </p:nvSpPr>
-          <p:spPr>
-            <a:xfrm>
-              <a:off x="1857375" y="57150"/>
-              <a:ext cx="114300" cy="190500"/>
-            </a:xfrm>
-            <a:custGeom>
-              <a:avLst/>
-              <a:gdLst/>
-              <a:ahLst/>
-              <a:cxnLst/>
-              <a:rect l="l" t="t" r="r" b="b"/>
-              <a:pathLst>
-                <a:path w="120000" h="120000" extrusionOk="0">
-                  <a:moveTo>
-                    <a:pt x="0" y="0"/>
-                  </a:moveTo>
-                  <a:lnTo>
-                    <a:pt x="120000" y="60000"/>
-                  </a:lnTo>
-                  <a:lnTo>
-                    <a:pt x="0" y="120000"/>
-                  </a:lnTo>
-                  <a:lnTo>
-                    <a:pt x="30000" y="60000"/>
-                  </a:lnTo>
-                  <a:close/>
-                </a:path>
-              </a:pathLst>
-            </a:custGeom>
-            <a:solidFill>
-              <a:srgbClr val="E8E5DA"/>
-            </a:solidFill>
-            <a:ln>
-              <a:noFill/>
-            </a:ln>
-          </p:spPr>
-          <p:txBody>
-            <a:bodyPr spcFirstLastPara="1" wrap="square" lIns="0" tIns="0" rIns="0" bIns="0" anchor="ctr" anchorCtr="0">
-              <a:noAutofit/>
-            </a:bodyPr>
-            <a:lstStyle/>
-            <a:p>
-              <a:pPr marL="0" lvl="0" indent="0" algn="l" rtl="0">
-                <a:spcBef>
-                  <a:spcPts val="0"/>
-                </a:spcBef>
-                <a:spcAft>
-                  <a:spcPts val="0"/>
-                </a:spcAft>
-                <a:buNone/>
-              </a:pPr>
-              <a:endParaRPr/>
-            </a:p>
-          </p:txBody>
-        </p:sp>
         <p:grpSp>
           <p:nvGrpSpPr>
             <p:cNvPr id="151" name="Google Shape;151;p17"/>
@@ -19517,46 +16521,6 @@
               <a:chExt cx="1143000" cy="895500"/>
             </a:xfrm>
           </p:grpSpPr>
-          <p:sp>
-            <p:nvSpPr>
-              <p:cNvPr id="152" name="Google Shape;152;p17"/>
-              <p:cNvSpPr/>
-              <p:nvPr/>
-            </p:nvSpPr>
-            <p:spPr>
-              <a:xfrm>
-                <a:off x="0" y="0"/>
-                <a:ext cx="304800" cy="304800"/>
-              </a:xfrm>
-              <a:prstGeom prst="ellipse">
-                <a:avLst/>
-              </a:prstGeom>
-              <a:solidFill>
-                <a:srgbClr val="5A7557"/>
-              </a:solidFill>
-              <a:ln>
-                <a:noFill/>
-              </a:ln>
-            </p:spPr>
-            <p:txBody>
-              <a:bodyPr spcFirstLastPara="1" wrap="square" lIns="0" tIns="0" rIns="0" bIns="0" anchor="ctr" anchorCtr="0">
-                <a:noAutofit/>
-              </a:bodyPr>
-              <a:lstStyle/>
-              <a:p>
-                <a:pPr marL="0" lvl="0" indent="0" algn="l" rtl="0">
-                  <a:spcBef>
-                    <a:spcPts val="0"/>
-                  </a:spcBef>
-                  <a:spcAft>
-                    <a:spcPts val="0"/>
-                  </a:spcAft>
-                  <a:buNone/>
-                </a:pPr>
-                <a:endParaRPr/>
-              </a:p>
-            </p:txBody>
-          </p:sp>
           <p:sp>
             <p:nvSpPr>
               <p:cNvPr id="153" name="Google Shape;153;p17"/>
@@ -19674,67 +16638,6 @@
             </p:txBody>
           </p:sp>
         </p:grpSp>
-        <p:sp>
-          <p:nvSpPr>
-            <p:cNvPr id="155" name="Google Shape;155;p17"/>
-            <p:cNvSpPr/>
-            <p:nvPr/>
-          </p:nvSpPr>
-          <p:spPr>
-            <a:xfrm>
-              <a:off x="3000375" y="57150"/>
-              <a:ext cx="114300" cy="190500"/>
-            </a:xfrm>
-            <a:custGeom>
-              <a:avLst/>
-              <a:gdLst/>
-              <a:ahLst/>
-              <a:cxnLst/>
-              <a:rect l="l" t="t" r="r" b="b"/>
-              <a:pathLst>
-                <a:path w="120000" h="120000" extrusionOk="0">
-                  <a:moveTo>
-                    <a:pt x="0" y="0"/>
-                  </a:moveTo>
-                  <a:lnTo>
-                    <a:pt x="120000" y="60000"/>
-                  </a:lnTo>
-                  <a:lnTo>
-                    <a:pt x="0" y="120000"/>
-                  </a:lnTo>
-                  <a:lnTo>
-                    <a:pt x="30000" y="60000"/>
-                  </a:lnTo>
-                  <a:close/>
-                </a:path>
-              </a:pathLst>
-            </a:custGeom>
-            <a:solidFill>
-              <a:srgbClr val="E8E5DA"/>
-            </a:solidFill>
-            <a:ln>
-              <a:noFill/>
-            </a:ln>
-          </p:spPr>
-          <p:txBody>
-            <a:bodyPr spcFirstLastPara="1" wrap="square" lIns="0" tIns="0" rIns="0" bIns="0" anchor="ctr" anchorCtr="0">
-              <a:noAutofit/>
-            </a:bodyPr>
-            <a:lstStyle/>
-            <a:p>
-              <a:pPr marL="0" lvl="0" indent="0" algn="l" rtl="0">
-                <a:spcBef>
-                  <a:spcPts val="0"/>
-                </a:spcBef>
-                <a:spcAft>
-                  <a:spcPts val="0"/>
-                </a:spcAft>
-                <a:buNone/>
-              </a:pPr>
-              <a:endParaRPr/>
-            </a:p>
-          </p:txBody>
-        </p:sp>
         <p:grpSp>
           <p:nvGrpSpPr>
             <p:cNvPr id="156" name="Google Shape;156;p17"/>
@@ -19749,46 +16652,6 @@
               <a:chExt cx="1143000" cy="895500"/>
             </a:xfrm>
           </p:grpSpPr>
-          <p:sp>
-            <p:nvSpPr>
-              <p:cNvPr id="157" name="Google Shape;157;p17"/>
-              <p:cNvSpPr/>
-              <p:nvPr/>
-            </p:nvSpPr>
-            <p:spPr>
-              <a:xfrm>
-                <a:off x="0" y="0"/>
-                <a:ext cx="304800" cy="304800"/>
-              </a:xfrm>
-              <a:prstGeom prst="ellipse">
-                <a:avLst/>
-              </a:prstGeom>
-              <a:solidFill>
-                <a:srgbClr val="5A7557"/>
-              </a:solidFill>
-              <a:ln>
-                <a:noFill/>
-              </a:ln>
-            </p:spPr>
-            <p:txBody>
-              <a:bodyPr spcFirstLastPara="1" wrap="square" lIns="0" tIns="0" rIns="0" bIns="0" anchor="ctr" anchorCtr="0">
-                <a:noAutofit/>
-              </a:bodyPr>
-              <a:lstStyle/>
-              <a:p>
-                <a:pPr marL="0" lvl="0" indent="0" algn="l" rtl="0">
-                  <a:spcBef>
-                    <a:spcPts val="0"/>
-                  </a:spcBef>
-                  <a:spcAft>
-                    <a:spcPts val="0"/>
-                  </a:spcAft>
-                  <a:buNone/>
-                </a:pPr>
-                <a:endParaRPr/>
-              </a:p>
-            </p:txBody>
-          </p:sp>
           <p:sp>
             <p:nvSpPr>
               <p:cNvPr id="158" name="Google Shape;158;p17"/>
@@ -19906,67 +16769,6 @@
             </p:txBody>
           </p:sp>
         </p:grpSp>
-        <p:sp>
-          <p:nvSpPr>
-            <p:cNvPr id="160" name="Google Shape;160;p17"/>
-            <p:cNvSpPr/>
-            <p:nvPr/>
-          </p:nvSpPr>
-          <p:spPr>
-            <a:xfrm>
-              <a:off x="4143375" y="57150"/>
-              <a:ext cx="114300" cy="190500"/>
-            </a:xfrm>
-            <a:custGeom>
-              <a:avLst/>
-              <a:gdLst/>
-              <a:ahLst/>
-              <a:cxnLst/>
-              <a:rect l="l" t="t" r="r" b="b"/>
-              <a:pathLst>
-                <a:path w="120000" h="120000" extrusionOk="0">
-                  <a:moveTo>
-                    <a:pt x="0" y="0"/>
-                  </a:moveTo>
-                  <a:lnTo>
-                    <a:pt x="120000" y="60000"/>
-                  </a:lnTo>
-                  <a:lnTo>
-                    <a:pt x="0" y="120000"/>
-                  </a:lnTo>
-                  <a:lnTo>
-                    <a:pt x="30000" y="60000"/>
-                  </a:lnTo>
-                  <a:close/>
-                </a:path>
-              </a:pathLst>
-            </a:custGeom>
-            <a:solidFill>
-              <a:srgbClr val="E8E5DA"/>
-            </a:solidFill>
-            <a:ln>
-              <a:noFill/>
-            </a:ln>
-          </p:spPr>
-          <p:txBody>
-            <a:bodyPr spcFirstLastPara="1" wrap="square" lIns="0" tIns="0" rIns="0" bIns="0" anchor="ctr" anchorCtr="0">
-              <a:noAutofit/>
-            </a:bodyPr>
-            <a:lstStyle/>
-            <a:p>
-              <a:pPr marL="0" lvl="0" indent="0" algn="l" rtl="0">
-                <a:spcBef>
-                  <a:spcPts val="0"/>
-                </a:spcBef>
-                <a:spcAft>
-                  <a:spcPts val="0"/>
-                </a:spcAft>
-                <a:buNone/>
-              </a:pPr>
-              <a:endParaRPr/>
-            </a:p>
-          </p:txBody>
-        </p:sp>
         <p:grpSp>
           <p:nvGrpSpPr>
             <p:cNvPr id="161" name="Google Shape;161;p17"/>
@@ -19981,46 +16783,6 @@
               <a:chExt cx="1143000" cy="895500"/>
             </a:xfrm>
           </p:grpSpPr>
-          <p:sp>
-            <p:nvSpPr>
-              <p:cNvPr id="162" name="Google Shape;162;p17"/>
-              <p:cNvSpPr/>
-              <p:nvPr/>
-            </p:nvSpPr>
-            <p:spPr>
-              <a:xfrm>
-                <a:off x="0" y="0"/>
-                <a:ext cx="304800" cy="304800"/>
-              </a:xfrm>
-              <a:prstGeom prst="ellipse">
-                <a:avLst/>
-              </a:prstGeom>
-              <a:solidFill>
-                <a:srgbClr val="5A7557"/>
-              </a:solidFill>
-              <a:ln>
-                <a:noFill/>
-              </a:ln>
-            </p:spPr>
-            <p:txBody>
-              <a:bodyPr spcFirstLastPara="1" wrap="square" lIns="0" tIns="0" rIns="0" bIns="0" anchor="ctr" anchorCtr="0">
-                <a:noAutofit/>
-              </a:bodyPr>
-              <a:lstStyle/>
-              <a:p>
-                <a:pPr marL="0" lvl="0" indent="0" algn="l" rtl="0">
-                  <a:spcBef>
-                    <a:spcPts val="0"/>
-                  </a:spcBef>
-                  <a:spcAft>
-                    <a:spcPts val="0"/>
-                  </a:spcAft>
-                  <a:buNone/>
-                </a:pPr>
-                <a:endParaRPr/>
-              </a:p>
-            </p:txBody>
-          </p:sp>
           <p:sp>
             <p:nvSpPr>
               <p:cNvPr id="163" name="Google Shape;163;p17"/>
@@ -20138,67 +16900,6 @@
             </p:txBody>
           </p:sp>
         </p:grpSp>
-        <p:sp>
-          <p:nvSpPr>
-            <p:cNvPr id="165" name="Google Shape;165;p17"/>
-            <p:cNvSpPr/>
-            <p:nvPr/>
-          </p:nvSpPr>
-          <p:spPr>
-            <a:xfrm>
-              <a:off x="5286375" y="57150"/>
-              <a:ext cx="114300" cy="190500"/>
-            </a:xfrm>
-            <a:custGeom>
-              <a:avLst/>
-              <a:gdLst/>
-              <a:ahLst/>
-              <a:cxnLst/>
-              <a:rect l="l" t="t" r="r" b="b"/>
-              <a:pathLst>
-                <a:path w="120000" h="120000" extrusionOk="0">
-                  <a:moveTo>
-                    <a:pt x="0" y="0"/>
-                  </a:moveTo>
-                  <a:lnTo>
-                    <a:pt x="120000" y="60000"/>
-                  </a:lnTo>
-                  <a:lnTo>
-                    <a:pt x="0" y="120000"/>
-                  </a:lnTo>
-                  <a:lnTo>
-                    <a:pt x="30000" y="60000"/>
-                  </a:lnTo>
-                  <a:close/>
-                </a:path>
-              </a:pathLst>
-            </a:custGeom>
-            <a:solidFill>
-              <a:srgbClr val="E8E5DA"/>
-            </a:solidFill>
-            <a:ln>
-              <a:noFill/>
-            </a:ln>
-          </p:spPr>
-          <p:txBody>
-            <a:bodyPr spcFirstLastPara="1" wrap="square" lIns="0" tIns="0" rIns="0" bIns="0" anchor="ctr" anchorCtr="0">
-              <a:noAutofit/>
-            </a:bodyPr>
-            <a:lstStyle/>
-            <a:p>
-              <a:pPr marL="0" lvl="0" indent="0" algn="l" rtl="0">
-                <a:spcBef>
-                  <a:spcPts val="0"/>
-                </a:spcBef>
-                <a:spcAft>
-                  <a:spcPts val="0"/>
-                </a:spcAft>
-                <a:buNone/>
-              </a:pPr>
-              <a:endParaRPr/>
-            </a:p>
-          </p:txBody>
-        </p:sp>
         <p:grpSp>
           <p:nvGrpSpPr>
             <p:cNvPr id="166" name="Google Shape;166;p17"/>
@@ -20213,46 +16914,6 @@
               <a:chExt cx="1143000" cy="895500"/>
             </a:xfrm>
           </p:grpSpPr>
-          <p:sp>
-            <p:nvSpPr>
-              <p:cNvPr id="167" name="Google Shape;167;p17"/>
-              <p:cNvSpPr/>
-              <p:nvPr/>
-            </p:nvSpPr>
-            <p:spPr>
-              <a:xfrm>
-                <a:off x="0" y="0"/>
-                <a:ext cx="304800" cy="304800"/>
-              </a:xfrm>
-              <a:prstGeom prst="ellipse">
-                <a:avLst/>
-              </a:prstGeom>
-              <a:solidFill>
-                <a:srgbClr val="5A7557"/>
-              </a:solidFill>
-              <a:ln>
-                <a:noFill/>
-              </a:ln>
-            </p:spPr>
-            <p:txBody>
-              <a:bodyPr spcFirstLastPara="1" wrap="square" lIns="0" tIns="0" rIns="0" bIns="0" anchor="ctr" anchorCtr="0">
-                <a:noAutofit/>
-              </a:bodyPr>
-              <a:lstStyle/>
-              <a:p>
-                <a:pPr marL="0" lvl="0" indent="0" algn="l" rtl="0">
-                  <a:spcBef>
-                    <a:spcPts val="0"/>
-                  </a:spcBef>
-                  <a:spcAft>
-                    <a:spcPts val="0"/>
-                  </a:spcAft>
-                  <a:buNone/>
-                </a:pPr>
-                <a:endParaRPr/>
-              </a:p>
-            </p:txBody>
-          </p:sp>
           <p:sp>
             <p:nvSpPr>
               <p:cNvPr id="168" name="Google Shape;168;p17"/>
@@ -20370,67 +17031,6 @@
             </p:txBody>
           </p:sp>
         </p:grpSp>
-        <p:sp>
-          <p:nvSpPr>
-            <p:cNvPr id="170" name="Google Shape;170;p17"/>
-            <p:cNvSpPr/>
-            <p:nvPr/>
-          </p:nvSpPr>
-          <p:spPr>
-            <a:xfrm>
-              <a:off x="6429375" y="57150"/>
-              <a:ext cx="114300" cy="190500"/>
-            </a:xfrm>
-            <a:custGeom>
-              <a:avLst/>
-              <a:gdLst/>
-              <a:ahLst/>
-              <a:cxnLst/>
-              <a:rect l="l" t="t" r="r" b="b"/>
-              <a:pathLst>
-                <a:path w="120000" h="120000" extrusionOk="0">
-                  <a:moveTo>
-                    <a:pt x="0" y="0"/>
-                  </a:moveTo>
-                  <a:lnTo>
-                    <a:pt x="120000" y="60000"/>
-                  </a:lnTo>
-                  <a:lnTo>
-                    <a:pt x="0" y="120000"/>
-                  </a:lnTo>
-                  <a:lnTo>
-                    <a:pt x="30000" y="60000"/>
-                  </a:lnTo>
-                  <a:close/>
-                </a:path>
-              </a:pathLst>
-            </a:custGeom>
-            <a:solidFill>
-              <a:srgbClr val="E8E5DA"/>
-            </a:solidFill>
-            <a:ln>
-              <a:noFill/>
-            </a:ln>
-          </p:spPr>
-          <p:txBody>
-            <a:bodyPr spcFirstLastPara="1" wrap="square" lIns="0" tIns="0" rIns="0" bIns="0" anchor="ctr" anchorCtr="0">
-              <a:noAutofit/>
-            </a:bodyPr>
-            <a:lstStyle/>
-            <a:p>
-              <a:pPr marL="0" lvl="0" indent="0" algn="l" rtl="0">
-                <a:spcBef>
-                  <a:spcPts val="0"/>
-                </a:spcBef>
-                <a:spcAft>
-                  <a:spcPts val="0"/>
-                </a:spcAft>
-                <a:buNone/>
-              </a:pPr>
-              <a:endParaRPr/>
-            </a:p>
-          </p:txBody>
-        </p:sp>
         <p:grpSp>
           <p:nvGrpSpPr>
             <p:cNvPr id="171" name="Google Shape;171;p17"/>
@@ -20445,46 +17045,6 @@
               <a:chExt cx="1143000" cy="895500"/>
             </a:xfrm>
           </p:grpSpPr>
-          <p:sp>
-            <p:nvSpPr>
-              <p:cNvPr id="172" name="Google Shape;172;p17"/>
-              <p:cNvSpPr/>
-              <p:nvPr/>
-            </p:nvSpPr>
-            <p:spPr>
-              <a:xfrm>
-                <a:off x="0" y="0"/>
-                <a:ext cx="304800" cy="304800"/>
-              </a:xfrm>
-              <a:prstGeom prst="ellipse">
-                <a:avLst/>
-              </a:prstGeom>
-              <a:solidFill>
-                <a:srgbClr val="5A7557"/>
-              </a:solidFill>
-              <a:ln>
-                <a:noFill/>
-              </a:ln>
-            </p:spPr>
-            <p:txBody>
-              <a:bodyPr spcFirstLastPara="1" wrap="square" lIns="0" tIns="0" rIns="0" bIns="0" anchor="ctr" anchorCtr="0">
-                <a:noAutofit/>
-              </a:bodyPr>
-              <a:lstStyle/>
-              <a:p>
-                <a:pPr marL="0" lvl="0" indent="0" algn="l" rtl="0">
-                  <a:spcBef>
-                    <a:spcPts val="0"/>
-                  </a:spcBef>
-                  <a:spcAft>
-                    <a:spcPts val="0"/>
-                  </a:spcAft>
-                  <a:buNone/>
-                </a:pPr>
-                <a:endParaRPr/>
-              </a:p>
-            </p:txBody>
-          </p:sp>
           <p:sp>
             <p:nvSpPr>
               <p:cNvPr id="173" name="Google Shape;173;p17"/>
@@ -20735,7 +17295,7 @@
                   <a:cs typeface="Noto Sans TC"/>
                   <a:sym typeface="Noto Sans TC"/>
                 </a:rPr>
-                <a:t>► 關鍵期限：</a:t>
+                <a:t>關鍵期限：</a:t>
               </a:r>
               <a:r>
                 <a:rPr lang="zh-TW" sz="1050" b="1">
@@ -21078,154 +17638,6 @@
         </p:grpSpPr>
         <p:sp>
           <p:nvSpPr>
-            <p:cNvPr id="189" name="Google Shape;189;p18"/>
-            <p:cNvSpPr/>
-            <p:nvPr/>
-          </p:nvSpPr>
-          <p:spPr>
-            <a:xfrm>
-              <a:off x="0" y="0"/>
-              <a:ext cx="304800" cy="304800"/>
-            </a:xfrm>
-            <a:custGeom>
-              <a:avLst/>
-              <a:gdLst/>
-              <a:ahLst/>
-              <a:cxnLst/>
-              <a:rect l="l" t="t" r="r" b="b"/>
-              <a:pathLst>
-                <a:path w="120000" h="120000" extrusionOk="0">
-                  <a:moveTo>
-                    <a:pt x="0" y="60000"/>
-                  </a:moveTo>
-                  <a:cubicBezTo>
-                    <a:pt x="0" y="0"/>
-                    <a:pt x="60000" y="0"/>
-                    <a:pt x="60000" y="0"/>
-                  </a:cubicBezTo>
-                  <a:cubicBezTo>
-                    <a:pt x="120000" y="0"/>
-                    <a:pt x="120000" y="60000"/>
-                    <a:pt x="120000" y="60000"/>
-                  </a:cubicBezTo>
-                  <a:cubicBezTo>
-                    <a:pt x="120000" y="120000"/>
-                    <a:pt x="60000" y="120000"/>
-                    <a:pt x="60000" y="120000"/>
-                  </a:cubicBezTo>
-                  <a:cubicBezTo>
-                    <a:pt x="0" y="120000"/>
-                    <a:pt x="0" y="60000"/>
-                    <a:pt x="0" y="60000"/>
-                  </a:cubicBezTo>
-                  <a:close/>
-                </a:path>
-              </a:pathLst>
-            </a:custGeom>
-            <a:solidFill>
-              <a:srgbClr val="5A7557">
-                <a:alpha val="80000"/>
-              </a:srgbClr>
-            </a:solidFill>
-            <a:ln>
-              <a:noFill/>
-            </a:ln>
-          </p:spPr>
-          <p:txBody>
-            <a:bodyPr spcFirstLastPara="1" wrap="square" lIns="0" tIns="0" rIns="0" bIns="0" anchor="ctr" anchorCtr="0">
-              <a:noAutofit/>
-            </a:bodyPr>
-            <a:lstStyle/>
-            <a:p>
-              <a:pPr marL="0" lvl="0" indent="0" algn="l" rtl="0">
-                <a:spcBef>
-                  <a:spcPts val="0"/>
-                </a:spcBef>
-                <a:spcAft>
-                  <a:spcPts val="0"/>
-                </a:spcAft>
-                <a:buNone/>
-              </a:pPr>
-              <a:endParaRPr/>
-            </a:p>
-          </p:txBody>
-        </p:sp>
-        <p:sp>
-          <p:nvSpPr>
-            <p:cNvPr id="190" name="Google Shape;190;p18"/>
-            <p:cNvSpPr/>
-            <p:nvPr/>
-          </p:nvSpPr>
-          <p:spPr>
-            <a:xfrm>
-              <a:off x="114300" y="76200"/>
-              <a:ext cx="304800" cy="304800"/>
-            </a:xfrm>
-            <a:custGeom>
-              <a:avLst/>
-              <a:gdLst/>
-              <a:ahLst/>
-              <a:cxnLst/>
-              <a:rect l="l" t="t" r="r" b="b"/>
-              <a:pathLst>
-                <a:path w="120000" h="120000" extrusionOk="0">
-                  <a:moveTo>
-                    <a:pt x="0" y="60000"/>
-                  </a:moveTo>
-                  <a:cubicBezTo>
-                    <a:pt x="0" y="0"/>
-                    <a:pt x="60000" y="0"/>
-                    <a:pt x="60000" y="0"/>
-                  </a:cubicBezTo>
-                  <a:cubicBezTo>
-                    <a:pt x="120000" y="0"/>
-                    <a:pt x="120000" y="60000"/>
-                    <a:pt x="120000" y="60000"/>
-                  </a:cubicBezTo>
-                  <a:cubicBezTo>
-                    <a:pt x="120000" y="120000"/>
-                    <a:pt x="60000" y="120000"/>
-                    <a:pt x="60000" y="120000"/>
-                  </a:cubicBezTo>
-                  <a:cubicBezTo>
-                    <a:pt x="0" y="120000"/>
-                    <a:pt x="0" y="60000"/>
-                    <a:pt x="0" y="60000"/>
-                  </a:cubicBezTo>
-                  <a:close/>
-                </a:path>
-              </a:pathLst>
-            </a:custGeom>
-            <a:solidFill>
-              <a:srgbClr val="7C9878">
-                <a:alpha val="60000"/>
-              </a:srgbClr>
-            </a:solidFill>
-            <a:ln>
-              <a:noFill/>
-            </a:ln>
-          </p:spPr>
-          <p:txBody>
-            <a:bodyPr spcFirstLastPara="1" wrap="square" lIns="0" tIns="0" rIns="0" bIns="0" anchor="ctr" anchorCtr="0">
-              <a:noAutofit/>
-            </a:bodyPr>
-            <a:lstStyle/>
-            <a:p>
-              <a:pPr marL="0" lvl="0" indent="0" algn="l" rtl="0">
-                <a:spcBef>
-                  <a:spcPts val="0"/>
-                </a:spcBef>
-                <a:spcAft>
-                  <a:spcPts val="0"/>
-                </a:spcAft>
-                <a:buNone/>
-              </a:pPr>
-              <a:endParaRPr/>
-            </a:p>
-          </p:txBody>
-        </p:sp>
-        <p:sp>
-          <p:nvSpPr>
             <p:cNvPr id="191" name="Google Shape;191;p18"/>
             <p:cNvSpPr txBox="1"/>
             <p:nvPr/>
@@ -21383,7 +17795,7 @@
                   <a:cs typeface="Noto Sans TC"/>
                   <a:sym typeface="Noto Sans TC"/>
                 </a:rPr>
-                <a:t>▲ DANGER ZONE</a:t>
+                <a:t>DANGER ZONE</a:t>
               </a:r>
               <a:endParaRPr sz="900" b="1">
                 <a:solidFill>
@@ -21394,48 +17806,6 @@
                 <a:cs typeface="Noto Sans TC"/>
                 <a:sym typeface="Noto Sans TC"/>
               </a:endParaRPr>
-            </a:p>
-          </p:txBody>
-        </p:sp>
-        <p:sp>
-          <p:nvSpPr>
-            <p:cNvPr id="195" name="Google Shape;195;p18"/>
-            <p:cNvSpPr/>
-            <p:nvPr/>
-          </p:nvSpPr>
-          <p:spPr>
-            <a:xfrm>
-              <a:off x="0" y="457200"/>
-              <a:ext cx="38100" cy="304800"/>
-            </a:xfrm>
-            <a:prstGeom prst="roundRect">
-              <a:avLst>
-                <a:gd name="adj" fmla="val 50000"/>
-              </a:avLst>
-            </a:prstGeom>
-            <a:solidFill>
-              <a:srgbClr val="C55D4D"/>
-            </a:solidFill>
-            <a:ln>
-              <a:noFill/>
-            </a:ln>
-          </p:spPr>
-          <p:txBody>
-            <a:bodyPr spcFirstLastPara="1" wrap="square" lIns="0" tIns="0" rIns="0" bIns="0" anchor="ctr" anchorCtr="0">
-              <a:noAutofit/>
-            </a:bodyPr>
-            <a:lstStyle/>
-            <a:p>
-              <a:pPr marL="0" lvl="0" indent="0" algn="l" rtl="0">
-                <a:spcBef>
-                  <a:spcPts val="0"/>
-                </a:spcBef>
-                <a:spcAft>
-                  <a:spcPts val="0"/>
-                </a:spcAft>
-                <a:buNone/>
-              </a:pPr>
-              <a:endParaRPr/>
             </a:p>
           </p:txBody>
         </p:sp>
@@ -21562,69 +17932,6 @@
         </p:sp>
         <p:sp>
           <p:nvSpPr>
-            <p:cNvPr id="199" name="Google Shape;199;p18"/>
-            <p:cNvSpPr/>
-            <p:nvPr/>
-          </p:nvSpPr>
-          <p:spPr>
-            <a:xfrm>
-              <a:off x="228600" y="228600"/>
-              <a:ext cx="228600" cy="228600"/>
-            </a:xfrm>
-            <a:custGeom>
-              <a:avLst/>
-              <a:gdLst/>
-              <a:ahLst/>
-              <a:cxnLst/>
-              <a:rect l="l" t="t" r="r" b="b"/>
-              <a:pathLst>
-                <a:path w="120000" h="120000" extrusionOk="0">
-                  <a:moveTo>
-                    <a:pt x="0" y="60000"/>
-                  </a:moveTo>
-                  <a:lnTo>
-                    <a:pt x="60000" y="0"/>
-                  </a:lnTo>
-                  <a:lnTo>
-                    <a:pt x="120000" y="60000"/>
-                  </a:lnTo>
-                  <a:lnTo>
-                    <a:pt x="60000" y="120000"/>
-                  </a:lnTo>
-                  <a:close/>
-                </a:path>
-              </a:pathLst>
-            </a:custGeom>
-            <a:solidFill>
-              <a:srgbClr val="D87A68">
-                <a:alpha val="20000"/>
-              </a:srgbClr>
-            </a:solidFill>
-            <a:ln>
-              <a:noFill/>
-            </a:ln>
-          </p:spPr>
-          <p:txBody>
-            <a:bodyPr spcFirstLastPara="1" wrap="square" lIns="0" tIns="0" rIns="0" bIns="0" anchor="ctr" anchorCtr="0">
-              <a:noAutofit/>
-            </a:bodyPr>
-            <a:lstStyle/>
-            <a:p>
-              <a:pPr marL="0" lvl="0" indent="0" algn="l" rtl="0">
-                <a:spcBef>
-                  <a:spcPts val="0"/>
-                </a:spcBef>
-                <a:spcAft>
-                  <a:spcPts val="0"/>
-                </a:spcAft>
-                <a:buNone/>
-              </a:pPr>
-              <a:endParaRPr/>
-            </a:p>
-          </p:txBody>
-        </p:sp>
-        <p:sp>
-          <p:nvSpPr>
             <p:cNvPr id="200" name="Google Shape;200;p18"/>
             <p:cNvSpPr txBox="1"/>
             <p:nvPr/>
@@ -21667,7 +17974,7 @@
                   <a:cs typeface="Noto Sans TC"/>
                   <a:sym typeface="Noto Sans TC"/>
                 </a:rPr>
-                <a:t>▲ 驗資過水</a:t>
+                <a:t>驗資過水</a:t>
               </a:r>
               <a:endParaRPr sz="1650" b="1">
                 <a:solidFill>
@@ -21833,69 +18140,6 @@
         </p:sp>
         <p:sp>
           <p:nvSpPr>
-            <p:cNvPr id="203" name="Google Shape;203;p18"/>
-            <p:cNvSpPr/>
-            <p:nvPr/>
-          </p:nvSpPr>
-          <p:spPr>
-            <a:xfrm>
-              <a:off x="228600" y="228600"/>
-              <a:ext cx="228600" cy="228600"/>
-            </a:xfrm>
-            <a:custGeom>
-              <a:avLst/>
-              <a:gdLst/>
-              <a:ahLst/>
-              <a:cxnLst/>
-              <a:rect l="l" t="t" r="r" b="b"/>
-              <a:pathLst>
-                <a:path w="120000" h="120000" extrusionOk="0">
-                  <a:moveTo>
-                    <a:pt x="0" y="60000"/>
-                  </a:moveTo>
-                  <a:lnTo>
-                    <a:pt x="60000" y="0"/>
-                  </a:lnTo>
-                  <a:lnTo>
-                    <a:pt x="120000" y="60000"/>
-                  </a:lnTo>
-                  <a:lnTo>
-                    <a:pt x="60000" y="120000"/>
-                  </a:lnTo>
-                  <a:close/>
-                </a:path>
-              </a:pathLst>
-            </a:custGeom>
-            <a:solidFill>
-              <a:srgbClr val="D87A68">
-                <a:alpha val="20000"/>
-              </a:srgbClr>
-            </a:solidFill>
-            <a:ln>
-              <a:noFill/>
-            </a:ln>
-          </p:spPr>
-          <p:txBody>
-            <a:bodyPr spcFirstLastPara="1" wrap="square" lIns="0" tIns="0" rIns="0" bIns="0" anchor="ctr" anchorCtr="0">
-              <a:noAutofit/>
-            </a:bodyPr>
-            <a:lstStyle/>
-            <a:p>
-              <a:pPr marL="0" lvl="0" indent="0" algn="l" rtl="0">
-                <a:spcBef>
-                  <a:spcPts val="0"/>
-                </a:spcBef>
-                <a:spcAft>
-                  <a:spcPts val="0"/>
-                </a:spcAft>
-                <a:buNone/>
-              </a:pPr>
-              <a:endParaRPr/>
-            </a:p>
-          </p:txBody>
-        </p:sp>
-        <p:sp>
-          <p:nvSpPr>
             <p:cNvPr id="204" name="Google Shape;204;p18"/>
             <p:cNvSpPr txBox="1"/>
             <p:nvPr/>
@@ -21938,7 +18182,7 @@
                   <a:cs typeface="Noto Sans TC"/>
                   <a:sym typeface="Noto Sans TC"/>
                 </a:rPr>
-                <a:t>▲ 漏報 CTP</a:t>
+                <a:t>漏報 CTP</a:t>
               </a:r>
               <a:endParaRPr sz="1650" b="1">
                 <a:solidFill>
@@ -22302,154 +18546,6 @@
         </p:grpSpPr>
         <p:sp>
           <p:nvSpPr>
-            <p:cNvPr id="215" name="Google Shape;215;p19"/>
-            <p:cNvSpPr/>
-            <p:nvPr/>
-          </p:nvSpPr>
-          <p:spPr>
-            <a:xfrm>
-              <a:off x="0" y="0"/>
-              <a:ext cx="304800" cy="304800"/>
-            </a:xfrm>
-            <a:custGeom>
-              <a:avLst/>
-              <a:gdLst/>
-              <a:ahLst/>
-              <a:cxnLst/>
-              <a:rect l="l" t="t" r="r" b="b"/>
-              <a:pathLst>
-                <a:path w="120000" h="120000" extrusionOk="0">
-                  <a:moveTo>
-                    <a:pt x="0" y="60000"/>
-                  </a:moveTo>
-                  <a:cubicBezTo>
-                    <a:pt x="0" y="0"/>
-                    <a:pt x="60000" y="0"/>
-                    <a:pt x="60000" y="0"/>
-                  </a:cubicBezTo>
-                  <a:cubicBezTo>
-                    <a:pt x="120000" y="0"/>
-                    <a:pt x="120000" y="60000"/>
-                    <a:pt x="120000" y="60000"/>
-                  </a:cubicBezTo>
-                  <a:cubicBezTo>
-                    <a:pt x="120000" y="120000"/>
-                    <a:pt x="60000" y="120000"/>
-                    <a:pt x="60000" y="120000"/>
-                  </a:cubicBezTo>
-                  <a:cubicBezTo>
-                    <a:pt x="0" y="120000"/>
-                    <a:pt x="0" y="60000"/>
-                    <a:pt x="0" y="60000"/>
-                  </a:cubicBezTo>
-                  <a:close/>
-                </a:path>
-              </a:pathLst>
-            </a:custGeom>
-            <a:solidFill>
-              <a:srgbClr val="5A7557">
-                <a:alpha val="80000"/>
-              </a:srgbClr>
-            </a:solidFill>
-            <a:ln>
-              <a:noFill/>
-            </a:ln>
-          </p:spPr>
-          <p:txBody>
-            <a:bodyPr spcFirstLastPara="1" wrap="square" lIns="0" tIns="0" rIns="0" bIns="0" anchor="ctr" anchorCtr="0">
-              <a:noAutofit/>
-            </a:bodyPr>
-            <a:lstStyle/>
-            <a:p>
-              <a:pPr marL="0" lvl="0" indent="0" algn="l" rtl="0">
-                <a:spcBef>
-                  <a:spcPts val="0"/>
-                </a:spcBef>
-                <a:spcAft>
-                  <a:spcPts val="0"/>
-                </a:spcAft>
-                <a:buNone/>
-              </a:pPr>
-              <a:endParaRPr/>
-            </a:p>
-          </p:txBody>
-        </p:sp>
-        <p:sp>
-          <p:nvSpPr>
-            <p:cNvPr id="216" name="Google Shape;216;p19"/>
-            <p:cNvSpPr/>
-            <p:nvPr/>
-          </p:nvSpPr>
-          <p:spPr>
-            <a:xfrm>
-              <a:off x="114300" y="76200"/>
-              <a:ext cx="304800" cy="304800"/>
-            </a:xfrm>
-            <a:custGeom>
-              <a:avLst/>
-              <a:gdLst/>
-              <a:ahLst/>
-              <a:cxnLst/>
-              <a:rect l="l" t="t" r="r" b="b"/>
-              <a:pathLst>
-                <a:path w="120000" h="120000" extrusionOk="0">
-                  <a:moveTo>
-                    <a:pt x="0" y="60000"/>
-                  </a:moveTo>
-                  <a:cubicBezTo>
-                    <a:pt x="0" y="0"/>
-                    <a:pt x="60000" y="0"/>
-                    <a:pt x="60000" y="0"/>
-                  </a:cubicBezTo>
-                  <a:cubicBezTo>
-                    <a:pt x="120000" y="0"/>
-                    <a:pt x="120000" y="60000"/>
-                    <a:pt x="120000" y="60000"/>
-                  </a:cubicBezTo>
-                  <a:cubicBezTo>
-                    <a:pt x="120000" y="120000"/>
-                    <a:pt x="60000" y="120000"/>
-                    <a:pt x="60000" y="120000"/>
-                  </a:cubicBezTo>
-                  <a:cubicBezTo>
-                    <a:pt x="0" y="120000"/>
-                    <a:pt x="0" y="60000"/>
-                    <a:pt x="0" y="60000"/>
-                  </a:cubicBezTo>
-                  <a:close/>
-                </a:path>
-              </a:pathLst>
-            </a:custGeom>
-            <a:solidFill>
-              <a:srgbClr val="7C9878">
-                <a:alpha val="60000"/>
-              </a:srgbClr>
-            </a:solidFill>
-            <a:ln>
-              <a:noFill/>
-            </a:ln>
-          </p:spPr>
-          <p:txBody>
-            <a:bodyPr spcFirstLastPara="1" wrap="square" lIns="0" tIns="0" rIns="0" bIns="0" anchor="ctr" anchorCtr="0">
-              <a:noAutofit/>
-            </a:bodyPr>
-            <a:lstStyle/>
-            <a:p>
-              <a:pPr marL="0" lvl="0" indent="0" algn="l" rtl="0">
-                <a:spcBef>
-                  <a:spcPts val="0"/>
-                </a:spcBef>
-                <a:spcAft>
-                  <a:spcPts val="0"/>
-                </a:spcAft>
-                <a:buNone/>
-              </a:pPr>
-              <a:endParaRPr/>
-            </a:p>
-          </p:txBody>
-        </p:sp>
-        <p:sp>
-          <p:nvSpPr>
             <p:cNvPr id="217" name="Google Shape;217;p19"/>
             <p:cNvSpPr txBox="1"/>
             <p:nvPr/>
@@ -22521,48 +18617,6 @@
             <a:chExt cx="7772400" cy="762000"/>
           </a:xfrm>
         </p:grpSpPr>
-        <p:sp>
-          <p:nvSpPr>
-            <p:cNvPr id="219" name="Google Shape;219;p19"/>
-            <p:cNvSpPr/>
-            <p:nvPr/>
-          </p:nvSpPr>
-          <p:spPr>
-            <a:xfrm>
-              <a:off x="0" y="76200"/>
-              <a:ext cx="38100" cy="228600"/>
-            </a:xfrm>
-            <a:prstGeom prst="roundRect">
-              <a:avLst>
-                <a:gd name="adj" fmla="val 50000"/>
-              </a:avLst>
-            </a:prstGeom>
-            <a:solidFill>
-              <a:srgbClr val="5A7557"/>
-            </a:solidFill>
-            <a:ln>
-              <a:noFill/>
-            </a:ln>
-          </p:spPr>
-          <p:txBody>
-            <a:bodyPr spcFirstLastPara="1" wrap="square" lIns="0" tIns="0" rIns="0" bIns="0" anchor="ctr" anchorCtr="0">
-              <a:noAutofit/>
-            </a:bodyPr>
-            <a:lstStyle/>
-            <a:p>
-              <a:pPr marL="0" lvl="0" indent="0" algn="l" rtl="0">
-                <a:spcBef>
-                  <a:spcPts val="0"/>
-                </a:spcBef>
-                <a:spcAft>
-                  <a:spcPts val="0"/>
-                </a:spcAft>
-                <a:buNone/>
-              </a:pPr>
-              <a:endParaRPr/>
-            </a:p>
-          </p:txBody>
-        </p:sp>
         <p:sp>
           <p:nvSpPr>
             <p:cNvPr id="220" name="Google Shape;220;p19"/>
@@ -22750,111 +18804,6 @@
         </p:sp>
         <p:sp>
           <p:nvSpPr>
-            <p:cNvPr id="223" name="Google Shape;223;p19"/>
-            <p:cNvSpPr/>
-            <p:nvPr/>
-          </p:nvSpPr>
-          <p:spPr>
-            <a:xfrm>
-              <a:off x="171450" y="171450"/>
-              <a:ext cx="266700" cy="266700"/>
-            </a:xfrm>
-            <a:prstGeom prst="ellipse">
-              <a:avLst/>
-            </a:prstGeom>
-            <a:solidFill>
-              <a:srgbClr val="5A7557"/>
-            </a:solidFill>
-            <a:ln>
-              <a:noFill/>
-            </a:ln>
-          </p:spPr>
-          <p:txBody>
-            <a:bodyPr spcFirstLastPara="1" wrap="square" lIns="0" tIns="0" rIns="0" bIns="0" anchor="ctr" anchorCtr="0">
-              <a:noAutofit/>
-            </a:bodyPr>
-            <a:lstStyle/>
-            <a:p>
-              <a:pPr marL="0" lvl="0" indent="0" algn="l" rtl="0">
-                <a:spcBef>
-                  <a:spcPts val="0"/>
-                </a:spcBef>
-                <a:spcAft>
-                  <a:spcPts val="0"/>
-                </a:spcAft>
-                <a:buNone/>
-              </a:pPr>
-              <a:endParaRPr/>
-            </a:p>
-          </p:txBody>
-        </p:sp>
-        <p:sp>
-          <p:nvSpPr>
-            <p:cNvPr id="224" name="Google Shape;224;p19"/>
-            <p:cNvSpPr/>
-            <p:nvPr/>
-          </p:nvSpPr>
-          <p:spPr>
-            <a:xfrm>
-              <a:off x="247650" y="257175"/>
-              <a:ext cx="114300" cy="85800"/>
-            </a:xfrm>
-            <a:custGeom>
-              <a:avLst/>
-              <a:gdLst/>
-              <a:ahLst/>
-              <a:cxnLst/>
-              <a:rect l="l" t="t" r="r" b="b"/>
-              <a:pathLst>
-                <a:path w="120000" h="120000" extrusionOk="0">
-                  <a:moveTo>
-                    <a:pt x="0" y="66667"/>
-                  </a:moveTo>
-                  <a:lnTo>
-                    <a:pt x="40000" y="120000"/>
-                  </a:lnTo>
-                  <a:lnTo>
-                    <a:pt x="120000" y="0"/>
-                  </a:lnTo>
-                </a:path>
-              </a:pathLst>
-            </a:custGeom>
-            <a:solidFill>
-              <a:srgbClr val="000000">
-                <a:alpha val="0"/>
-              </a:srgbClr>
-            </a:solidFill>
-            <a:ln w="23825" cap="rnd" cmpd="sng">
-              <a:solidFill>
-                <a:srgbClr val="FFFFFF"/>
-              </a:solidFill>
-              <a:prstDash val="solid"/>
-              <a:round/>
-              <a:headEnd type="none" w="sm" len="sm"/>
-              <a:tailEnd type="none" w="sm" len="sm"/>
-            </a:ln>
-          </p:spPr>
-          <p:txBody>
-            <a:bodyPr spcFirstLastPara="1" wrap="square" lIns="0" tIns="0" rIns="0" bIns="0" anchor="ctr" anchorCtr="0">
-              <a:noAutofit/>
-            </a:bodyPr>
-            <a:lstStyle/>
-            <a:p>
-              <a:pPr marL="0" lvl="0" indent="0" algn="l" rtl="0">
-                <a:spcBef>
-                  <a:spcPts val="0"/>
-                </a:spcBef>
-                <a:spcAft>
-                  <a:spcPts val="0"/>
-                </a:spcAft>
-                <a:buNone/>
-              </a:pPr>
-              <a:endParaRPr/>
-            </a:p>
-          </p:txBody>
-        </p:sp>
-        <p:sp>
-          <p:nvSpPr>
             <p:cNvPr id="225" name="Google Shape;225;p19"/>
             <p:cNvSpPr txBox="1"/>
             <p:nvPr/>
@@ -22897,7 +18846,7 @@
                   <a:cs typeface="Noto Sans TC"/>
                   <a:sym typeface="Noto Sans TC"/>
                 </a:rPr>
-                <a:t>■ 免稅（未加工）</a:t>
+                <a:t>免稅（未加工）</a:t>
               </a:r>
               <a:endParaRPr sz="1650" b="1">
                 <a:solidFill>
@@ -23116,114 +19065,6 @@
         </p:sp>
         <p:sp>
           <p:nvSpPr>
-            <p:cNvPr id="228" name="Google Shape;228;p19"/>
-            <p:cNvSpPr/>
-            <p:nvPr/>
-          </p:nvSpPr>
-          <p:spPr>
-            <a:xfrm>
-              <a:off x="171450" y="171450"/>
-              <a:ext cx="266700" cy="266700"/>
-            </a:xfrm>
-            <a:prstGeom prst="ellipse">
-              <a:avLst/>
-            </a:prstGeom>
-            <a:solidFill>
-              <a:srgbClr val="C55D4D"/>
-            </a:solidFill>
-            <a:ln>
-              <a:noFill/>
-            </a:ln>
-          </p:spPr>
-          <p:txBody>
-            <a:bodyPr spcFirstLastPara="1" wrap="square" lIns="0" tIns="0" rIns="0" bIns="0" anchor="ctr" anchorCtr="0">
-              <a:noAutofit/>
-            </a:bodyPr>
-            <a:lstStyle/>
-            <a:p>
-              <a:pPr marL="0" lvl="0" indent="0" algn="l" rtl="0">
-                <a:spcBef>
-                  <a:spcPts val="0"/>
-                </a:spcBef>
-                <a:spcAft>
-                  <a:spcPts val="0"/>
-                </a:spcAft>
-                <a:buNone/>
-              </a:pPr>
-              <a:endParaRPr/>
-            </a:p>
-          </p:txBody>
-        </p:sp>
-        <p:sp>
-          <p:nvSpPr>
-            <p:cNvPr id="229" name="Google Shape;229;p19"/>
-            <p:cNvSpPr/>
-            <p:nvPr/>
-          </p:nvSpPr>
-          <p:spPr>
-            <a:xfrm>
-              <a:off x="257175" y="257175"/>
-              <a:ext cx="95400" cy="95400"/>
-            </a:xfrm>
-            <a:custGeom>
-              <a:avLst/>
-              <a:gdLst/>
-              <a:ahLst/>
-              <a:cxnLst/>
-              <a:rect l="l" t="t" r="r" b="b"/>
-              <a:pathLst>
-                <a:path w="120000" h="120000" extrusionOk="0">
-                  <a:moveTo>
-                    <a:pt x="0" y="0"/>
-                  </a:moveTo>
-                  <a:lnTo>
-                    <a:pt x="120000" y="120000"/>
-                  </a:lnTo>
-                  <a:moveTo>
-                    <a:pt x="120000" y="0"/>
-                  </a:moveTo>
-                  <a:lnTo>
-                    <a:pt x="0" y="120000"/>
-                  </a:lnTo>
-                </a:path>
-              </a:pathLst>
-            </a:custGeom>
-            <a:solidFill>
-              <a:srgbClr val="000000">
-                <a:alpha val="0"/>
-              </a:srgbClr>
-            </a:solidFill>
-            <a:ln w="23825" cap="rnd" cmpd="sng">
-              <a:solidFill>
-                <a:srgbClr val="FFFFFF"/>
-              </a:solidFill>
-              <a:prstDash val="solid"/>
-              <a:round/>
-              <a:headEnd type="none" w="sm" len="sm"/>
-              <a:tailEnd type="none" w="sm" len="sm"/>
-            </a:ln>
-          </p:spPr>
-          <p:txBody>
-            <a:bodyPr spcFirstLastPara="1" wrap="square" lIns="0" tIns="0" rIns="0" bIns="0" anchor="ctr" anchorCtr="0">
-              <a:noAutofit/>
-            </a:bodyPr>
-            <a:lstStyle/>
-            <a:p>
-              <a:pPr marL="0" lvl="0" indent="0" algn="l" rtl="0">
-                <a:spcBef>
-                  <a:spcPts val="0"/>
-                </a:spcBef>
-                <a:spcAft>
-                  <a:spcPts val="0"/>
-                </a:spcAft>
-                <a:buNone/>
-              </a:pPr>
-              <a:endParaRPr/>
-            </a:p>
-          </p:txBody>
-        </p:sp>
-        <p:sp>
-          <p:nvSpPr>
             <p:cNvPr id="230" name="Google Shape;230;p19"/>
             <p:cNvSpPr txBox="1"/>
             <p:nvPr/>
@@ -23266,7 +19107,7 @@
                   <a:cs typeface="Noto Sans TC"/>
                   <a:sym typeface="Noto Sans TC"/>
                 </a:rPr>
-                <a:t>✘ 應稅（加工 / 勞務）</a:t>
+                <a:t>應稅（加工 / 勞務）</a:t>
               </a:r>
               <a:endParaRPr sz="1650" b="1">
                 <a:solidFill>
@@ -23648,154 +19489,6 @@
         </p:grpSpPr>
         <p:sp>
           <p:nvSpPr>
-            <p:cNvPr id="240" name="Google Shape;240;p20"/>
-            <p:cNvSpPr/>
-            <p:nvPr/>
-          </p:nvSpPr>
-          <p:spPr>
-            <a:xfrm>
-              <a:off x="0" y="0"/>
-              <a:ext cx="304800" cy="304800"/>
-            </a:xfrm>
-            <a:custGeom>
-              <a:avLst/>
-              <a:gdLst/>
-              <a:ahLst/>
-              <a:cxnLst/>
-              <a:rect l="l" t="t" r="r" b="b"/>
-              <a:pathLst>
-                <a:path w="120000" h="120000" extrusionOk="0">
-                  <a:moveTo>
-                    <a:pt x="0" y="60000"/>
-                  </a:moveTo>
-                  <a:cubicBezTo>
-                    <a:pt x="0" y="0"/>
-                    <a:pt x="60000" y="0"/>
-                    <a:pt x="60000" y="0"/>
-                  </a:cubicBezTo>
-                  <a:cubicBezTo>
-                    <a:pt x="120000" y="0"/>
-                    <a:pt x="120000" y="60000"/>
-                    <a:pt x="120000" y="60000"/>
-                  </a:cubicBezTo>
-                  <a:cubicBezTo>
-                    <a:pt x="120000" y="120000"/>
-                    <a:pt x="60000" y="120000"/>
-                    <a:pt x="60000" y="120000"/>
-                  </a:cubicBezTo>
-                  <a:cubicBezTo>
-                    <a:pt x="0" y="120000"/>
-                    <a:pt x="0" y="60000"/>
-                    <a:pt x="0" y="60000"/>
-                  </a:cubicBezTo>
-                  <a:close/>
-                </a:path>
-              </a:pathLst>
-            </a:custGeom>
-            <a:solidFill>
-              <a:srgbClr val="5A7557">
-                <a:alpha val="80000"/>
-              </a:srgbClr>
-            </a:solidFill>
-            <a:ln>
-              <a:noFill/>
-            </a:ln>
-          </p:spPr>
-          <p:txBody>
-            <a:bodyPr spcFirstLastPara="1" wrap="square" lIns="0" tIns="0" rIns="0" bIns="0" anchor="ctr" anchorCtr="0">
-              <a:noAutofit/>
-            </a:bodyPr>
-            <a:lstStyle/>
-            <a:p>
-              <a:pPr marL="0" lvl="0" indent="0" algn="l" rtl="0">
-                <a:spcBef>
-                  <a:spcPts val="0"/>
-                </a:spcBef>
-                <a:spcAft>
-                  <a:spcPts val="0"/>
-                </a:spcAft>
-                <a:buNone/>
-              </a:pPr>
-              <a:endParaRPr/>
-            </a:p>
-          </p:txBody>
-        </p:sp>
-        <p:sp>
-          <p:nvSpPr>
-            <p:cNvPr id="241" name="Google Shape;241;p20"/>
-            <p:cNvSpPr/>
-            <p:nvPr/>
-          </p:nvSpPr>
-          <p:spPr>
-            <a:xfrm>
-              <a:off x="114300" y="76200"/>
-              <a:ext cx="304800" cy="304800"/>
-            </a:xfrm>
-            <a:custGeom>
-              <a:avLst/>
-              <a:gdLst/>
-              <a:ahLst/>
-              <a:cxnLst/>
-              <a:rect l="l" t="t" r="r" b="b"/>
-              <a:pathLst>
-                <a:path w="120000" h="120000" extrusionOk="0">
-                  <a:moveTo>
-                    <a:pt x="0" y="60000"/>
-                  </a:moveTo>
-                  <a:cubicBezTo>
-                    <a:pt x="0" y="0"/>
-                    <a:pt x="60000" y="0"/>
-                    <a:pt x="60000" y="0"/>
-                  </a:cubicBezTo>
-                  <a:cubicBezTo>
-                    <a:pt x="120000" y="0"/>
-                    <a:pt x="120000" y="60000"/>
-                    <a:pt x="120000" y="60000"/>
-                  </a:cubicBezTo>
-                  <a:cubicBezTo>
-                    <a:pt x="120000" y="120000"/>
-                    <a:pt x="60000" y="120000"/>
-                    <a:pt x="60000" y="120000"/>
-                  </a:cubicBezTo>
-                  <a:cubicBezTo>
-                    <a:pt x="0" y="120000"/>
-                    <a:pt x="0" y="60000"/>
-                    <a:pt x="0" y="60000"/>
-                  </a:cubicBezTo>
-                  <a:close/>
-                </a:path>
-              </a:pathLst>
-            </a:custGeom>
-            <a:solidFill>
-              <a:srgbClr val="7C9878">
-                <a:alpha val="60000"/>
-              </a:srgbClr>
-            </a:solidFill>
-            <a:ln>
-              <a:noFill/>
-            </a:ln>
-          </p:spPr>
-          <p:txBody>
-            <a:bodyPr spcFirstLastPara="1" wrap="square" lIns="0" tIns="0" rIns="0" bIns="0" anchor="ctr" anchorCtr="0">
-              <a:noAutofit/>
-            </a:bodyPr>
-            <a:lstStyle/>
-            <a:p>
-              <a:pPr marL="0" lvl="0" indent="0" algn="l" rtl="0">
-                <a:spcBef>
-                  <a:spcPts val="0"/>
-                </a:spcBef>
-                <a:spcAft>
-                  <a:spcPts val="0"/>
-                </a:spcAft>
-                <a:buNone/>
-              </a:pPr>
-              <a:endParaRPr/>
-            </a:p>
-          </p:txBody>
-        </p:sp>
-        <p:sp>
-          <p:nvSpPr>
             <p:cNvPr id="242" name="Google Shape;242;p20"/>
             <p:cNvSpPr txBox="1"/>
             <p:nvPr/>
@@ -23867,48 +19560,6 @@
             <a:chExt cx="7772400" cy="762000"/>
           </a:xfrm>
         </p:grpSpPr>
-        <p:sp>
-          <p:nvSpPr>
-            <p:cNvPr id="244" name="Google Shape;244;p20"/>
-            <p:cNvSpPr/>
-            <p:nvPr/>
-          </p:nvSpPr>
-          <p:spPr>
-            <a:xfrm>
-              <a:off x="0" y="76200"/>
-              <a:ext cx="38100" cy="228600"/>
-            </a:xfrm>
-            <a:prstGeom prst="roundRect">
-              <a:avLst>
-                <a:gd name="adj" fmla="val 50000"/>
-              </a:avLst>
-            </a:prstGeom>
-            <a:solidFill>
-              <a:srgbClr val="5A7557"/>
-            </a:solidFill>
-            <a:ln>
-              <a:noFill/>
-            </a:ln>
-          </p:spPr>
-          <p:txBody>
-            <a:bodyPr spcFirstLastPara="1" wrap="square" lIns="0" tIns="0" rIns="0" bIns="0" anchor="ctr" anchorCtr="0">
-              <a:noAutofit/>
-            </a:bodyPr>
-            <a:lstStyle/>
-            <a:p>
-              <a:pPr marL="0" lvl="0" indent="0" algn="l" rtl="0">
-                <a:spcBef>
-                  <a:spcPts val="0"/>
-                </a:spcBef>
-                <a:spcAft>
-                  <a:spcPts val="0"/>
-                </a:spcAft>
-                <a:buNone/>
-              </a:pPr>
-              <a:endParaRPr/>
-            </a:p>
-          </p:txBody>
-        </p:sp>
         <p:sp>
           <p:nvSpPr>
             <p:cNvPr id="245" name="Google Shape;245;p20"/>
@@ -24739,7 +20390,7 @@
                   <a:cs typeface="Noto Sans TC"/>
                   <a:sym typeface="Noto Sans TC"/>
                 </a:rPr>
-                <a:t>★ 兼營</a:t>
+                <a:t>兼營</a:t>
               </a:r>
               <a:endParaRPr sz="1350" b="1">
                 <a:solidFill>
@@ -24970,7 +20621,7 @@
                   <a:cs typeface="Noto Sans TC"/>
                   <a:sym typeface="Noto Sans TC"/>
                 </a:rPr>
-                <a:t>★ 口訣：「專營四零一，兼營四零三」</a:t>
+                <a:t>口訣：「專營四零一，兼營四零三」</a:t>
               </a:r>
               <a:endParaRPr sz="1200" b="1">
                 <a:solidFill>
@@ -25352,154 +21003,6 @@
         </p:grpSpPr>
         <p:sp>
           <p:nvSpPr>
-            <p:cNvPr id="278" name="Google Shape;278;p21"/>
-            <p:cNvSpPr/>
-            <p:nvPr/>
-          </p:nvSpPr>
-          <p:spPr>
-            <a:xfrm>
-              <a:off x="0" y="0"/>
-              <a:ext cx="304800" cy="304800"/>
-            </a:xfrm>
-            <a:custGeom>
-              <a:avLst/>
-              <a:gdLst/>
-              <a:ahLst/>
-              <a:cxnLst/>
-              <a:rect l="l" t="t" r="r" b="b"/>
-              <a:pathLst>
-                <a:path w="120000" h="120000" extrusionOk="0">
-                  <a:moveTo>
-                    <a:pt x="0" y="60000"/>
-                  </a:moveTo>
-                  <a:cubicBezTo>
-                    <a:pt x="0" y="0"/>
-                    <a:pt x="60000" y="0"/>
-                    <a:pt x="60000" y="0"/>
-                  </a:cubicBezTo>
-                  <a:cubicBezTo>
-                    <a:pt x="120000" y="0"/>
-                    <a:pt x="120000" y="60000"/>
-                    <a:pt x="120000" y="60000"/>
-                  </a:cubicBezTo>
-                  <a:cubicBezTo>
-                    <a:pt x="120000" y="120000"/>
-                    <a:pt x="60000" y="120000"/>
-                    <a:pt x="60000" y="120000"/>
-                  </a:cubicBezTo>
-                  <a:cubicBezTo>
-                    <a:pt x="0" y="120000"/>
-                    <a:pt x="0" y="60000"/>
-                    <a:pt x="0" y="60000"/>
-                  </a:cubicBezTo>
-                  <a:close/>
-                </a:path>
-              </a:pathLst>
-            </a:custGeom>
-            <a:solidFill>
-              <a:srgbClr val="5A7557">
-                <a:alpha val="80000"/>
-              </a:srgbClr>
-            </a:solidFill>
-            <a:ln>
-              <a:noFill/>
-            </a:ln>
-          </p:spPr>
-          <p:txBody>
-            <a:bodyPr spcFirstLastPara="1" wrap="square" lIns="0" tIns="0" rIns="0" bIns="0" anchor="ctr" anchorCtr="0">
-              <a:noAutofit/>
-            </a:bodyPr>
-            <a:lstStyle/>
-            <a:p>
-              <a:pPr marL="0" lvl="0" indent="0" algn="l" rtl="0">
-                <a:spcBef>
-                  <a:spcPts val="0"/>
-                </a:spcBef>
-                <a:spcAft>
-                  <a:spcPts val="0"/>
-                </a:spcAft>
-                <a:buNone/>
-              </a:pPr>
-              <a:endParaRPr/>
-            </a:p>
-          </p:txBody>
-        </p:sp>
-        <p:sp>
-          <p:nvSpPr>
-            <p:cNvPr id="279" name="Google Shape;279;p21"/>
-            <p:cNvSpPr/>
-            <p:nvPr/>
-          </p:nvSpPr>
-          <p:spPr>
-            <a:xfrm>
-              <a:off x="114300" y="76200"/>
-              <a:ext cx="304800" cy="304800"/>
-            </a:xfrm>
-            <a:custGeom>
-              <a:avLst/>
-              <a:gdLst/>
-              <a:ahLst/>
-              <a:cxnLst/>
-              <a:rect l="l" t="t" r="r" b="b"/>
-              <a:pathLst>
-                <a:path w="120000" h="120000" extrusionOk="0">
-                  <a:moveTo>
-                    <a:pt x="0" y="60000"/>
-                  </a:moveTo>
-                  <a:cubicBezTo>
-                    <a:pt x="0" y="0"/>
-                    <a:pt x="60000" y="0"/>
-                    <a:pt x="60000" y="0"/>
-                  </a:cubicBezTo>
-                  <a:cubicBezTo>
-                    <a:pt x="120000" y="0"/>
-                    <a:pt x="120000" y="60000"/>
-                    <a:pt x="120000" y="60000"/>
-                  </a:cubicBezTo>
-                  <a:cubicBezTo>
-                    <a:pt x="120000" y="120000"/>
-                    <a:pt x="60000" y="120000"/>
-                    <a:pt x="60000" y="120000"/>
-                  </a:cubicBezTo>
-                  <a:cubicBezTo>
-                    <a:pt x="0" y="120000"/>
-                    <a:pt x="0" y="60000"/>
-                    <a:pt x="0" y="60000"/>
-                  </a:cubicBezTo>
-                  <a:close/>
-                </a:path>
-              </a:pathLst>
-            </a:custGeom>
-            <a:solidFill>
-              <a:srgbClr val="7C9878">
-                <a:alpha val="60000"/>
-              </a:srgbClr>
-            </a:solidFill>
-            <a:ln>
-              <a:noFill/>
-            </a:ln>
-          </p:spPr>
-          <p:txBody>
-            <a:bodyPr spcFirstLastPara="1" wrap="square" lIns="0" tIns="0" rIns="0" bIns="0" anchor="ctr" anchorCtr="0">
-              <a:noAutofit/>
-            </a:bodyPr>
-            <a:lstStyle/>
-            <a:p>
-              <a:pPr marL="0" lvl="0" indent="0" algn="l" rtl="0">
-                <a:spcBef>
-                  <a:spcPts val="0"/>
-                </a:spcBef>
-                <a:spcAft>
-                  <a:spcPts val="0"/>
-                </a:spcAft>
-                <a:buNone/>
-              </a:pPr>
-              <a:endParaRPr/>
-            </a:p>
-          </p:txBody>
-        </p:sp>
-        <p:sp>
-          <p:nvSpPr>
             <p:cNvPr id="280" name="Google Shape;280;p21"/>
             <p:cNvSpPr txBox="1"/>
             <p:nvPr/>
@@ -25571,48 +21074,6 @@
             <a:chExt cx="6819900" cy="762000"/>
           </a:xfrm>
         </p:grpSpPr>
-        <p:sp>
-          <p:nvSpPr>
-            <p:cNvPr id="282" name="Google Shape;282;p21"/>
-            <p:cNvSpPr/>
-            <p:nvPr/>
-          </p:nvSpPr>
-          <p:spPr>
-            <a:xfrm>
-              <a:off x="0" y="76200"/>
-              <a:ext cx="38100" cy="228600"/>
-            </a:xfrm>
-            <a:prstGeom prst="roundRect">
-              <a:avLst>
-                <a:gd name="adj" fmla="val 50000"/>
-              </a:avLst>
-            </a:prstGeom>
-            <a:solidFill>
-              <a:srgbClr val="5A7557"/>
-            </a:solidFill>
-            <a:ln>
-              <a:noFill/>
-            </a:ln>
-          </p:spPr>
-          <p:txBody>
-            <a:bodyPr spcFirstLastPara="1" wrap="square" lIns="0" tIns="0" rIns="0" bIns="0" anchor="ctr" anchorCtr="0">
-              <a:noAutofit/>
-            </a:bodyPr>
-            <a:lstStyle/>
-            <a:p>
-              <a:pPr marL="0" lvl="0" indent="0" algn="l" rtl="0">
-                <a:spcBef>
-                  <a:spcPts val="0"/>
-                </a:spcBef>
-                <a:spcAft>
-                  <a:spcPts val="0"/>
-                </a:spcAft>
-                <a:buNone/>
-              </a:pPr>
-              <a:endParaRPr/>
-            </a:p>
-          </p:txBody>
-        </p:sp>
         <p:sp>
           <p:nvSpPr>
             <p:cNvPr id="283" name="Google Shape;283;p21"/>
@@ -25810,7 +21271,7 @@
                   <a:cs typeface="Noto Sans TC"/>
                   <a:sym typeface="Noto Sans TC"/>
                 </a:rPr>
-                <a:t>► 平時（每 2 個月）</a:t>
+                <a:t>平時（每 2 個月）</a:t>
               </a:r>
               <a:endParaRPr sz="1650" b="1">
                 <a:solidFill>
@@ -25985,69 +21446,6 @@
         </p:sp>
         <p:sp>
           <p:nvSpPr>
-            <p:cNvPr id="289" name="Google Shape;289;p21"/>
-            <p:cNvSpPr/>
-            <p:nvPr/>
-          </p:nvSpPr>
-          <p:spPr>
-            <a:xfrm>
-              <a:off x="228600" y="228600"/>
-              <a:ext cx="228600" cy="228600"/>
-            </a:xfrm>
-            <a:custGeom>
-              <a:avLst/>
-              <a:gdLst/>
-              <a:ahLst/>
-              <a:cxnLst/>
-              <a:rect l="l" t="t" r="r" b="b"/>
-              <a:pathLst>
-                <a:path w="120000" h="120000" extrusionOk="0">
-                  <a:moveTo>
-                    <a:pt x="0" y="60000"/>
-                  </a:moveTo>
-                  <a:lnTo>
-                    <a:pt x="60000" y="0"/>
-                  </a:lnTo>
-                  <a:lnTo>
-                    <a:pt x="120000" y="60000"/>
-                  </a:lnTo>
-                  <a:lnTo>
-                    <a:pt x="60000" y="120000"/>
-                  </a:lnTo>
-                  <a:close/>
-                </a:path>
-              </a:pathLst>
-            </a:custGeom>
-            <a:solidFill>
-              <a:srgbClr val="D87A68">
-                <a:alpha val="20000"/>
-              </a:srgbClr>
-            </a:solidFill>
-            <a:ln>
-              <a:noFill/>
-            </a:ln>
-          </p:spPr>
-          <p:txBody>
-            <a:bodyPr spcFirstLastPara="1" wrap="square" lIns="0" tIns="0" rIns="0" bIns="0" anchor="ctr" anchorCtr="0">
-              <a:noAutofit/>
-            </a:bodyPr>
-            <a:lstStyle/>
-            <a:p>
-              <a:pPr marL="0" lvl="0" indent="0" algn="l" rtl="0">
-                <a:spcBef>
-                  <a:spcPts val="0"/>
-                </a:spcBef>
-                <a:spcAft>
-                  <a:spcPts val="0"/>
-                </a:spcAft>
-                <a:buNone/>
-              </a:pPr>
-              <a:endParaRPr/>
-            </a:p>
-          </p:txBody>
-        </p:sp>
-        <p:sp>
-          <p:nvSpPr>
             <p:cNvPr id="290" name="Google Shape;290;p21"/>
             <p:cNvSpPr txBox="1"/>
             <p:nvPr/>
@@ -26090,7 +21488,7 @@
                   <a:cs typeface="Noto Sans TC"/>
                   <a:sym typeface="Noto Sans TC"/>
                 </a:rPr>
-                <a:t>▲ 年底（最後一期）</a:t>
+                <a:t>年底（最後一期）</a:t>
               </a:r>
               <a:endParaRPr sz="1650" b="1">
                 <a:solidFill>
@@ -26450,154 +21848,6 @@
         </p:grpSpPr>
         <p:sp>
           <p:nvSpPr>
-            <p:cNvPr id="302" name="Google Shape;302;p22"/>
-            <p:cNvSpPr/>
-            <p:nvPr/>
-          </p:nvSpPr>
-          <p:spPr>
-            <a:xfrm>
-              <a:off x="0" y="0"/>
-              <a:ext cx="304800" cy="304800"/>
-            </a:xfrm>
-            <a:custGeom>
-              <a:avLst/>
-              <a:gdLst/>
-              <a:ahLst/>
-              <a:cxnLst/>
-              <a:rect l="l" t="t" r="r" b="b"/>
-              <a:pathLst>
-                <a:path w="120000" h="120000" extrusionOk="0">
-                  <a:moveTo>
-                    <a:pt x="0" y="60000"/>
-                  </a:moveTo>
-                  <a:cubicBezTo>
-                    <a:pt x="0" y="0"/>
-                    <a:pt x="60000" y="0"/>
-                    <a:pt x="60000" y="0"/>
-                  </a:cubicBezTo>
-                  <a:cubicBezTo>
-                    <a:pt x="120000" y="0"/>
-                    <a:pt x="120000" y="60000"/>
-                    <a:pt x="120000" y="60000"/>
-                  </a:cubicBezTo>
-                  <a:cubicBezTo>
-                    <a:pt x="120000" y="120000"/>
-                    <a:pt x="60000" y="120000"/>
-                    <a:pt x="60000" y="120000"/>
-                  </a:cubicBezTo>
-                  <a:cubicBezTo>
-                    <a:pt x="0" y="120000"/>
-                    <a:pt x="0" y="60000"/>
-                    <a:pt x="0" y="60000"/>
-                  </a:cubicBezTo>
-                  <a:close/>
-                </a:path>
-              </a:pathLst>
-            </a:custGeom>
-            <a:solidFill>
-              <a:srgbClr val="5A7557">
-                <a:alpha val="80000"/>
-              </a:srgbClr>
-            </a:solidFill>
-            <a:ln>
-              <a:noFill/>
-            </a:ln>
-          </p:spPr>
-          <p:txBody>
-            <a:bodyPr spcFirstLastPara="1" wrap="square" lIns="0" tIns="0" rIns="0" bIns="0" anchor="ctr" anchorCtr="0">
-              <a:noAutofit/>
-            </a:bodyPr>
-            <a:lstStyle/>
-            <a:p>
-              <a:pPr marL="0" lvl="0" indent="0" algn="l" rtl="0">
-                <a:spcBef>
-                  <a:spcPts val="0"/>
-                </a:spcBef>
-                <a:spcAft>
-                  <a:spcPts val="0"/>
-                </a:spcAft>
-                <a:buNone/>
-              </a:pPr>
-              <a:endParaRPr/>
-            </a:p>
-          </p:txBody>
-        </p:sp>
-        <p:sp>
-          <p:nvSpPr>
-            <p:cNvPr id="303" name="Google Shape;303;p22"/>
-            <p:cNvSpPr/>
-            <p:nvPr/>
-          </p:nvSpPr>
-          <p:spPr>
-            <a:xfrm>
-              <a:off x="114300" y="76200"/>
-              <a:ext cx="304800" cy="304800"/>
-            </a:xfrm>
-            <a:custGeom>
-              <a:avLst/>
-              <a:gdLst/>
-              <a:ahLst/>
-              <a:cxnLst/>
-              <a:rect l="l" t="t" r="r" b="b"/>
-              <a:pathLst>
-                <a:path w="120000" h="120000" extrusionOk="0">
-                  <a:moveTo>
-                    <a:pt x="0" y="60000"/>
-                  </a:moveTo>
-                  <a:cubicBezTo>
-                    <a:pt x="0" y="0"/>
-                    <a:pt x="60000" y="0"/>
-                    <a:pt x="60000" y="0"/>
-                  </a:cubicBezTo>
-                  <a:cubicBezTo>
-                    <a:pt x="120000" y="0"/>
-                    <a:pt x="120000" y="60000"/>
-                    <a:pt x="120000" y="60000"/>
-                  </a:cubicBezTo>
-                  <a:cubicBezTo>
-                    <a:pt x="120000" y="120000"/>
-                    <a:pt x="60000" y="120000"/>
-                    <a:pt x="60000" y="120000"/>
-                  </a:cubicBezTo>
-                  <a:cubicBezTo>
-                    <a:pt x="0" y="120000"/>
-                    <a:pt x="0" y="60000"/>
-                    <a:pt x="0" y="60000"/>
-                  </a:cubicBezTo>
-                  <a:close/>
-                </a:path>
-              </a:pathLst>
-            </a:custGeom>
-            <a:solidFill>
-              <a:srgbClr val="7C9878">
-                <a:alpha val="60000"/>
-              </a:srgbClr>
-            </a:solidFill>
-            <a:ln>
-              <a:noFill/>
-            </a:ln>
-          </p:spPr>
-          <p:txBody>
-            <a:bodyPr spcFirstLastPara="1" wrap="square" lIns="0" tIns="0" rIns="0" bIns="0" anchor="ctr" anchorCtr="0">
-              <a:noAutofit/>
-            </a:bodyPr>
-            <a:lstStyle/>
-            <a:p>
-              <a:pPr marL="0" lvl="0" indent="0" algn="l" rtl="0">
-                <a:spcBef>
-                  <a:spcPts val="0"/>
-                </a:spcBef>
-                <a:spcAft>
-                  <a:spcPts val="0"/>
-                </a:spcAft>
-                <a:buNone/>
-              </a:pPr>
-              <a:endParaRPr/>
-            </a:p>
-          </p:txBody>
-        </p:sp>
-        <p:sp>
-          <p:nvSpPr>
             <p:cNvPr id="304" name="Google Shape;304;p22"/>
             <p:cNvSpPr txBox="1"/>
             <p:nvPr/>
@@ -26669,48 +21919,6 @@
             <a:chExt cx="8153400" cy="762000"/>
           </a:xfrm>
         </p:grpSpPr>
-        <p:sp>
-          <p:nvSpPr>
-            <p:cNvPr id="306" name="Google Shape;306;p22"/>
-            <p:cNvSpPr/>
-            <p:nvPr/>
-          </p:nvSpPr>
-          <p:spPr>
-            <a:xfrm>
-              <a:off x="0" y="76200"/>
-              <a:ext cx="38100" cy="228600"/>
-            </a:xfrm>
-            <a:prstGeom prst="roundRect">
-              <a:avLst>
-                <a:gd name="adj" fmla="val 50000"/>
-              </a:avLst>
-            </a:prstGeom>
-            <a:solidFill>
-              <a:srgbClr val="5A7557"/>
-            </a:solidFill>
-            <a:ln>
-              <a:noFill/>
-            </a:ln>
-          </p:spPr>
-          <p:txBody>
-            <a:bodyPr spcFirstLastPara="1" wrap="square" lIns="0" tIns="0" rIns="0" bIns="0" anchor="ctr" anchorCtr="0">
-              <a:noAutofit/>
-            </a:bodyPr>
-            <a:lstStyle/>
-            <a:p>
-              <a:pPr marL="0" lvl="0" indent="0" algn="l" rtl="0">
-                <a:spcBef>
-                  <a:spcPts val="0"/>
-                </a:spcBef>
-                <a:spcAft>
-                  <a:spcPts val="0"/>
-                </a:spcAft>
-                <a:buNone/>
-              </a:pPr>
-              <a:endParaRPr/>
-            </a:p>
-          </p:txBody>
-        </p:sp>
         <p:sp>
           <p:nvSpPr>
             <p:cNvPr id="307" name="Google Shape;307;p22"/>
@@ -27097,7 +22305,7 @@
                   <a:cs typeface="Noto Sans TC"/>
                   <a:sym typeface="Noto Sans TC"/>
                 </a:rPr>
-                <a:t>■ 推薦首年使用</a:t>
+                <a:t>推薦首年使用</a:t>
               </a:r>
               <a:endParaRPr/>
             </a:p>
@@ -27701,7 +22909,7 @@
                   <a:cs typeface="Noto Sans TC"/>
                   <a:sym typeface="Noto Sans TC"/>
                 </a:rPr>
-                <a:t>▲ 被動適用</a:t>
+                <a:t>被動適用</a:t>
               </a:r>
               <a:endParaRPr/>
             </a:p>

--- a/08_上台簡報準備/園藝公司設立與首年稅務規劃 (統一風格版).pptx
+++ b/08_上台簡報準備/園藝公司設立與首年稅務規劃 (統一風格版).pptx
@@ -7655,13 +7655,13 @@
   <p:clrMapOvr>
     <a:masterClrMapping/>
   </p:clrMapOvr>
-  <mc:AlternateContent xmlns:mc="http://schemas.openxmlformats.org/markup-compatibility/2006">
-    <mc:Choice xmlns:p14="http://schemas.microsoft.com/office/powerpoint/2010/main" Requires="p14">
+  <mc:AlternateContent xmlns:mc="http://schemas.openxmlformats.org/markup-compatibility/2006" xmlns:p14="http://schemas.microsoft.com/office/powerpoint/2010/main">
+    <mc:Choice Requires="p14">
       <p:transition spd="slow" p14:dur="2000">
         <p:cut/>
       </p:transition>
     </mc:Choice>
-    <mc:Fallback>
+    <mc:Fallback xmlns="">
       <p:transition spd="slow">
         <p:cut/>
       </p:transition>
@@ -8790,13 +8790,13 @@
   <p:clrMapOvr>
     <a:masterClrMapping/>
   </p:clrMapOvr>
-  <mc:AlternateContent xmlns:mc="http://schemas.openxmlformats.org/markup-compatibility/2006">
-    <mc:Choice xmlns:p14="http://schemas.microsoft.com/office/powerpoint/2010/main" Requires="p14">
+  <mc:AlternateContent xmlns:mc="http://schemas.openxmlformats.org/markup-compatibility/2006" xmlns:p14="http://schemas.microsoft.com/office/powerpoint/2010/main">
+    <mc:Choice Requires="p14">
       <p:transition spd="slow" p14:dur="2000">
         <p:cut/>
       </p:transition>
     </mc:Choice>
-    <mc:Fallback>
+    <mc:Fallback xmlns="">
       <p:transition spd="slow">
         <p:cut/>
       </p:transition>
@@ -8805,9 +8805,300 @@
   <p:timing>
     <p:tnLst>
       <p:par>
-        <p:cTn id="1" dur="indefinite" restart="never" nodeType="tmRoot"/>
+        <p:cTn id="1" dur="indefinite" restart="never" nodeType="tmRoot">
+          <p:childTnLst>
+            <p:seq concurrent="1" nextAc="seek">
+              <p:cTn id="2" dur="indefinite" nodeType="mainSeq">
+                <p:childTnLst>
+                  <p:par>
+                    <p:cTn id="3" fill="hold">
+                      <p:stCondLst>
+                        <p:cond delay="indefinite"/>
+                      </p:stCondLst>
+                      <p:childTnLst>
+                        <p:par>
+                          <p:cTn id="4" fill="hold">
+                            <p:stCondLst>
+                              <p:cond delay="0"/>
+                            </p:stCondLst>
+                            <p:childTnLst>
+                              <p:par>
+                                <p:cTn id="5" presetID="10" presetClass="entr" presetSubtype="0" fill="hold" nodeType="clickEffect">
+                                  <p:stCondLst>
+                                    <p:cond delay="0"/>
+                                  </p:stCondLst>
+                                  <p:childTnLst>
+                                    <p:set>
+                                      <p:cBhvr>
+                                        <p:cTn id="6" dur="1" fill="hold">
+                                          <p:stCondLst>
+                                            <p:cond delay="0"/>
+                                          </p:stCondLst>
+                                        </p:cTn>
+                                        <p:tgtEl>
+                                          <p:spTgt spid="338"/>
+                                        </p:tgtEl>
+                                        <p:attrNameLst>
+                                          <p:attrName>style.visibility</p:attrName>
+                                        </p:attrNameLst>
+                                      </p:cBhvr>
+                                      <p:to>
+                                        <p:strVal val="visible"/>
+                                      </p:to>
+                                    </p:set>
+                                    <p:animEffect transition="in" filter="fade">
+                                      <p:cBhvr>
+                                        <p:cTn id="7" dur="500"/>
+                                        <p:tgtEl>
+                                          <p:spTgt spid="338"/>
+                                        </p:tgtEl>
+                                      </p:cBhvr>
+                                    </p:animEffect>
+                                  </p:childTnLst>
+                                </p:cTn>
+                              </p:par>
+                            </p:childTnLst>
+                          </p:cTn>
+                        </p:par>
+                      </p:childTnLst>
+                    </p:cTn>
+                  </p:par>
+                  <p:par>
+                    <p:cTn id="8" fill="hold">
+                      <p:stCondLst>
+                        <p:cond delay="indefinite"/>
+                      </p:stCondLst>
+                      <p:childTnLst>
+                        <p:par>
+                          <p:cTn id="9" fill="hold">
+                            <p:stCondLst>
+                              <p:cond delay="0"/>
+                            </p:stCondLst>
+                            <p:childTnLst>
+                              <p:par>
+                                <p:cTn id="10" presetID="10" presetClass="entr" presetSubtype="0" fill="hold" nodeType="clickEffect">
+                                  <p:stCondLst>
+                                    <p:cond delay="0"/>
+                                  </p:stCondLst>
+                                  <p:childTnLst>
+                                    <p:set>
+                                      <p:cBhvr>
+                                        <p:cTn id="11" dur="1" fill="hold">
+                                          <p:stCondLst>
+                                            <p:cond delay="0"/>
+                                          </p:stCondLst>
+                                        </p:cTn>
+                                        <p:tgtEl>
+                                          <p:spTgt spid="343"/>
+                                        </p:tgtEl>
+                                        <p:attrNameLst>
+                                          <p:attrName>style.visibility</p:attrName>
+                                        </p:attrNameLst>
+                                      </p:cBhvr>
+                                      <p:to>
+                                        <p:strVal val="visible"/>
+                                      </p:to>
+                                    </p:set>
+                                    <p:animEffect transition="in" filter="fade">
+                                      <p:cBhvr>
+                                        <p:cTn id="12" dur="500"/>
+                                        <p:tgtEl>
+                                          <p:spTgt spid="343"/>
+                                        </p:tgtEl>
+                                      </p:cBhvr>
+                                    </p:animEffect>
+                                  </p:childTnLst>
+                                </p:cTn>
+                              </p:par>
+                            </p:childTnLst>
+                          </p:cTn>
+                        </p:par>
+                      </p:childTnLst>
+                    </p:cTn>
+                  </p:par>
+                  <p:par>
+                    <p:cTn id="13" fill="hold">
+                      <p:stCondLst>
+                        <p:cond delay="indefinite"/>
+                      </p:stCondLst>
+                      <p:childTnLst>
+                        <p:par>
+                          <p:cTn id="14" fill="hold">
+                            <p:stCondLst>
+                              <p:cond delay="0"/>
+                            </p:stCondLst>
+                            <p:childTnLst>
+                              <p:par>
+                                <p:cTn id="15" presetID="10" presetClass="entr" presetSubtype="0" fill="hold" nodeType="clickEffect">
+                                  <p:stCondLst>
+                                    <p:cond delay="0"/>
+                                  </p:stCondLst>
+                                  <p:childTnLst>
+                                    <p:set>
+                                      <p:cBhvr>
+                                        <p:cTn id="16" dur="1" fill="hold">
+                                          <p:stCondLst>
+                                            <p:cond delay="0"/>
+                                          </p:stCondLst>
+                                        </p:cTn>
+                                        <p:tgtEl>
+                                          <p:spTgt spid="348"/>
+                                        </p:tgtEl>
+                                        <p:attrNameLst>
+                                          <p:attrName>style.visibility</p:attrName>
+                                        </p:attrNameLst>
+                                      </p:cBhvr>
+                                      <p:to>
+                                        <p:strVal val="visible"/>
+                                      </p:to>
+                                    </p:set>
+                                    <p:animEffect transition="in" filter="fade">
+                                      <p:cBhvr>
+                                        <p:cTn id="17" dur="500"/>
+                                        <p:tgtEl>
+                                          <p:spTgt spid="348"/>
+                                        </p:tgtEl>
+                                      </p:cBhvr>
+                                    </p:animEffect>
+                                  </p:childTnLst>
+                                </p:cTn>
+                              </p:par>
+                            </p:childTnLst>
+                          </p:cTn>
+                        </p:par>
+                      </p:childTnLst>
+                    </p:cTn>
+                  </p:par>
+                  <p:par>
+                    <p:cTn id="18" fill="hold">
+                      <p:stCondLst>
+                        <p:cond delay="indefinite"/>
+                      </p:stCondLst>
+                      <p:childTnLst>
+                        <p:par>
+                          <p:cTn id="19" fill="hold">
+                            <p:stCondLst>
+                              <p:cond delay="0"/>
+                            </p:stCondLst>
+                            <p:childTnLst>
+                              <p:par>
+                                <p:cTn id="20" presetID="10" presetClass="entr" presetSubtype="0" fill="hold" grpId="0" nodeType="clickEffect">
+                                  <p:stCondLst>
+                                    <p:cond delay="0"/>
+                                  </p:stCondLst>
+                                  <p:childTnLst>
+                                    <p:set>
+                                      <p:cBhvr>
+                                        <p:cTn id="21" dur="1" fill="hold">
+                                          <p:stCondLst>
+                                            <p:cond delay="0"/>
+                                          </p:stCondLst>
+                                        </p:cTn>
+                                        <p:tgtEl>
+                                          <p:spTgt spid="328"/>
+                                        </p:tgtEl>
+                                        <p:attrNameLst>
+                                          <p:attrName>style.visibility</p:attrName>
+                                        </p:attrNameLst>
+                                      </p:cBhvr>
+                                      <p:to>
+                                        <p:strVal val="visible"/>
+                                      </p:to>
+                                    </p:set>
+                                    <p:animEffect transition="in" filter="fade">
+                                      <p:cBhvr>
+                                        <p:cTn id="22" dur="500"/>
+                                        <p:tgtEl>
+                                          <p:spTgt spid="328"/>
+                                        </p:tgtEl>
+                                      </p:cBhvr>
+                                    </p:animEffect>
+                                  </p:childTnLst>
+                                </p:cTn>
+                              </p:par>
+                            </p:childTnLst>
+                          </p:cTn>
+                        </p:par>
+                      </p:childTnLst>
+                    </p:cTn>
+                  </p:par>
+                  <p:par>
+                    <p:cTn id="23" fill="hold">
+                      <p:stCondLst>
+                        <p:cond delay="indefinite"/>
+                      </p:stCondLst>
+                      <p:childTnLst>
+                        <p:par>
+                          <p:cTn id="24" fill="hold">
+                            <p:stCondLst>
+                              <p:cond delay="0"/>
+                            </p:stCondLst>
+                            <p:childTnLst>
+                              <p:par>
+                                <p:cTn id="25" presetID="10" presetClass="entr" presetSubtype="0" fill="hold" nodeType="clickEffect">
+                                  <p:stCondLst>
+                                    <p:cond delay="0"/>
+                                  </p:stCondLst>
+                                  <p:childTnLst>
+                                    <p:set>
+                                      <p:cBhvr>
+                                        <p:cTn id="26" dur="1" fill="hold">
+                                          <p:stCondLst>
+                                            <p:cond delay="0"/>
+                                          </p:stCondLst>
+                                        </p:cTn>
+                                        <p:tgtEl>
+                                          <p:spTgt spid="351"/>
+                                        </p:tgtEl>
+                                        <p:attrNameLst>
+                                          <p:attrName>style.visibility</p:attrName>
+                                        </p:attrNameLst>
+                                      </p:cBhvr>
+                                      <p:to>
+                                        <p:strVal val="visible"/>
+                                      </p:to>
+                                    </p:set>
+                                    <p:animEffect transition="in" filter="fade">
+                                      <p:cBhvr>
+                                        <p:cTn id="27" dur="500"/>
+                                        <p:tgtEl>
+                                          <p:spTgt spid="351"/>
+                                        </p:tgtEl>
+                                      </p:cBhvr>
+                                    </p:animEffect>
+                                  </p:childTnLst>
+                                </p:cTn>
+                              </p:par>
+                            </p:childTnLst>
+                          </p:cTn>
+                        </p:par>
+                      </p:childTnLst>
+                    </p:cTn>
+                  </p:par>
+                </p:childTnLst>
+              </p:cTn>
+              <p:prevCondLst>
+                <p:cond evt="onPrev" delay="0">
+                  <p:tgtEl>
+                    <p:sldTgt/>
+                  </p:tgtEl>
+                </p:cond>
+              </p:prevCondLst>
+              <p:nextCondLst>
+                <p:cond evt="onNext" delay="0">
+                  <p:tgtEl>
+                    <p:sldTgt/>
+                  </p:tgtEl>
+                </p:cond>
+              </p:nextCondLst>
+            </p:seq>
+          </p:childTnLst>
+        </p:cTn>
       </p:par>
     </p:tnLst>
+    <p:bldLst>
+      <p:bldP spid="328" grpId="0" animBg="1"/>
+    </p:bldLst>
   </p:timing>
 </p:sld>
 </file>
@@ -9664,13 +9955,13 @@
   <p:clrMapOvr>
     <a:masterClrMapping/>
   </p:clrMapOvr>
-  <mc:AlternateContent xmlns:mc="http://schemas.openxmlformats.org/markup-compatibility/2006">
-    <mc:Choice xmlns:p14="http://schemas.microsoft.com/office/powerpoint/2010/main" Requires="p14">
+  <mc:AlternateContent xmlns:mc="http://schemas.openxmlformats.org/markup-compatibility/2006" xmlns:p14="http://schemas.microsoft.com/office/powerpoint/2010/main">
+    <mc:Choice Requires="p14">
       <p:transition spd="slow" p14:dur="2000">
         <p:cut/>
       </p:transition>
     </mc:Choice>
-    <mc:Fallback>
+    <mc:Fallback xmlns="">
       <p:transition spd="slow">
         <p:cut/>
       </p:transition>
@@ -9679,9 +9970,142 @@
   <p:timing>
     <p:tnLst>
       <p:par>
-        <p:cTn id="1" dur="indefinite" restart="never" nodeType="tmRoot"/>
+        <p:cTn id="1" dur="indefinite" restart="never" nodeType="tmRoot">
+          <p:childTnLst>
+            <p:seq concurrent="1" nextAc="seek">
+              <p:cTn id="2" dur="indefinite" nodeType="mainSeq">
+                <p:childTnLst>
+                  <p:par>
+                    <p:cTn id="3" fill="hold">
+                      <p:stCondLst>
+                        <p:cond delay="indefinite"/>
+                      </p:stCondLst>
+                      <p:childTnLst>
+                        <p:par>
+                          <p:cTn id="4" fill="hold">
+                            <p:stCondLst>
+                              <p:cond delay="0"/>
+                            </p:stCondLst>
+                            <p:childTnLst>
+                              <p:par>
+                                <p:cTn id="5" presetID="10" presetClass="entr" presetSubtype="0" fill="hold" grpId="0" nodeType="clickEffect">
+                                  <p:stCondLst>
+                                    <p:cond delay="0"/>
+                                  </p:stCondLst>
+                                  <p:childTnLst>
+                                    <p:set>
+                                      <p:cBhvr>
+                                        <p:cTn id="6" dur="1" fill="hold">
+                                          <p:stCondLst>
+                                            <p:cond delay="0"/>
+                                          </p:stCondLst>
+                                        </p:cTn>
+                                        <p:tgtEl>
+                                          <p:spTgt spid="359"/>
+                                        </p:tgtEl>
+                                        <p:attrNameLst>
+                                          <p:attrName>style.visibility</p:attrName>
+                                        </p:attrNameLst>
+                                      </p:cBhvr>
+                                      <p:to>
+                                        <p:strVal val="visible"/>
+                                      </p:to>
+                                    </p:set>
+                                    <p:animEffect transition="in" filter="fade">
+                                      <p:cBhvr>
+                                        <p:cTn id="7" dur="500"/>
+                                        <p:tgtEl>
+                                          <p:spTgt spid="359"/>
+                                        </p:tgtEl>
+                                      </p:cBhvr>
+                                    </p:animEffect>
+                                  </p:childTnLst>
+                                </p:cTn>
+                              </p:par>
+                            </p:childTnLst>
+                          </p:cTn>
+                        </p:par>
+                      </p:childTnLst>
+                    </p:cTn>
+                  </p:par>
+                  <p:par>
+                    <p:cTn id="8" fill="hold">
+                      <p:stCondLst>
+                        <p:cond delay="indefinite"/>
+                      </p:stCondLst>
+                      <p:childTnLst>
+                        <p:par>
+                          <p:cTn id="9" fill="hold">
+                            <p:stCondLst>
+                              <p:cond delay="0"/>
+                            </p:stCondLst>
+                            <p:childTnLst>
+                              <p:par>
+                                <p:cTn id="10" presetID="10" presetClass="entr" presetSubtype="0" fill="hold" grpId="0" nodeType="clickEffect">
+                                  <p:stCondLst>
+                                    <p:cond delay="0"/>
+                                  </p:stCondLst>
+                                  <p:childTnLst>
+                                    <p:set>
+                                      <p:cBhvr>
+                                        <p:cTn id="11" dur="1" fill="hold">
+                                          <p:stCondLst>
+                                            <p:cond delay="0"/>
+                                          </p:stCondLst>
+                                        </p:cTn>
+                                        <p:tgtEl>
+                                          <p:spTgt spid="360"/>
+                                        </p:tgtEl>
+                                        <p:attrNameLst>
+                                          <p:attrName>style.visibility</p:attrName>
+                                        </p:attrNameLst>
+                                      </p:cBhvr>
+                                      <p:to>
+                                        <p:strVal val="visible"/>
+                                      </p:to>
+                                    </p:set>
+                                    <p:animEffect transition="in" filter="fade">
+                                      <p:cBhvr>
+                                        <p:cTn id="12" dur="500"/>
+                                        <p:tgtEl>
+                                          <p:spTgt spid="360"/>
+                                        </p:tgtEl>
+                                      </p:cBhvr>
+                                    </p:animEffect>
+                                  </p:childTnLst>
+                                </p:cTn>
+                              </p:par>
+                            </p:childTnLst>
+                          </p:cTn>
+                        </p:par>
+                      </p:childTnLst>
+                    </p:cTn>
+                  </p:par>
+                </p:childTnLst>
+              </p:cTn>
+              <p:prevCondLst>
+                <p:cond evt="onPrev" delay="0">
+                  <p:tgtEl>
+                    <p:sldTgt/>
+                  </p:tgtEl>
+                </p:cond>
+              </p:prevCondLst>
+              <p:nextCondLst>
+                <p:cond evt="onNext" delay="0">
+                  <p:tgtEl>
+                    <p:sldTgt/>
+                  </p:tgtEl>
+                </p:cond>
+              </p:nextCondLst>
+            </p:seq>
+          </p:childTnLst>
+        </p:cTn>
       </p:par>
     </p:tnLst>
+    <p:bldLst>
+      <p:bldP spid="359" grpId="0" animBg="1"/>
+      <p:bldP spid="360" grpId="0" animBg="1"/>
+    </p:bldLst>
   </p:timing>
 </p:sld>
 </file>
@@ -10672,13 +11096,13 @@
   <p:clrMapOvr>
     <a:masterClrMapping/>
   </p:clrMapOvr>
-  <mc:AlternateContent xmlns:mc="http://schemas.openxmlformats.org/markup-compatibility/2006">
-    <mc:Choice xmlns:p14="http://schemas.microsoft.com/office/powerpoint/2010/main" Requires="p14">
+  <mc:AlternateContent xmlns:mc="http://schemas.openxmlformats.org/markup-compatibility/2006" xmlns:p14="http://schemas.microsoft.com/office/powerpoint/2010/main">
+    <mc:Choice Requires="p14">
       <p:transition spd="slow" p14:dur="2000">
         <p:cut/>
       </p:transition>
     </mc:Choice>
-    <mc:Fallback>
+    <mc:Fallback xmlns="">
       <p:transition spd="slow">
         <p:cut/>
       </p:transition>
@@ -10687,9 +11111,247 @@
   <p:timing>
     <p:tnLst>
       <p:par>
-        <p:cTn id="1" dur="indefinite" restart="never" nodeType="tmRoot"/>
+        <p:cTn id="1" dur="indefinite" restart="never" nodeType="tmRoot">
+          <p:childTnLst>
+            <p:seq concurrent="1" nextAc="seek">
+              <p:cTn id="2" dur="indefinite" nodeType="mainSeq">
+                <p:childTnLst>
+                  <p:par>
+                    <p:cTn id="3" fill="hold">
+                      <p:stCondLst>
+                        <p:cond delay="indefinite"/>
+                      </p:stCondLst>
+                      <p:childTnLst>
+                        <p:par>
+                          <p:cTn id="4" fill="hold">
+                            <p:stCondLst>
+                              <p:cond delay="0"/>
+                            </p:stCondLst>
+                            <p:childTnLst>
+                              <p:par>
+                                <p:cTn id="5" presetID="10" presetClass="entr" presetSubtype="0" fill="hold" nodeType="clickEffect">
+                                  <p:stCondLst>
+                                    <p:cond delay="0"/>
+                                  </p:stCondLst>
+                                  <p:childTnLst>
+                                    <p:set>
+                                      <p:cBhvr>
+                                        <p:cTn id="6" dur="1" fill="hold">
+                                          <p:stCondLst>
+                                            <p:cond delay="0"/>
+                                          </p:stCondLst>
+                                        </p:cTn>
+                                        <p:tgtEl>
+                                          <p:spTgt spid="391"/>
+                                        </p:tgtEl>
+                                        <p:attrNameLst>
+                                          <p:attrName>style.visibility</p:attrName>
+                                        </p:attrNameLst>
+                                      </p:cBhvr>
+                                      <p:to>
+                                        <p:strVal val="visible"/>
+                                      </p:to>
+                                    </p:set>
+                                    <p:animEffect transition="in" filter="fade">
+                                      <p:cBhvr>
+                                        <p:cTn id="7" dur="500"/>
+                                        <p:tgtEl>
+                                          <p:spTgt spid="391"/>
+                                        </p:tgtEl>
+                                      </p:cBhvr>
+                                    </p:animEffect>
+                                  </p:childTnLst>
+                                </p:cTn>
+                              </p:par>
+                            </p:childTnLst>
+                          </p:cTn>
+                        </p:par>
+                      </p:childTnLst>
+                    </p:cTn>
+                  </p:par>
+                  <p:par>
+                    <p:cTn id="8" fill="hold">
+                      <p:stCondLst>
+                        <p:cond delay="indefinite"/>
+                      </p:stCondLst>
+                      <p:childTnLst>
+                        <p:par>
+                          <p:cTn id="9" fill="hold">
+                            <p:stCondLst>
+                              <p:cond delay="0"/>
+                            </p:stCondLst>
+                            <p:childTnLst>
+                              <p:par>
+                                <p:cTn id="10" presetID="10" presetClass="entr" presetSubtype="0" fill="hold" nodeType="clickEffect">
+                                  <p:stCondLst>
+                                    <p:cond delay="0"/>
+                                  </p:stCondLst>
+                                  <p:childTnLst>
+                                    <p:set>
+                                      <p:cBhvr>
+                                        <p:cTn id="11" dur="1" fill="hold">
+                                          <p:stCondLst>
+                                            <p:cond delay="0"/>
+                                          </p:stCondLst>
+                                        </p:cTn>
+                                        <p:tgtEl>
+                                          <p:spTgt spid="400"/>
+                                        </p:tgtEl>
+                                        <p:attrNameLst>
+                                          <p:attrName>style.visibility</p:attrName>
+                                        </p:attrNameLst>
+                                      </p:cBhvr>
+                                      <p:to>
+                                        <p:strVal val="visible"/>
+                                      </p:to>
+                                    </p:set>
+                                    <p:animEffect transition="in" filter="fade">
+                                      <p:cBhvr>
+                                        <p:cTn id="12" dur="500"/>
+                                        <p:tgtEl>
+                                          <p:spTgt spid="400"/>
+                                        </p:tgtEl>
+                                      </p:cBhvr>
+                                    </p:animEffect>
+                                  </p:childTnLst>
+                                </p:cTn>
+                              </p:par>
+                            </p:childTnLst>
+                          </p:cTn>
+                        </p:par>
+                      </p:childTnLst>
+                    </p:cTn>
+                  </p:par>
+                  <p:par>
+                    <p:cTn id="13" fill="hold">
+                      <p:stCondLst>
+                        <p:cond delay="indefinite"/>
+                      </p:stCondLst>
+                      <p:childTnLst>
+                        <p:par>
+                          <p:cTn id="14" fill="hold">
+                            <p:stCondLst>
+                              <p:cond delay="0"/>
+                            </p:stCondLst>
+                            <p:childTnLst>
+                              <p:par>
+                                <p:cTn id="15" presetID="10" presetClass="entr" presetSubtype="0" fill="hold" grpId="0" nodeType="clickEffect">
+                                  <p:stCondLst>
+                                    <p:cond delay="0"/>
+                                  </p:stCondLst>
+                                  <p:childTnLst>
+                                    <p:set>
+                                      <p:cBhvr>
+                                        <p:cTn id="16" dur="1" fill="hold">
+                                          <p:stCondLst>
+                                            <p:cond delay="0"/>
+                                          </p:stCondLst>
+                                        </p:cTn>
+                                        <p:tgtEl>
+                                          <p:spTgt spid="383"/>
+                                        </p:tgtEl>
+                                        <p:attrNameLst>
+                                          <p:attrName>style.visibility</p:attrName>
+                                        </p:attrNameLst>
+                                      </p:cBhvr>
+                                      <p:to>
+                                        <p:strVal val="visible"/>
+                                      </p:to>
+                                    </p:set>
+                                    <p:animEffect transition="in" filter="fade">
+                                      <p:cBhvr>
+                                        <p:cTn id="17" dur="500"/>
+                                        <p:tgtEl>
+                                          <p:spTgt spid="383"/>
+                                        </p:tgtEl>
+                                      </p:cBhvr>
+                                    </p:animEffect>
+                                  </p:childTnLst>
+                                </p:cTn>
+                              </p:par>
+                            </p:childTnLst>
+                          </p:cTn>
+                        </p:par>
+                      </p:childTnLst>
+                    </p:cTn>
+                  </p:par>
+                  <p:par>
+                    <p:cTn id="18" fill="hold">
+                      <p:stCondLst>
+                        <p:cond delay="indefinite"/>
+                      </p:stCondLst>
+                      <p:childTnLst>
+                        <p:par>
+                          <p:cTn id="19" fill="hold">
+                            <p:stCondLst>
+                              <p:cond delay="0"/>
+                            </p:stCondLst>
+                            <p:childTnLst>
+                              <p:par>
+                                <p:cTn id="20" presetID="10" presetClass="entr" presetSubtype="0" fill="hold" nodeType="clickEffect">
+                                  <p:stCondLst>
+                                    <p:cond delay="0"/>
+                                  </p:stCondLst>
+                                  <p:childTnLst>
+                                    <p:set>
+                                      <p:cBhvr>
+                                        <p:cTn id="21" dur="1" fill="hold">
+                                          <p:stCondLst>
+                                            <p:cond delay="0"/>
+                                          </p:stCondLst>
+                                        </p:cTn>
+                                        <p:tgtEl>
+                                          <p:spTgt spid="406"/>
+                                        </p:tgtEl>
+                                        <p:attrNameLst>
+                                          <p:attrName>style.visibility</p:attrName>
+                                        </p:attrNameLst>
+                                      </p:cBhvr>
+                                      <p:to>
+                                        <p:strVal val="visible"/>
+                                      </p:to>
+                                    </p:set>
+                                    <p:animEffect transition="in" filter="fade">
+                                      <p:cBhvr>
+                                        <p:cTn id="22" dur="500"/>
+                                        <p:tgtEl>
+                                          <p:spTgt spid="406"/>
+                                        </p:tgtEl>
+                                      </p:cBhvr>
+                                    </p:animEffect>
+                                  </p:childTnLst>
+                                </p:cTn>
+                              </p:par>
+                            </p:childTnLst>
+                          </p:cTn>
+                        </p:par>
+                      </p:childTnLst>
+                    </p:cTn>
+                  </p:par>
+                </p:childTnLst>
+              </p:cTn>
+              <p:prevCondLst>
+                <p:cond evt="onPrev" delay="0">
+                  <p:tgtEl>
+                    <p:sldTgt/>
+                  </p:tgtEl>
+                </p:cond>
+              </p:prevCondLst>
+              <p:nextCondLst>
+                <p:cond evt="onNext" delay="0">
+                  <p:tgtEl>
+                    <p:sldTgt/>
+                  </p:tgtEl>
+                </p:cond>
+              </p:nextCondLst>
+            </p:seq>
+          </p:childTnLst>
+        </p:cTn>
       </p:par>
     </p:tnLst>
+    <p:bldLst>
+      <p:bldP spid="383" grpId="0" animBg="1"/>
+    </p:bldLst>
   </p:timing>
 </p:sld>
 </file>
@@ -11567,13 +12229,13 @@
   <p:clrMapOvr>
     <a:masterClrMapping/>
   </p:clrMapOvr>
-  <mc:AlternateContent xmlns:mc="http://schemas.openxmlformats.org/markup-compatibility/2006">
-    <mc:Choice xmlns:p14="http://schemas.microsoft.com/office/powerpoint/2010/main" Requires="p14">
+  <mc:AlternateContent xmlns:mc="http://schemas.openxmlformats.org/markup-compatibility/2006" xmlns:p14="http://schemas.microsoft.com/office/powerpoint/2010/main">
+    <mc:Choice Requires="p14">
       <p:transition spd="slow" p14:dur="2000">
         <p:cut/>
       </p:transition>
     </mc:Choice>
-    <mc:Fallback>
+    <mc:Fallback xmlns="">
       <p:transition spd="slow">
         <p:cut/>
       </p:transition>
@@ -11582,9 +12244,301 @@
   <p:timing>
     <p:tnLst>
       <p:par>
-        <p:cTn id="1" dur="indefinite" restart="never" nodeType="tmRoot"/>
+        <p:cTn id="1" dur="indefinite" restart="never" nodeType="tmRoot">
+          <p:childTnLst>
+            <p:seq concurrent="1" nextAc="seek">
+              <p:cTn id="2" dur="indefinite" nodeType="mainSeq">
+                <p:childTnLst>
+                  <p:par>
+                    <p:cTn id="3" fill="hold">
+                      <p:stCondLst>
+                        <p:cond delay="indefinite"/>
+                      </p:stCondLst>
+                      <p:childTnLst>
+                        <p:par>
+                          <p:cTn id="4" fill="hold">
+                            <p:stCondLst>
+                              <p:cond delay="0"/>
+                            </p:stCondLst>
+                            <p:childTnLst>
+                              <p:par>
+                                <p:cTn id="5" presetID="10" presetClass="entr" presetSubtype="0" fill="hold" grpId="0" nodeType="clickEffect">
+                                  <p:stCondLst>
+                                    <p:cond delay="0"/>
+                                  </p:stCondLst>
+                                  <p:childTnLst>
+                                    <p:set>
+                                      <p:cBhvr>
+                                        <p:cTn id="6" dur="1" fill="hold">
+                                          <p:stCondLst>
+                                            <p:cond delay="0"/>
+                                          </p:stCondLst>
+                                        </p:cTn>
+                                        <p:tgtEl>
+                                          <p:spTgt spid="423"/>
+                                        </p:tgtEl>
+                                        <p:attrNameLst>
+                                          <p:attrName>style.visibility</p:attrName>
+                                        </p:attrNameLst>
+                                      </p:cBhvr>
+                                      <p:to>
+                                        <p:strVal val="visible"/>
+                                      </p:to>
+                                    </p:set>
+                                    <p:animEffect transition="in" filter="fade">
+                                      <p:cBhvr>
+                                        <p:cTn id="7" dur="500"/>
+                                        <p:tgtEl>
+                                          <p:spTgt spid="423"/>
+                                        </p:tgtEl>
+                                      </p:cBhvr>
+                                    </p:animEffect>
+                                  </p:childTnLst>
+                                </p:cTn>
+                              </p:par>
+                            </p:childTnLst>
+                          </p:cTn>
+                        </p:par>
+                      </p:childTnLst>
+                    </p:cTn>
+                  </p:par>
+                  <p:par>
+                    <p:cTn id="8" fill="hold">
+                      <p:stCondLst>
+                        <p:cond delay="indefinite"/>
+                      </p:stCondLst>
+                      <p:childTnLst>
+                        <p:par>
+                          <p:cTn id="9" fill="hold">
+                            <p:stCondLst>
+                              <p:cond delay="0"/>
+                            </p:stCondLst>
+                            <p:childTnLst>
+                              <p:par>
+                                <p:cTn id="10" presetID="10" presetClass="entr" presetSubtype="0" fill="hold" nodeType="clickEffect">
+                                  <p:stCondLst>
+                                    <p:cond delay="0"/>
+                                  </p:stCondLst>
+                                  <p:childTnLst>
+                                    <p:set>
+                                      <p:cBhvr>
+                                        <p:cTn id="11" dur="1" fill="hold">
+                                          <p:stCondLst>
+                                            <p:cond delay="0"/>
+                                          </p:stCondLst>
+                                        </p:cTn>
+                                        <p:tgtEl>
+                                          <p:spTgt spid="424"/>
+                                        </p:tgtEl>
+                                        <p:attrNameLst>
+                                          <p:attrName>style.visibility</p:attrName>
+                                        </p:attrNameLst>
+                                      </p:cBhvr>
+                                      <p:to>
+                                        <p:strVal val="visible"/>
+                                      </p:to>
+                                    </p:set>
+                                    <p:animEffect transition="in" filter="fade">
+                                      <p:cBhvr>
+                                        <p:cTn id="12" dur="500"/>
+                                        <p:tgtEl>
+                                          <p:spTgt spid="424"/>
+                                        </p:tgtEl>
+                                      </p:cBhvr>
+                                    </p:animEffect>
+                                  </p:childTnLst>
+                                </p:cTn>
+                              </p:par>
+                            </p:childTnLst>
+                          </p:cTn>
+                        </p:par>
+                      </p:childTnLst>
+                    </p:cTn>
+                  </p:par>
+                  <p:par>
+                    <p:cTn id="13" fill="hold">
+                      <p:stCondLst>
+                        <p:cond delay="indefinite"/>
+                      </p:stCondLst>
+                      <p:childTnLst>
+                        <p:par>
+                          <p:cTn id="14" fill="hold">
+                            <p:stCondLst>
+                              <p:cond delay="0"/>
+                            </p:stCondLst>
+                            <p:childTnLst>
+                              <p:par>
+                                <p:cTn id="15" presetID="10" presetClass="entr" presetSubtype="0" fill="hold" nodeType="clickEffect">
+                                  <p:stCondLst>
+                                    <p:cond delay="0"/>
+                                  </p:stCondLst>
+                                  <p:childTnLst>
+                                    <p:set>
+                                      <p:cBhvr>
+                                        <p:cTn id="16" dur="1" fill="hold">
+                                          <p:stCondLst>
+                                            <p:cond delay="0"/>
+                                          </p:stCondLst>
+                                        </p:cTn>
+                                        <p:tgtEl>
+                                          <p:spTgt spid="427"/>
+                                        </p:tgtEl>
+                                        <p:attrNameLst>
+                                          <p:attrName>style.visibility</p:attrName>
+                                        </p:attrNameLst>
+                                      </p:cBhvr>
+                                      <p:to>
+                                        <p:strVal val="visible"/>
+                                      </p:to>
+                                    </p:set>
+                                    <p:animEffect transition="in" filter="fade">
+                                      <p:cBhvr>
+                                        <p:cTn id="17" dur="500"/>
+                                        <p:tgtEl>
+                                          <p:spTgt spid="427"/>
+                                        </p:tgtEl>
+                                      </p:cBhvr>
+                                    </p:animEffect>
+                                  </p:childTnLst>
+                                </p:cTn>
+                              </p:par>
+                            </p:childTnLst>
+                          </p:cTn>
+                        </p:par>
+                      </p:childTnLst>
+                    </p:cTn>
+                  </p:par>
+                  <p:par>
+                    <p:cTn id="18" fill="hold">
+                      <p:stCondLst>
+                        <p:cond delay="indefinite"/>
+                      </p:stCondLst>
+                      <p:childTnLst>
+                        <p:par>
+                          <p:cTn id="19" fill="hold">
+                            <p:stCondLst>
+                              <p:cond delay="0"/>
+                            </p:stCondLst>
+                            <p:childTnLst>
+                              <p:par>
+                                <p:cTn id="20" presetID="10" presetClass="entr" presetSubtype="0" fill="hold" grpId="0" nodeType="clickEffect">
+                                  <p:stCondLst>
+                                    <p:cond delay="0"/>
+                                  </p:stCondLst>
+                                  <p:childTnLst>
+                                    <p:set>
+                                      <p:cBhvr>
+                                        <p:cTn id="21" dur="1" fill="hold">
+                                          <p:stCondLst>
+                                            <p:cond delay="0"/>
+                                          </p:stCondLst>
+                                        </p:cTn>
+                                        <p:tgtEl>
+                                          <p:spTgt spid="414"/>
+                                        </p:tgtEl>
+                                        <p:attrNameLst>
+                                          <p:attrName>style.visibility</p:attrName>
+                                        </p:attrNameLst>
+                                      </p:cBhvr>
+                                      <p:to>
+                                        <p:strVal val="visible"/>
+                                      </p:to>
+                                    </p:set>
+                                    <p:animEffect transition="in" filter="fade">
+                                      <p:cBhvr>
+                                        <p:cTn id="22" dur="500"/>
+                                        <p:tgtEl>
+                                          <p:spTgt spid="414"/>
+                                        </p:tgtEl>
+                                      </p:cBhvr>
+                                    </p:animEffect>
+                                  </p:childTnLst>
+                                </p:cTn>
+                              </p:par>
+                            </p:childTnLst>
+                          </p:cTn>
+                        </p:par>
+                      </p:childTnLst>
+                    </p:cTn>
+                  </p:par>
+                  <p:par>
+                    <p:cTn id="23" fill="hold">
+                      <p:stCondLst>
+                        <p:cond delay="indefinite"/>
+                      </p:stCondLst>
+                      <p:childTnLst>
+                        <p:par>
+                          <p:cTn id="24" fill="hold">
+                            <p:stCondLst>
+                              <p:cond delay="0"/>
+                            </p:stCondLst>
+                            <p:childTnLst>
+                              <p:par>
+                                <p:cTn id="25" presetID="10" presetClass="entr" presetSubtype="0" fill="hold" nodeType="clickEffect">
+                                  <p:stCondLst>
+                                    <p:cond delay="0"/>
+                                  </p:stCondLst>
+                                  <p:childTnLst>
+                                    <p:set>
+                                      <p:cBhvr>
+                                        <p:cTn id="26" dur="1" fill="hold">
+                                          <p:stCondLst>
+                                            <p:cond delay="0"/>
+                                          </p:stCondLst>
+                                        </p:cTn>
+                                        <p:tgtEl>
+                                          <p:spTgt spid="430"/>
+                                        </p:tgtEl>
+                                        <p:attrNameLst>
+                                          <p:attrName>style.visibility</p:attrName>
+                                        </p:attrNameLst>
+                                      </p:cBhvr>
+                                      <p:to>
+                                        <p:strVal val="visible"/>
+                                      </p:to>
+                                    </p:set>
+                                    <p:animEffect transition="in" filter="fade">
+                                      <p:cBhvr>
+                                        <p:cTn id="27" dur="500"/>
+                                        <p:tgtEl>
+                                          <p:spTgt spid="430"/>
+                                        </p:tgtEl>
+                                      </p:cBhvr>
+                                    </p:animEffect>
+                                  </p:childTnLst>
+                                </p:cTn>
+                              </p:par>
+                            </p:childTnLst>
+                          </p:cTn>
+                        </p:par>
+                      </p:childTnLst>
+                    </p:cTn>
+                  </p:par>
+                </p:childTnLst>
+              </p:cTn>
+              <p:prevCondLst>
+                <p:cond evt="onPrev" delay="0">
+                  <p:tgtEl>
+                    <p:sldTgt/>
+                  </p:tgtEl>
+                </p:cond>
+              </p:prevCondLst>
+              <p:nextCondLst>
+                <p:cond evt="onNext" delay="0">
+                  <p:tgtEl>
+                    <p:sldTgt/>
+                  </p:tgtEl>
+                </p:cond>
+              </p:nextCondLst>
+            </p:seq>
+          </p:childTnLst>
+        </p:cTn>
       </p:par>
     </p:tnLst>
+    <p:bldLst>
+      <p:bldP spid="414" grpId="0" animBg="1"/>
+      <p:bldP spid="423" grpId="0"/>
+    </p:bldLst>
   </p:timing>
 </p:sld>
 </file>
@@ -12582,18 +13536,6 @@
                   </a:spcBef>
                 </a:pPr>
                 <a:r>
-                  <a:rPr lang="zh-TW" altLang="zh-TW" sz="1050" b="1" dirty="0">
-                    <a:solidFill>
-                      <a:srgbClr val="C55D4D"/>
-                    </a:solidFill>
-                    <a:latin typeface="Noto Sans TC"/>
-                    <a:ea typeface="Noto Sans TC"/>
-                    <a:cs typeface="Noto Sans TC"/>
-                    <a:sym typeface="Noto Sans TC"/>
-                  </a:rPr>
-                  <a:t/>
-                </a:r>
-                <a:r>
                   <a:rPr lang="zh-TW" sz="1050" b="1" dirty="0" smtClean="0">
                     <a:solidFill>
                       <a:srgbClr val="C55D4D"/>
@@ -12738,18 +13680,6 @@
                   <a:buNone/>
                 </a:pPr>
                 <a:r>
-                  <a:rPr lang="zh-TW" sz="1050" b="1" dirty="0" smtClean="0">
-                    <a:solidFill>
-                      <a:srgbClr val="C55D4D"/>
-                    </a:solidFill>
-                    <a:latin typeface="Noto Sans TC"/>
-                    <a:ea typeface="Noto Sans TC"/>
-                    <a:cs typeface="Noto Sans TC"/>
-                    <a:sym typeface="Noto Sans TC"/>
-                  </a:rPr>
-                  <a:t/>
-                </a:r>
-                <a:r>
                   <a:rPr lang="zh-TW" sz="1050" b="1" dirty="0">
                     <a:solidFill>
                       <a:srgbClr val="C55D4D"/>
@@ -13054,13 +13984,13 @@
   <p:clrMapOvr>
     <a:masterClrMapping/>
   </p:clrMapOvr>
-  <mc:AlternateContent xmlns:mc="http://schemas.openxmlformats.org/markup-compatibility/2006">
-    <mc:Choice xmlns:p14="http://schemas.microsoft.com/office/powerpoint/2010/main" Requires="p14">
+  <mc:AlternateContent xmlns:mc="http://schemas.openxmlformats.org/markup-compatibility/2006" xmlns:p14="http://schemas.microsoft.com/office/powerpoint/2010/main">
+    <mc:Choice Requires="p14">
       <p:transition spd="slow" p14:dur="2000">
         <p:cut/>
       </p:transition>
     </mc:Choice>
-    <mc:Fallback>
+    <mc:Fallback xmlns="">
       <p:transition spd="slow">
         <p:cut/>
       </p:transition>
@@ -13069,7 +13999,189 @@
   <p:timing>
     <p:tnLst>
       <p:par>
-        <p:cTn id="1" dur="indefinite" restart="never" nodeType="tmRoot"/>
+        <p:cTn id="1" dur="indefinite" restart="never" nodeType="tmRoot">
+          <p:childTnLst>
+            <p:seq concurrent="1" nextAc="seek">
+              <p:cTn id="2" dur="indefinite" nodeType="mainSeq">
+                <p:childTnLst>
+                  <p:par>
+                    <p:cTn id="3" fill="hold">
+                      <p:stCondLst>
+                        <p:cond delay="indefinite"/>
+                      </p:stCondLst>
+                      <p:childTnLst>
+                        <p:par>
+                          <p:cTn id="4" fill="hold">
+                            <p:stCondLst>
+                              <p:cond delay="0"/>
+                            </p:stCondLst>
+                            <p:childTnLst>
+                              <p:par>
+                                <p:cTn id="5" presetID="10" presetClass="entr" presetSubtype="0" fill="hold" nodeType="clickEffect">
+                                  <p:stCondLst>
+                                    <p:cond delay="0"/>
+                                  </p:stCondLst>
+                                  <p:childTnLst>
+                                    <p:set>
+                                      <p:cBhvr>
+                                        <p:cTn id="6" dur="1" fill="hold">
+                                          <p:stCondLst>
+                                            <p:cond delay="0"/>
+                                          </p:stCondLst>
+                                        </p:cTn>
+                                        <p:tgtEl>
+                                          <p:spTgt spid="448"/>
+                                        </p:tgtEl>
+                                        <p:attrNameLst>
+                                          <p:attrName>style.visibility</p:attrName>
+                                        </p:attrNameLst>
+                                      </p:cBhvr>
+                                      <p:to>
+                                        <p:strVal val="visible"/>
+                                      </p:to>
+                                    </p:set>
+                                    <p:animEffect transition="in" filter="fade">
+                                      <p:cBhvr>
+                                        <p:cTn id="7" dur="500"/>
+                                        <p:tgtEl>
+                                          <p:spTgt spid="448"/>
+                                        </p:tgtEl>
+                                      </p:cBhvr>
+                                    </p:animEffect>
+                                  </p:childTnLst>
+                                </p:cTn>
+                              </p:par>
+                            </p:childTnLst>
+                          </p:cTn>
+                        </p:par>
+                      </p:childTnLst>
+                    </p:cTn>
+                  </p:par>
+                  <p:par>
+                    <p:cTn id="8" fill="hold">
+                      <p:stCondLst>
+                        <p:cond delay="indefinite"/>
+                      </p:stCondLst>
+                      <p:childTnLst>
+                        <p:par>
+                          <p:cTn id="9" fill="hold">
+                            <p:stCondLst>
+                              <p:cond delay="0"/>
+                            </p:stCondLst>
+                            <p:childTnLst>
+                              <p:par>
+                                <p:cTn id="10" presetID="10" presetClass="entr" presetSubtype="0" fill="hold" nodeType="clickEffect">
+                                  <p:stCondLst>
+                                    <p:cond delay="0"/>
+                                  </p:stCondLst>
+                                  <p:childTnLst>
+                                    <p:set>
+                                      <p:cBhvr>
+                                        <p:cTn id="11" dur="1" fill="hold">
+                                          <p:stCondLst>
+                                            <p:cond delay="0"/>
+                                          </p:stCondLst>
+                                        </p:cTn>
+                                        <p:tgtEl>
+                                          <p:spTgt spid="480"/>
+                                        </p:tgtEl>
+                                        <p:attrNameLst>
+                                          <p:attrName>style.visibility</p:attrName>
+                                        </p:attrNameLst>
+                                      </p:cBhvr>
+                                      <p:to>
+                                        <p:strVal val="visible"/>
+                                      </p:to>
+                                    </p:set>
+                                    <p:animEffect transition="in" filter="fade">
+                                      <p:cBhvr>
+                                        <p:cTn id="12" dur="500"/>
+                                        <p:tgtEl>
+                                          <p:spTgt spid="480"/>
+                                        </p:tgtEl>
+                                      </p:cBhvr>
+                                    </p:animEffect>
+                                  </p:childTnLst>
+                                </p:cTn>
+                              </p:par>
+                            </p:childTnLst>
+                          </p:cTn>
+                        </p:par>
+                      </p:childTnLst>
+                    </p:cTn>
+                  </p:par>
+                  <p:par>
+                    <p:cTn id="13" fill="hold">
+                      <p:stCondLst>
+                        <p:cond delay="indefinite"/>
+                      </p:stCondLst>
+                      <p:childTnLst>
+                        <p:par>
+                          <p:cTn id="14" fill="hold">
+                            <p:stCondLst>
+                              <p:cond delay="0"/>
+                            </p:stCondLst>
+                            <p:childTnLst>
+                              <p:par>
+                                <p:cTn id="15" presetID="10" presetClass="entr" presetSubtype="0" fill="hold" nodeType="clickEffect">
+                                  <p:stCondLst>
+                                    <p:cond delay="0"/>
+                                  </p:stCondLst>
+                                  <p:childTnLst>
+                                    <p:set>
+                                      <p:cBhvr>
+                                        <p:cTn id="16" dur="1" fill="hold">
+                                          <p:stCondLst>
+                                            <p:cond delay="0"/>
+                                          </p:stCondLst>
+                                        </p:cTn>
+                                        <p:tgtEl>
+                                          <p:spTgt spid="483"/>
+                                        </p:tgtEl>
+                                        <p:attrNameLst>
+                                          <p:attrName>style.visibility</p:attrName>
+                                        </p:attrNameLst>
+                                      </p:cBhvr>
+                                      <p:to>
+                                        <p:strVal val="visible"/>
+                                      </p:to>
+                                    </p:set>
+                                    <p:animEffect transition="in" filter="fade">
+                                      <p:cBhvr>
+                                        <p:cTn id="17" dur="500"/>
+                                        <p:tgtEl>
+                                          <p:spTgt spid="483"/>
+                                        </p:tgtEl>
+                                      </p:cBhvr>
+                                    </p:animEffect>
+                                  </p:childTnLst>
+                                </p:cTn>
+                              </p:par>
+                            </p:childTnLst>
+                          </p:cTn>
+                        </p:par>
+                      </p:childTnLst>
+                    </p:cTn>
+                  </p:par>
+                </p:childTnLst>
+              </p:cTn>
+              <p:prevCondLst>
+                <p:cond evt="onPrev" delay="0">
+                  <p:tgtEl>
+                    <p:sldTgt/>
+                  </p:tgtEl>
+                </p:cond>
+              </p:prevCondLst>
+              <p:nextCondLst>
+                <p:cond evt="onNext" delay="0">
+                  <p:tgtEl>
+                    <p:sldTgt/>
+                  </p:tgtEl>
+                </p:cond>
+              </p:nextCondLst>
+            </p:seq>
+          </p:childTnLst>
+        </p:cTn>
       </p:par>
     </p:tnLst>
   </p:timing>
@@ -13719,13 +14831,13 @@
   <p:clrMapOvr>
     <a:masterClrMapping/>
   </p:clrMapOvr>
-  <mc:AlternateContent xmlns:mc="http://schemas.openxmlformats.org/markup-compatibility/2006">
-    <mc:Choice xmlns:p14="http://schemas.microsoft.com/office/powerpoint/2010/main" Requires="p14">
+  <mc:AlternateContent xmlns:mc="http://schemas.openxmlformats.org/markup-compatibility/2006" xmlns:p14="http://schemas.microsoft.com/office/powerpoint/2010/main">
+    <mc:Choice Requires="p14">
       <p:transition spd="slow" p14:dur="2000">
         <p:cut/>
       </p:transition>
     </mc:Choice>
-    <mc:Fallback>
+    <mc:Fallback xmlns="">
       <p:transition spd="slow">
         <p:cut/>
       </p:transition>
@@ -14834,18 +15946,210 @@
   <p:clrMapOvr>
     <a:masterClrMapping/>
   </p:clrMapOvr>
-  <mc:AlternateContent xmlns:mc="http://schemas.openxmlformats.org/markup-compatibility/2006">
-    <mc:Choice xmlns:p14="http://schemas.microsoft.com/office/powerpoint/2010/main" Requires="p14">
+  <mc:AlternateContent xmlns:mc="http://schemas.openxmlformats.org/markup-compatibility/2006" xmlns:p14="http://schemas.microsoft.com/office/powerpoint/2010/main">
+    <mc:Choice Requires="p14">
       <p:transition spd="slow" p14:dur="2000">
         <p:cut/>
       </p:transition>
     </mc:Choice>
-    <mc:Fallback>
+    <mc:Fallback xmlns="">
       <p:transition spd="slow">
         <p:cut/>
       </p:transition>
     </mc:Fallback>
   </mc:AlternateContent>
+  <p:timing>
+    <p:tnLst>
+      <p:par>
+        <p:cTn id="1" dur="indefinite" restart="never" nodeType="tmRoot">
+          <p:childTnLst>
+            <p:seq concurrent="1" nextAc="seek">
+              <p:cTn id="2" dur="indefinite" nodeType="mainSeq">
+                <p:childTnLst>
+                  <p:par>
+                    <p:cTn id="3" fill="hold">
+                      <p:stCondLst>
+                        <p:cond delay="indefinite"/>
+                      </p:stCondLst>
+                      <p:childTnLst>
+                        <p:par>
+                          <p:cTn id="4" fill="hold">
+                            <p:stCondLst>
+                              <p:cond delay="0"/>
+                            </p:stCondLst>
+                            <p:childTnLst>
+                              <p:par>
+                                <p:cTn id="5" presetID="10" presetClass="entr" presetSubtype="0" fill="hold" nodeType="clickEffect">
+                                  <p:stCondLst>
+                                    <p:cond delay="0"/>
+                                  </p:stCondLst>
+                                  <p:childTnLst>
+                                    <p:set>
+                                      <p:cBhvr>
+                                        <p:cTn id="6" dur="1" fill="hold">
+                                          <p:stCondLst>
+                                            <p:cond delay="0"/>
+                                          </p:stCondLst>
+                                        </p:cTn>
+                                        <p:tgtEl>
+                                          <p:spTgt spid="83"/>
+                                        </p:tgtEl>
+                                        <p:attrNameLst>
+                                          <p:attrName>style.visibility</p:attrName>
+                                        </p:attrNameLst>
+                                      </p:cBhvr>
+                                      <p:to>
+                                        <p:strVal val="visible"/>
+                                      </p:to>
+                                    </p:set>
+                                    <p:animEffect transition="in" filter="fade">
+                                      <p:cBhvr>
+                                        <p:cTn id="7" dur="500"/>
+                                        <p:tgtEl>
+                                          <p:spTgt spid="83"/>
+                                        </p:tgtEl>
+                                      </p:cBhvr>
+                                    </p:animEffect>
+                                  </p:childTnLst>
+                                </p:cTn>
+                              </p:par>
+                            </p:childTnLst>
+                          </p:cTn>
+                        </p:par>
+                      </p:childTnLst>
+                    </p:cTn>
+                  </p:par>
+                  <p:par>
+                    <p:cTn id="8" fill="hold">
+                      <p:stCondLst>
+                        <p:cond delay="indefinite"/>
+                      </p:stCondLst>
+                      <p:childTnLst>
+                        <p:par>
+                          <p:cTn id="9" fill="hold">
+                            <p:stCondLst>
+                              <p:cond delay="0"/>
+                            </p:stCondLst>
+                            <p:childTnLst>
+                              <p:par>
+                                <p:cTn id="10" presetID="10" presetClass="entr" presetSubtype="0" fill="hold" grpId="0" nodeType="clickEffect">
+                                  <p:stCondLst>
+                                    <p:cond delay="0"/>
+                                  </p:stCondLst>
+                                  <p:childTnLst>
+                                    <p:set>
+                                      <p:cBhvr>
+                                        <p:cTn id="11" dur="1" fill="hold">
+                                          <p:stCondLst>
+                                            <p:cond delay="0"/>
+                                          </p:stCondLst>
+                                        </p:cTn>
+                                        <p:tgtEl>
+                                          <p:spTgt spid="74"/>
+                                        </p:tgtEl>
+                                        <p:attrNameLst>
+                                          <p:attrName>style.visibility</p:attrName>
+                                        </p:attrNameLst>
+                                      </p:cBhvr>
+                                      <p:to>
+                                        <p:strVal val="visible"/>
+                                      </p:to>
+                                    </p:set>
+                                    <p:animEffect transition="in" filter="fade">
+                                      <p:cBhvr>
+                                        <p:cTn id="12" dur="500"/>
+                                        <p:tgtEl>
+                                          <p:spTgt spid="74"/>
+                                        </p:tgtEl>
+                                      </p:cBhvr>
+                                    </p:animEffect>
+                                  </p:childTnLst>
+                                </p:cTn>
+                              </p:par>
+                            </p:childTnLst>
+                          </p:cTn>
+                        </p:par>
+                      </p:childTnLst>
+                    </p:cTn>
+                  </p:par>
+                  <p:par>
+                    <p:cTn id="13" fill="hold">
+                      <p:stCondLst>
+                        <p:cond delay="indefinite"/>
+                      </p:stCondLst>
+                      <p:childTnLst>
+                        <p:par>
+                          <p:cTn id="14" fill="hold">
+                            <p:stCondLst>
+                              <p:cond delay="0"/>
+                            </p:stCondLst>
+                            <p:childTnLst>
+                              <p:par>
+                                <p:cTn id="15" presetID="10" presetClass="entr" presetSubtype="0" fill="hold" nodeType="clickEffect">
+                                  <p:stCondLst>
+                                    <p:cond delay="0"/>
+                                  </p:stCondLst>
+                                  <p:childTnLst>
+                                    <p:set>
+                                      <p:cBhvr>
+                                        <p:cTn id="16" dur="1" fill="hold">
+                                          <p:stCondLst>
+                                            <p:cond delay="0"/>
+                                          </p:stCondLst>
+                                        </p:cTn>
+                                        <p:tgtEl>
+                                          <p:spTgt spid="96"/>
+                                        </p:tgtEl>
+                                        <p:attrNameLst>
+                                          <p:attrName>style.visibility</p:attrName>
+                                        </p:attrNameLst>
+                                      </p:cBhvr>
+                                      <p:to>
+                                        <p:strVal val="visible"/>
+                                      </p:to>
+                                    </p:set>
+                                    <p:animEffect transition="in" filter="fade">
+                                      <p:cBhvr>
+                                        <p:cTn id="17" dur="500"/>
+                                        <p:tgtEl>
+                                          <p:spTgt spid="96"/>
+                                        </p:tgtEl>
+                                      </p:cBhvr>
+                                    </p:animEffect>
+                                  </p:childTnLst>
+                                </p:cTn>
+                              </p:par>
+                            </p:childTnLst>
+                          </p:cTn>
+                        </p:par>
+                      </p:childTnLst>
+                    </p:cTn>
+                  </p:par>
+                </p:childTnLst>
+              </p:cTn>
+              <p:prevCondLst>
+                <p:cond evt="onPrev" delay="0">
+                  <p:tgtEl>
+                    <p:sldTgt/>
+                  </p:tgtEl>
+                </p:cond>
+              </p:prevCondLst>
+              <p:nextCondLst>
+                <p:cond evt="onNext" delay="0">
+                  <p:tgtEl>
+                    <p:sldTgt/>
+                  </p:tgtEl>
+                </p:cond>
+              </p:nextCondLst>
+            </p:seq>
+          </p:childTnLst>
+        </p:cTn>
+      </p:par>
+    </p:tnLst>
+    <p:bldLst>
+      <p:bldP spid="74" grpId="0" animBg="1"/>
+    </p:bldLst>
+  </p:timing>
 </p:sld>
 </file>
 
@@ -15749,18 +17053,6 @@
               <a:r>
                 <a:rPr lang="zh-TW" sz="1050" b="1">
                   <a:solidFill>
-                    <a:srgbClr val="5A7557"/>
-                  </a:solidFill>
-                  <a:latin typeface="Noto Sans TC"/>
-                  <a:ea typeface="Noto Sans TC"/>
-                  <a:cs typeface="Noto Sans TC"/>
-                  <a:sym typeface="Noto Sans TC"/>
-                </a:rPr>
-                <a:t/>
-              </a:r>
-              <a:r>
-                <a:rPr lang="zh-TW" sz="1050" b="1">
-                  <a:solidFill>
                     <a:srgbClr val="2D4333"/>
                   </a:solidFill>
                   <a:latin typeface="Noto Sans TC"/>
@@ -15971,18 +17263,316 @@
   <p:clrMapOvr>
     <a:masterClrMapping/>
   </p:clrMapOvr>
-  <mc:AlternateContent xmlns:mc="http://schemas.openxmlformats.org/markup-compatibility/2006">
-    <mc:Choice xmlns:p14="http://schemas.microsoft.com/office/powerpoint/2010/main" Requires="p14">
+  <mc:AlternateContent xmlns:mc="http://schemas.openxmlformats.org/markup-compatibility/2006" xmlns:p14="http://schemas.microsoft.com/office/powerpoint/2010/main">
+    <mc:Choice Requires="p14">
       <p:transition spd="slow" p14:dur="2000">
         <p:cut/>
       </p:transition>
     </mc:Choice>
-    <mc:Fallback>
+    <mc:Fallback xmlns="">
       <p:transition spd="slow">
         <p:cut/>
       </p:transition>
     </mc:Fallback>
   </mc:AlternateContent>
+  <p:timing>
+    <p:tnLst>
+      <p:par>
+        <p:cTn id="1" dur="indefinite" restart="never" nodeType="tmRoot">
+          <p:childTnLst>
+            <p:seq concurrent="1" nextAc="seek">
+              <p:cTn id="2" dur="indefinite" nodeType="mainSeq">
+                <p:childTnLst>
+                  <p:par>
+                    <p:cTn id="3" fill="hold">
+                      <p:stCondLst>
+                        <p:cond delay="indefinite"/>
+                      </p:stCondLst>
+                      <p:childTnLst>
+                        <p:par>
+                          <p:cTn id="4" fill="hold">
+                            <p:stCondLst>
+                              <p:cond delay="0"/>
+                            </p:stCondLst>
+                            <p:childTnLst>
+                              <p:par>
+                                <p:cTn id="5" presetID="10" presetClass="entr" presetSubtype="0" fill="hold" nodeType="clickEffect">
+                                  <p:stCondLst>
+                                    <p:cond delay="0"/>
+                                  </p:stCondLst>
+                                  <p:childTnLst>
+                                    <p:set>
+                                      <p:cBhvr>
+                                        <p:cTn id="6" dur="1" fill="hold">
+                                          <p:stCondLst>
+                                            <p:cond delay="0"/>
+                                          </p:stCondLst>
+                                        </p:cTn>
+                                        <p:tgtEl>
+                                          <p:spTgt spid="113"/>
+                                        </p:tgtEl>
+                                        <p:attrNameLst>
+                                          <p:attrName>style.visibility</p:attrName>
+                                        </p:attrNameLst>
+                                      </p:cBhvr>
+                                      <p:to>
+                                        <p:strVal val="visible"/>
+                                      </p:to>
+                                    </p:set>
+                                    <p:animEffect transition="in" filter="fade">
+                                      <p:cBhvr>
+                                        <p:cTn id="7" dur="500"/>
+                                        <p:tgtEl>
+                                          <p:spTgt spid="113"/>
+                                        </p:tgtEl>
+                                      </p:cBhvr>
+                                    </p:animEffect>
+                                  </p:childTnLst>
+                                </p:cTn>
+                              </p:par>
+                            </p:childTnLst>
+                          </p:cTn>
+                        </p:par>
+                      </p:childTnLst>
+                    </p:cTn>
+                  </p:par>
+                  <p:par>
+                    <p:cTn id="8" fill="hold">
+                      <p:stCondLst>
+                        <p:cond delay="indefinite"/>
+                      </p:stCondLst>
+                      <p:childTnLst>
+                        <p:par>
+                          <p:cTn id="9" fill="hold">
+                            <p:stCondLst>
+                              <p:cond delay="0"/>
+                            </p:stCondLst>
+                            <p:childTnLst>
+                              <p:par>
+                                <p:cTn id="10" presetID="10" presetClass="entr" presetSubtype="0" fill="hold" nodeType="clickEffect">
+                                  <p:stCondLst>
+                                    <p:cond delay="0"/>
+                                  </p:stCondLst>
+                                  <p:childTnLst>
+                                    <p:set>
+                                      <p:cBhvr>
+                                        <p:cTn id="11" dur="1" fill="hold">
+                                          <p:stCondLst>
+                                            <p:cond delay="0"/>
+                                          </p:stCondLst>
+                                        </p:cTn>
+                                        <p:tgtEl>
+                                          <p:spTgt spid="117"/>
+                                        </p:tgtEl>
+                                        <p:attrNameLst>
+                                          <p:attrName>style.visibility</p:attrName>
+                                        </p:attrNameLst>
+                                      </p:cBhvr>
+                                      <p:to>
+                                        <p:strVal val="visible"/>
+                                      </p:to>
+                                    </p:set>
+                                    <p:animEffect transition="in" filter="fade">
+                                      <p:cBhvr>
+                                        <p:cTn id="12" dur="500"/>
+                                        <p:tgtEl>
+                                          <p:spTgt spid="117"/>
+                                        </p:tgtEl>
+                                      </p:cBhvr>
+                                    </p:animEffect>
+                                  </p:childTnLst>
+                                </p:cTn>
+                              </p:par>
+                            </p:childTnLst>
+                          </p:cTn>
+                        </p:par>
+                      </p:childTnLst>
+                    </p:cTn>
+                  </p:par>
+                  <p:par>
+                    <p:cTn id="13" fill="hold">
+                      <p:stCondLst>
+                        <p:cond delay="indefinite"/>
+                      </p:stCondLst>
+                      <p:childTnLst>
+                        <p:par>
+                          <p:cTn id="14" fill="hold">
+                            <p:stCondLst>
+                              <p:cond delay="0"/>
+                            </p:stCondLst>
+                            <p:childTnLst>
+                              <p:par>
+                                <p:cTn id="15" presetID="10" presetClass="entr" presetSubtype="0" fill="hold" grpId="0" nodeType="clickEffect">
+                                  <p:stCondLst>
+                                    <p:cond delay="0"/>
+                                  </p:stCondLst>
+                                  <p:childTnLst>
+                                    <p:set>
+                                      <p:cBhvr>
+                                        <p:cTn id="16" dur="1" fill="hold">
+                                          <p:stCondLst>
+                                            <p:cond delay="0"/>
+                                          </p:stCondLst>
+                                        </p:cTn>
+                                        <p:tgtEl>
+                                          <p:spTgt spid="109"/>
+                                        </p:tgtEl>
+                                        <p:attrNameLst>
+                                          <p:attrName>style.visibility</p:attrName>
+                                        </p:attrNameLst>
+                                      </p:cBhvr>
+                                      <p:to>
+                                        <p:strVal val="visible"/>
+                                      </p:to>
+                                    </p:set>
+                                    <p:animEffect transition="in" filter="fade">
+                                      <p:cBhvr>
+                                        <p:cTn id="17" dur="500"/>
+                                        <p:tgtEl>
+                                          <p:spTgt spid="109"/>
+                                        </p:tgtEl>
+                                      </p:cBhvr>
+                                    </p:animEffect>
+                                  </p:childTnLst>
+                                </p:cTn>
+                              </p:par>
+                            </p:childTnLst>
+                          </p:cTn>
+                        </p:par>
+                      </p:childTnLst>
+                    </p:cTn>
+                  </p:par>
+                  <p:par>
+                    <p:cTn id="18" fill="hold">
+                      <p:stCondLst>
+                        <p:cond delay="indefinite"/>
+                      </p:stCondLst>
+                      <p:childTnLst>
+                        <p:par>
+                          <p:cTn id="19" fill="hold">
+                            <p:stCondLst>
+                              <p:cond delay="0"/>
+                            </p:stCondLst>
+                            <p:childTnLst>
+                              <p:par>
+                                <p:cTn id="20" presetID="10" presetClass="entr" presetSubtype="0" fill="hold" nodeType="clickEffect">
+                                  <p:stCondLst>
+                                    <p:cond delay="0"/>
+                                  </p:stCondLst>
+                                  <p:childTnLst>
+                                    <p:set>
+                                      <p:cBhvr>
+                                        <p:cTn id="21" dur="1" fill="hold">
+                                          <p:stCondLst>
+                                            <p:cond delay="0"/>
+                                          </p:stCondLst>
+                                        </p:cTn>
+                                        <p:tgtEl>
+                                          <p:spTgt spid="121"/>
+                                        </p:tgtEl>
+                                        <p:attrNameLst>
+                                          <p:attrName>style.visibility</p:attrName>
+                                        </p:attrNameLst>
+                                      </p:cBhvr>
+                                      <p:to>
+                                        <p:strVal val="visible"/>
+                                      </p:to>
+                                    </p:set>
+                                    <p:animEffect transition="in" filter="fade">
+                                      <p:cBhvr>
+                                        <p:cTn id="22" dur="500"/>
+                                        <p:tgtEl>
+                                          <p:spTgt spid="121"/>
+                                        </p:tgtEl>
+                                      </p:cBhvr>
+                                    </p:animEffect>
+                                  </p:childTnLst>
+                                </p:cTn>
+                              </p:par>
+                            </p:childTnLst>
+                          </p:cTn>
+                        </p:par>
+                      </p:childTnLst>
+                    </p:cTn>
+                  </p:par>
+                  <p:par>
+                    <p:cTn id="23" fill="hold">
+                      <p:stCondLst>
+                        <p:cond delay="indefinite"/>
+                      </p:stCondLst>
+                      <p:childTnLst>
+                        <p:par>
+                          <p:cTn id="24" fill="hold">
+                            <p:stCondLst>
+                              <p:cond delay="0"/>
+                            </p:stCondLst>
+                            <p:childTnLst>
+                              <p:par>
+                                <p:cTn id="25" presetID="10" presetClass="entr" presetSubtype="0" fill="hold" nodeType="clickEffect">
+                                  <p:stCondLst>
+                                    <p:cond delay="0"/>
+                                  </p:stCondLst>
+                                  <p:childTnLst>
+                                    <p:set>
+                                      <p:cBhvr>
+                                        <p:cTn id="26" dur="1" fill="hold">
+                                          <p:stCondLst>
+                                            <p:cond delay="0"/>
+                                          </p:stCondLst>
+                                        </p:cTn>
+                                        <p:tgtEl>
+                                          <p:spTgt spid="124"/>
+                                        </p:tgtEl>
+                                        <p:attrNameLst>
+                                          <p:attrName>style.visibility</p:attrName>
+                                        </p:attrNameLst>
+                                      </p:cBhvr>
+                                      <p:to>
+                                        <p:strVal val="visible"/>
+                                      </p:to>
+                                    </p:set>
+                                    <p:animEffect transition="in" filter="fade">
+                                      <p:cBhvr>
+                                        <p:cTn id="27" dur="500"/>
+                                        <p:tgtEl>
+                                          <p:spTgt spid="124"/>
+                                        </p:tgtEl>
+                                      </p:cBhvr>
+                                    </p:animEffect>
+                                  </p:childTnLst>
+                                </p:cTn>
+                              </p:par>
+                            </p:childTnLst>
+                          </p:cTn>
+                        </p:par>
+                      </p:childTnLst>
+                    </p:cTn>
+                  </p:par>
+                </p:childTnLst>
+              </p:cTn>
+              <p:prevCondLst>
+                <p:cond evt="onPrev" delay="0">
+                  <p:tgtEl>
+                    <p:sldTgt/>
+                  </p:tgtEl>
+                </p:cond>
+              </p:prevCondLst>
+              <p:nextCondLst>
+                <p:cond evt="onNext" delay="0">
+                  <p:tgtEl>
+                    <p:sldTgt/>
+                  </p:tgtEl>
+                </p:cond>
+              </p:nextCondLst>
+            </p:seq>
+          </p:childTnLst>
+        </p:cTn>
+      </p:par>
+    </p:tnLst>
+    <p:bldLst>
+      <p:bldP spid="109" grpId="0" animBg="1"/>
+    </p:bldLst>
+  </p:timing>
 </p:sld>
 </file>
 
@@ -16296,7 +17886,7 @@
                 <a:r>
                   <a:rPr lang="zh-TW" sz="1050" b="1">
                     <a:solidFill>
-                      <a:srgbClr val="FFFFFF"/>
+                      <a:srgbClr val="3C5A3C"/>
                     </a:solidFill>
                     <a:latin typeface="Noto Sans TC"/>
                     <a:ea typeface="Noto Sans TC"/>
@@ -16427,7 +18017,7 @@
                 <a:r>
                   <a:rPr lang="zh-TW" sz="1050" b="1">
                     <a:solidFill>
-                      <a:srgbClr val="FFFFFF"/>
+                      <a:srgbClr val="3C5A3C"/>
                     </a:solidFill>
                     <a:latin typeface="Noto Sans TC"/>
                     <a:ea typeface="Noto Sans TC"/>
@@ -16558,7 +18148,7 @@
                 <a:r>
                   <a:rPr lang="zh-TW" sz="1050" b="1">
                     <a:solidFill>
-                      <a:srgbClr val="FFFFFF"/>
+                      <a:srgbClr val="3C5A3C"/>
                     </a:solidFill>
                     <a:latin typeface="Noto Sans TC"/>
                     <a:ea typeface="Noto Sans TC"/>
@@ -16689,7 +18279,7 @@
                 <a:r>
                   <a:rPr lang="zh-TW" sz="1050" b="1">
                     <a:solidFill>
-                      <a:srgbClr val="FFFFFF"/>
+                      <a:srgbClr val="3C5A3C"/>
                     </a:solidFill>
                     <a:latin typeface="Noto Sans TC"/>
                     <a:ea typeface="Noto Sans TC"/>
@@ -16820,7 +18410,7 @@
                 <a:r>
                   <a:rPr lang="zh-TW" sz="1050" b="1">
                     <a:solidFill>
-                      <a:srgbClr val="FFFFFF"/>
+                      <a:srgbClr val="3C5A3C"/>
                     </a:solidFill>
                     <a:latin typeface="Noto Sans TC"/>
                     <a:ea typeface="Noto Sans TC"/>
@@ -16951,7 +18541,7 @@
                 <a:r>
                   <a:rPr lang="zh-TW" sz="1050" b="1">
                     <a:solidFill>
-                      <a:srgbClr val="FFFFFF"/>
+                      <a:srgbClr val="3C5A3C"/>
                     </a:solidFill>
                     <a:latin typeface="Noto Sans TC"/>
                     <a:ea typeface="Noto Sans TC"/>
@@ -17082,7 +18672,7 @@
                 <a:r>
                   <a:rPr lang="zh-TW" sz="1050" b="1">
                     <a:solidFill>
-                      <a:srgbClr val="FFFFFF"/>
+                      <a:srgbClr val="3C5A3C"/>
                     </a:solidFill>
                     <a:latin typeface="Noto Sans TC"/>
                     <a:ea typeface="Noto Sans TC"/>
@@ -17498,18 +19088,207 @@
   <p:clrMapOvr>
     <a:masterClrMapping/>
   </p:clrMapOvr>
-  <mc:AlternateContent xmlns:mc="http://schemas.openxmlformats.org/markup-compatibility/2006">
-    <mc:Choice xmlns:p14="http://schemas.microsoft.com/office/powerpoint/2010/main" Requires="p14">
+  <mc:AlternateContent xmlns:mc="http://schemas.openxmlformats.org/markup-compatibility/2006" xmlns:p14="http://schemas.microsoft.com/office/powerpoint/2010/main">
+    <mc:Choice Requires="p14">
       <p:transition spd="slow" p14:dur="2000">
         <p:cut/>
       </p:transition>
     </mc:Choice>
-    <mc:Fallback>
+    <mc:Fallback xmlns="">
       <p:transition spd="slow">
         <p:cut/>
       </p:transition>
     </mc:Fallback>
   </mc:AlternateContent>
+  <p:timing>
+    <p:tnLst>
+      <p:par>
+        <p:cTn id="1" dur="indefinite" restart="never" nodeType="tmRoot">
+          <p:childTnLst>
+            <p:seq concurrent="1" nextAc="seek">
+              <p:cTn id="2" dur="indefinite" nodeType="mainSeq">
+                <p:childTnLst>
+                  <p:par>
+                    <p:cTn id="3" fill="hold">
+                      <p:stCondLst>
+                        <p:cond delay="indefinite"/>
+                      </p:stCondLst>
+                      <p:childTnLst>
+                        <p:par>
+                          <p:cTn id="4" fill="hold">
+                            <p:stCondLst>
+                              <p:cond delay="0"/>
+                            </p:stCondLst>
+                            <p:childTnLst>
+                              <p:par>
+                                <p:cTn id="5" presetID="10" presetClass="entr" presetSubtype="0" fill="hold" nodeType="clickEffect">
+                                  <p:stCondLst>
+                                    <p:cond delay="0"/>
+                                  </p:stCondLst>
+                                  <p:childTnLst>
+                                    <p:set>
+                                      <p:cBhvr>
+                                        <p:cTn id="6" dur="1" fill="hold">
+                                          <p:stCondLst>
+                                            <p:cond delay="0"/>
+                                          </p:stCondLst>
+                                        </p:cTn>
+                                        <p:tgtEl>
+                                          <p:spTgt spid="140"/>
+                                        </p:tgtEl>
+                                        <p:attrNameLst>
+                                          <p:attrName>style.visibility</p:attrName>
+                                        </p:attrNameLst>
+                                      </p:cBhvr>
+                                      <p:to>
+                                        <p:strVal val="visible"/>
+                                      </p:to>
+                                    </p:set>
+                                    <p:animEffect transition="in" filter="fade">
+                                      <p:cBhvr>
+                                        <p:cTn id="7" dur="500"/>
+                                        <p:tgtEl>
+                                          <p:spTgt spid="140"/>
+                                        </p:tgtEl>
+                                      </p:cBhvr>
+                                    </p:animEffect>
+                                  </p:childTnLst>
+                                </p:cTn>
+                              </p:par>
+                            </p:childTnLst>
+                          </p:cTn>
+                        </p:par>
+                      </p:childTnLst>
+                    </p:cTn>
+                  </p:par>
+                  <p:par>
+                    <p:cTn id="8" fill="hold">
+                      <p:stCondLst>
+                        <p:cond delay="indefinite"/>
+                      </p:stCondLst>
+                      <p:childTnLst>
+                        <p:par>
+                          <p:cTn id="9" fill="hold">
+                            <p:stCondLst>
+                              <p:cond delay="0"/>
+                            </p:stCondLst>
+                            <p:childTnLst>
+                              <p:par>
+                                <p:cTn id="10" presetID="10" presetClass="entr" presetSubtype="0" fill="hold" nodeType="clickEffect">
+                                  <p:stCondLst>
+                                    <p:cond delay="0"/>
+                                  </p:stCondLst>
+                                  <p:childTnLst>
+                                    <p:set>
+                                      <p:cBhvr>
+                                        <p:cTn id="11" dur="1" fill="hold">
+                                          <p:stCondLst>
+                                            <p:cond delay="0"/>
+                                          </p:stCondLst>
+                                        </p:cTn>
+                                        <p:tgtEl>
+                                          <p:spTgt spid="175"/>
+                                        </p:tgtEl>
+                                        <p:attrNameLst>
+                                          <p:attrName>style.visibility</p:attrName>
+                                        </p:attrNameLst>
+                                      </p:cBhvr>
+                                      <p:to>
+                                        <p:strVal val="visible"/>
+                                      </p:to>
+                                    </p:set>
+                                    <p:animEffect transition="in" filter="fade">
+                                      <p:cBhvr>
+                                        <p:cTn id="12" dur="500"/>
+                                        <p:tgtEl>
+                                          <p:spTgt spid="175"/>
+                                        </p:tgtEl>
+                                      </p:cBhvr>
+                                    </p:animEffect>
+                                  </p:childTnLst>
+                                </p:cTn>
+                              </p:par>
+                            </p:childTnLst>
+                          </p:cTn>
+                        </p:par>
+                      </p:childTnLst>
+                    </p:cTn>
+                  </p:par>
+                  <p:par>
+                    <p:cTn id="13" fill="hold">
+                      <p:stCondLst>
+                        <p:cond delay="indefinite"/>
+                      </p:stCondLst>
+                      <p:childTnLst>
+                        <p:par>
+                          <p:cTn id="14" fill="hold">
+                            <p:stCondLst>
+                              <p:cond delay="0"/>
+                            </p:stCondLst>
+                            <p:childTnLst>
+                              <p:par>
+                                <p:cTn id="15" presetID="10" presetClass="entr" presetSubtype="0" fill="hold" nodeType="clickEffect">
+                                  <p:stCondLst>
+                                    <p:cond delay="0"/>
+                                  </p:stCondLst>
+                                  <p:childTnLst>
+                                    <p:set>
+                                      <p:cBhvr>
+                                        <p:cTn id="16" dur="1" fill="hold">
+                                          <p:stCondLst>
+                                            <p:cond delay="0"/>
+                                          </p:stCondLst>
+                                        </p:cTn>
+                                        <p:tgtEl>
+                                          <p:spTgt spid="178"/>
+                                        </p:tgtEl>
+                                        <p:attrNameLst>
+                                          <p:attrName>style.visibility</p:attrName>
+                                        </p:attrNameLst>
+                                      </p:cBhvr>
+                                      <p:to>
+                                        <p:strVal val="visible"/>
+                                      </p:to>
+                                    </p:set>
+                                    <p:animEffect transition="in" filter="fade">
+                                      <p:cBhvr>
+                                        <p:cTn id="17" dur="500"/>
+                                        <p:tgtEl>
+                                          <p:spTgt spid="178"/>
+                                        </p:tgtEl>
+                                      </p:cBhvr>
+                                    </p:animEffect>
+                                  </p:childTnLst>
+                                </p:cTn>
+                              </p:par>
+                            </p:childTnLst>
+                          </p:cTn>
+                        </p:par>
+                      </p:childTnLst>
+                    </p:cTn>
+                  </p:par>
+                </p:childTnLst>
+              </p:cTn>
+              <p:prevCondLst>
+                <p:cond evt="onPrev" delay="0">
+                  <p:tgtEl>
+                    <p:sldTgt/>
+                  </p:tgtEl>
+                </p:cond>
+              </p:prevCondLst>
+              <p:nextCondLst>
+                <p:cond evt="onNext" delay="0">
+                  <p:tgtEl>
+                    <p:sldTgt/>
+                  </p:tgtEl>
+                </p:cond>
+              </p:nextCondLst>
+            </p:seq>
+          </p:childTnLst>
+        </p:cTn>
+      </p:par>
+    </p:tnLst>
+  </p:timing>
 </p:sld>
 </file>
 
@@ -18448,18 +20227,263 @@
   <p:clrMapOvr>
     <a:masterClrMapping/>
   </p:clrMapOvr>
-  <mc:AlternateContent xmlns:mc="http://schemas.openxmlformats.org/markup-compatibility/2006">
-    <mc:Choice xmlns:p14="http://schemas.microsoft.com/office/powerpoint/2010/main" Requires="p14">
+  <mc:AlternateContent xmlns:mc="http://schemas.openxmlformats.org/markup-compatibility/2006" xmlns:p14="http://schemas.microsoft.com/office/powerpoint/2010/main">
+    <mc:Choice Requires="p14">
       <p:transition spd="slow" p14:dur="2000">
         <p:cut/>
       </p:transition>
     </mc:Choice>
-    <mc:Fallback>
+    <mc:Fallback xmlns="">
       <p:transition spd="slow">
         <p:cut/>
       </p:transition>
     </mc:Fallback>
   </mc:AlternateContent>
+  <p:timing>
+    <p:tnLst>
+      <p:par>
+        <p:cTn id="1" dur="indefinite" restart="never" nodeType="tmRoot">
+          <p:childTnLst>
+            <p:seq concurrent="1" nextAc="seek">
+              <p:cTn id="2" dur="indefinite" nodeType="mainSeq">
+                <p:childTnLst>
+                  <p:par>
+                    <p:cTn id="3" fill="hold">
+                      <p:stCondLst>
+                        <p:cond delay="indefinite"/>
+                      </p:stCondLst>
+                      <p:childTnLst>
+                        <p:par>
+                          <p:cTn id="4" fill="hold">
+                            <p:stCondLst>
+                              <p:cond delay="0"/>
+                            </p:stCondLst>
+                            <p:childTnLst>
+                              <p:par>
+                                <p:cTn id="5" presetID="10" presetClass="entr" presetSubtype="0" fill="hold" nodeType="clickEffect">
+                                  <p:stCondLst>
+                                    <p:cond delay="0"/>
+                                  </p:stCondLst>
+                                  <p:childTnLst>
+                                    <p:set>
+                                      <p:cBhvr>
+                                        <p:cTn id="6" dur="1" fill="hold">
+                                          <p:stCondLst>
+                                            <p:cond delay="0"/>
+                                          </p:stCondLst>
+                                        </p:cTn>
+                                        <p:tgtEl>
+                                          <p:spTgt spid="197"/>
+                                        </p:tgtEl>
+                                        <p:attrNameLst>
+                                          <p:attrName>style.visibility</p:attrName>
+                                        </p:attrNameLst>
+                                      </p:cBhvr>
+                                      <p:to>
+                                        <p:strVal val="visible"/>
+                                      </p:to>
+                                    </p:set>
+                                    <p:animEffect transition="in" filter="fade">
+                                      <p:cBhvr>
+                                        <p:cTn id="7" dur="500"/>
+                                        <p:tgtEl>
+                                          <p:spTgt spid="197"/>
+                                        </p:tgtEl>
+                                      </p:cBhvr>
+                                    </p:animEffect>
+                                  </p:childTnLst>
+                                </p:cTn>
+                              </p:par>
+                            </p:childTnLst>
+                          </p:cTn>
+                        </p:par>
+                      </p:childTnLst>
+                    </p:cTn>
+                  </p:par>
+                  <p:par>
+                    <p:cTn id="8" fill="hold">
+                      <p:stCondLst>
+                        <p:cond delay="indefinite"/>
+                      </p:stCondLst>
+                      <p:childTnLst>
+                        <p:par>
+                          <p:cTn id="9" fill="hold">
+                            <p:stCondLst>
+                              <p:cond delay="0"/>
+                            </p:stCondLst>
+                            <p:childTnLst>
+                              <p:par>
+                                <p:cTn id="10" presetID="10" presetClass="entr" presetSubtype="0" fill="hold" nodeType="clickEffect">
+                                  <p:stCondLst>
+                                    <p:cond delay="0"/>
+                                  </p:stCondLst>
+                                  <p:childTnLst>
+                                    <p:set>
+                                      <p:cBhvr>
+                                        <p:cTn id="11" dur="1" fill="hold">
+                                          <p:stCondLst>
+                                            <p:cond delay="0"/>
+                                          </p:stCondLst>
+                                        </p:cTn>
+                                        <p:tgtEl>
+                                          <p:spTgt spid="201"/>
+                                        </p:tgtEl>
+                                        <p:attrNameLst>
+                                          <p:attrName>style.visibility</p:attrName>
+                                        </p:attrNameLst>
+                                      </p:cBhvr>
+                                      <p:to>
+                                        <p:strVal val="visible"/>
+                                      </p:to>
+                                    </p:set>
+                                    <p:animEffect transition="in" filter="fade">
+                                      <p:cBhvr>
+                                        <p:cTn id="12" dur="500"/>
+                                        <p:tgtEl>
+                                          <p:spTgt spid="201"/>
+                                        </p:tgtEl>
+                                      </p:cBhvr>
+                                    </p:animEffect>
+                                  </p:childTnLst>
+                                </p:cTn>
+                              </p:par>
+                            </p:childTnLst>
+                          </p:cTn>
+                        </p:par>
+                      </p:childTnLst>
+                    </p:cTn>
+                  </p:par>
+                  <p:par>
+                    <p:cTn id="13" fill="hold">
+                      <p:stCondLst>
+                        <p:cond delay="indefinite"/>
+                      </p:stCondLst>
+                      <p:childTnLst>
+                        <p:par>
+                          <p:cTn id="14" fill="hold">
+                            <p:stCondLst>
+                              <p:cond delay="0"/>
+                            </p:stCondLst>
+                            <p:childTnLst>
+                              <p:par>
+                                <p:cTn id="15" presetID="10" presetClass="entr" presetSubtype="0" fill="hold" grpId="0" nodeType="clickEffect">
+                                  <p:stCondLst>
+                                    <p:cond delay="0"/>
+                                  </p:stCondLst>
+                                  <p:childTnLst>
+                                    <p:set>
+                                      <p:cBhvr>
+                                        <p:cTn id="16" dur="1" fill="hold">
+                                          <p:stCondLst>
+                                            <p:cond delay="0"/>
+                                          </p:stCondLst>
+                                        </p:cTn>
+                                        <p:tgtEl>
+                                          <p:spTgt spid="186"/>
+                                        </p:tgtEl>
+                                        <p:attrNameLst>
+                                          <p:attrName>style.visibility</p:attrName>
+                                        </p:attrNameLst>
+                                      </p:cBhvr>
+                                      <p:to>
+                                        <p:strVal val="visible"/>
+                                      </p:to>
+                                    </p:set>
+                                    <p:animEffect transition="in" filter="fade">
+                                      <p:cBhvr>
+                                        <p:cTn id="17" dur="500"/>
+                                        <p:tgtEl>
+                                          <p:spTgt spid="186"/>
+                                        </p:tgtEl>
+                                      </p:cBhvr>
+                                    </p:animEffect>
+                                  </p:childTnLst>
+                                </p:cTn>
+                              </p:par>
+                            </p:childTnLst>
+                          </p:cTn>
+                        </p:par>
+                      </p:childTnLst>
+                    </p:cTn>
+                  </p:par>
+                  <p:par>
+                    <p:cTn id="18" fill="hold">
+                      <p:stCondLst>
+                        <p:cond delay="indefinite"/>
+                      </p:stCondLst>
+                      <p:childTnLst>
+                        <p:par>
+                          <p:cTn id="19" fill="hold">
+                            <p:stCondLst>
+                              <p:cond delay="0"/>
+                            </p:stCondLst>
+                            <p:childTnLst>
+                              <p:par>
+                                <p:cTn id="20" presetID="10" presetClass="entr" presetSubtype="0" fill="hold" nodeType="clickEffect">
+                                  <p:stCondLst>
+                                    <p:cond delay="0"/>
+                                  </p:stCondLst>
+                                  <p:childTnLst>
+                                    <p:set>
+                                      <p:cBhvr>
+                                        <p:cTn id="21" dur="1" fill="hold">
+                                          <p:stCondLst>
+                                            <p:cond delay="0"/>
+                                          </p:stCondLst>
+                                        </p:cTn>
+                                        <p:tgtEl>
+                                          <p:spTgt spid="205"/>
+                                        </p:tgtEl>
+                                        <p:attrNameLst>
+                                          <p:attrName>style.visibility</p:attrName>
+                                        </p:attrNameLst>
+                                      </p:cBhvr>
+                                      <p:to>
+                                        <p:strVal val="visible"/>
+                                      </p:to>
+                                    </p:set>
+                                    <p:animEffect transition="in" filter="fade">
+                                      <p:cBhvr>
+                                        <p:cTn id="22" dur="500"/>
+                                        <p:tgtEl>
+                                          <p:spTgt spid="205"/>
+                                        </p:tgtEl>
+                                      </p:cBhvr>
+                                    </p:animEffect>
+                                  </p:childTnLst>
+                                </p:cTn>
+                              </p:par>
+                            </p:childTnLst>
+                          </p:cTn>
+                        </p:par>
+                      </p:childTnLst>
+                    </p:cTn>
+                  </p:par>
+                </p:childTnLst>
+              </p:cTn>
+              <p:prevCondLst>
+                <p:cond evt="onPrev" delay="0">
+                  <p:tgtEl>
+                    <p:sldTgt/>
+                  </p:tgtEl>
+                </p:cond>
+              </p:prevCondLst>
+              <p:nextCondLst>
+                <p:cond evt="onNext" delay="0">
+                  <p:tgtEl>
+                    <p:sldTgt/>
+                  </p:tgtEl>
+                </p:cond>
+              </p:nextCondLst>
+            </p:seq>
+          </p:childTnLst>
+        </p:cTn>
+      </p:par>
+    </p:tnLst>
+    <p:bldLst>
+      <p:bldP spid="186" grpId="0" animBg="1"/>
+    </p:bldLst>
+  </p:timing>
 </p:sld>
 </file>
 
@@ -19426,13 +21450,13 @@
   <p:clrMapOvr>
     <a:masterClrMapping/>
   </p:clrMapOvr>
-  <mc:AlternateContent xmlns:mc="http://schemas.openxmlformats.org/markup-compatibility/2006">
-    <mc:Choice xmlns:p14="http://schemas.microsoft.com/office/powerpoint/2010/main" Requires="p14">
+  <mc:AlternateContent xmlns:mc="http://schemas.openxmlformats.org/markup-compatibility/2006" xmlns:p14="http://schemas.microsoft.com/office/powerpoint/2010/main">
+    <mc:Choice Requires="p14">
       <p:transition spd="slow" p14:dur="2000">
         <p:cut/>
       </p:transition>
     </mc:Choice>
-    <mc:Fallback>
+    <mc:Fallback xmlns="">
       <p:transition spd="slow">
         <p:cut/>
       </p:transition>
@@ -19441,9 +21465,247 @@
   <p:timing>
     <p:tnLst>
       <p:par>
-        <p:cTn id="1" dur="indefinite" restart="never" nodeType="tmRoot"/>
+        <p:cTn id="1" dur="indefinite" restart="never" nodeType="tmRoot">
+          <p:childTnLst>
+            <p:seq concurrent="1" nextAc="seek">
+              <p:cTn id="2" dur="indefinite" nodeType="mainSeq">
+                <p:childTnLst>
+                  <p:par>
+                    <p:cTn id="3" fill="hold">
+                      <p:stCondLst>
+                        <p:cond delay="indefinite"/>
+                      </p:stCondLst>
+                      <p:childTnLst>
+                        <p:par>
+                          <p:cTn id="4" fill="hold">
+                            <p:stCondLst>
+                              <p:cond delay="0"/>
+                            </p:stCondLst>
+                            <p:childTnLst>
+                              <p:par>
+                                <p:cTn id="5" presetID="10" presetClass="entr" presetSubtype="0" fill="hold" nodeType="clickEffect">
+                                  <p:stCondLst>
+                                    <p:cond delay="0"/>
+                                  </p:stCondLst>
+                                  <p:childTnLst>
+                                    <p:set>
+                                      <p:cBhvr>
+                                        <p:cTn id="6" dur="1" fill="hold">
+                                          <p:stCondLst>
+                                            <p:cond delay="0"/>
+                                          </p:stCondLst>
+                                        </p:cTn>
+                                        <p:tgtEl>
+                                          <p:spTgt spid="221"/>
+                                        </p:tgtEl>
+                                        <p:attrNameLst>
+                                          <p:attrName>style.visibility</p:attrName>
+                                        </p:attrNameLst>
+                                      </p:cBhvr>
+                                      <p:to>
+                                        <p:strVal val="visible"/>
+                                      </p:to>
+                                    </p:set>
+                                    <p:animEffect transition="in" filter="fade">
+                                      <p:cBhvr>
+                                        <p:cTn id="7" dur="500"/>
+                                        <p:tgtEl>
+                                          <p:spTgt spid="221"/>
+                                        </p:tgtEl>
+                                      </p:cBhvr>
+                                    </p:animEffect>
+                                  </p:childTnLst>
+                                </p:cTn>
+                              </p:par>
+                            </p:childTnLst>
+                          </p:cTn>
+                        </p:par>
+                      </p:childTnLst>
+                    </p:cTn>
+                  </p:par>
+                  <p:par>
+                    <p:cTn id="8" fill="hold">
+                      <p:stCondLst>
+                        <p:cond delay="indefinite"/>
+                      </p:stCondLst>
+                      <p:childTnLst>
+                        <p:par>
+                          <p:cTn id="9" fill="hold">
+                            <p:stCondLst>
+                              <p:cond delay="0"/>
+                            </p:stCondLst>
+                            <p:childTnLst>
+                              <p:par>
+                                <p:cTn id="10" presetID="10" presetClass="entr" presetSubtype="0" fill="hold" nodeType="clickEffect">
+                                  <p:stCondLst>
+                                    <p:cond delay="0"/>
+                                  </p:stCondLst>
+                                  <p:childTnLst>
+                                    <p:set>
+                                      <p:cBhvr>
+                                        <p:cTn id="11" dur="1" fill="hold">
+                                          <p:stCondLst>
+                                            <p:cond delay="0"/>
+                                          </p:stCondLst>
+                                        </p:cTn>
+                                        <p:tgtEl>
+                                          <p:spTgt spid="226"/>
+                                        </p:tgtEl>
+                                        <p:attrNameLst>
+                                          <p:attrName>style.visibility</p:attrName>
+                                        </p:attrNameLst>
+                                      </p:cBhvr>
+                                      <p:to>
+                                        <p:strVal val="visible"/>
+                                      </p:to>
+                                    </p:set>
+                                    <p:animEffect transition="in" filter="fade">
+                                      <p:cBhvr>
+                                        <p:cTn id="12" dur="500"/>
+                                        <p:tgtEl>
+                                          <p:spTgt spid="226"/>
+                                        </p:tgtEl>
+                                      </p:cBhvr>
+                                    </p:animEffect>
+                                  </p:childTnLst>
+                                </p:cTn>
+                              </p:par>
+                            </p:childTnLst>
+                          </p:cTn>
+                        </p:par>
+                      </p:childTnLst>
+                    </p:cTn>
+                  </p:par>
+                  <p:par>
+                    <p:cTn id="13" fill="hold">
+                      <p:stCondLst>
+                        <p:cond delay="indefinite"/>
+                      </p:stCondLst>
+                      <p:childTnLst>
+                        <p:par>
+                          <p:cTn id="14" fill="hold">
+                            <p:stCondLst>
+                              <p:cond delay="0"/>
+                            </p:stCondLst>
+                            <p:childTnLst>
+                              <p:par>
+                                <p:cTn id="15" presetID="10" presetClass="entr" presetSubtype="0" fill="hold" grpId="0" nodeType="clickEffect">
+                                  <p:stCondLst>
+                                    <p:cond delay="0"/>
+                                  </p:stCondLst>
+                                  <p:childTnLst>
+                                    <p:set>
+                                      <p:cBhvr>
+                                        <p:cTn id="16" dur="1" fill="hold">
+                                          <p:stCondLst>
+                                            <p:cond delay="0"/>
+                                          </p:stCondLst>
+                                        </p:cTn>
+                                        <p:tgtEl>
+                                          <p:spTgt spid="213"/>
+                                        </p:tgtEl>
+                                        <p:attrNameLst>
+                                          <p:attrName>style.visibility</p:attrName>
+                                        </p:attrNameLst>
+                                      </p:cBhvr>
+                                      <p:to>
+                                        <p:strVal val="visible"/>
+                                      </p:to>
+                                    </p:set>
+                                    <p:animEffect transition="in" filter="fade">
+                                      <p:cBhvr>
+                                        <p:cTn id="17" dur="500"/>
+                                        <p:tgtEl>
+                                          <p:spTgt spid="213"/>
+                                        </p:tgtEl>
+                                      </p:cBhvr>
+                                    </p:animEffect>
+                                  </p:childTnLst>
+                                </p:cTn>
+                              </p:par>
+                            </p:childTnLst>
+                          </p:cTn>
+                        </p:par>
+                      </p:childTnLst>
+                    </p:cTn>
+                  </p:par>
+                  <p:par>
+                    <p:cTn id="18" fill="hold">
+                      <p:stCondLst>
+                        <p:cond delay="indefinite"/>
+                      </p:stCondLst>
+                      <p:childTnLst>
+                        <p:par>
+                          <p:cTn id="19" fill="hold">
+                            <p:stCondLst>
+                              <p:cond delay="0"/>
+                            </p:stCondLst>
+                            <p:childTnLst>
+                              <p:par>
+                                <p:cTn id="20" presetID="10" presetClass="entr" presetSubtype="0" fill="hold" nodeType="clickEffect">
+                                  <p:stCondLst>
+                                    <p:cond delay="0"/>
+                                  </p:stCondLst>
+                                  <p:childTnLst>
+                                    <p:set>
+                                      <p:cBhvr>
+                                        <p:cTn id="21" dur="1" fill="hold">
+                                          <p:stCondLst>
+                                            <p:cond delay="0"/>
+                                          </p:stCondLst>
+                                        </p:cTn>
+                                        <p:tgtEl>
+                                          <p:spTgt spid="231"/>
+                                        </p:tgtEl>
+                                        <p:attrNameLst>
+                                          <p:attrName>style.visibility</p:attrName>
+                                        </p:attrNameLst>
+                                      </p:cBhvr>
+                                      <p:to>
+                                        <p:strVal val="visible"/>
+                                      </p:to>
+                                    </p:set>
+                                    <p:animEffect transition="in" filter="fade">
+                                      <p:cBhvr>
+                                        <p:cTn id="22" dur="500"/>
+                                        <p:tgtEl>
+                                          <p:spTgt spid="231"/>
+                                        </p:tgtEl>
+                                      </p:cBhvr>
+                                    </p:animEffect>
+                                  </p:childTnLst>
+                                </p:cTn>
+                              </p:par>
+                            </p:childTnLst>
+                          </p:cTn>
+                        </p:par>
+                      </p:childTnLst>
+                    </p:cTn>
+                  </p:par>
+                </p:childTnLst>
+              </p:cTn>
+              <p:prevCondLst>
+                <p:cond evt="onPrev" delay="0">
+                  <p:tgtEl>
+                    <p:sldTgt/>
+                  </p:tgtEl>
+                </p:cond>
+              </p:prevCondLst>
+              <p:nextCondLst>
+                <p:cond evt="onNext" delay="0">
+                  <p:tgtEl>
+                    <p:sldTgt/>
+                  </p:tgtEl>
+                </p:cond>
+              </p:nextCondLst>
+            </p:seq>
+          </p:childTnLst>
+        </p:cTn>
       </p:par>
     </p:tnLst>
+    <p:bldLst>
+      <p:bldP spid="213" grpId="0" animBg="1"/>
+    </p:bldLst>
   </p:timing>
 </p:sld>
 </file>
@@ -20898,13 +23160,13 @@
   <p:clrMapOvr>
     <a:masterClrMapping/>
   </p:clrMapOvr>
-  <mc:AlternateContent xmlns:mc="http://schemas.openxmlformats.org/markup-compatibility/2006">
-    <mc:Choice xmlns:p14="http://schemas.microsoft.com/office/powerpoint/2010/main" Requires="p14">
+  <mc:AlternateContent xmlns:mc="http://schemas.openxmlformats.org/markup-compatibility/2006" xmlns:p14="http://schemas.microsoft.com/office/powerpoint/2010/main">
+    <mc:Choice Requires="p14">
       <p:transition spd="slow" p14:dur="2000">
         <p:cut/>
       </p:transition>
     </mc:Choice>
-    <mc:Fallback>
+    <mc:Fallback xmlns="">
       <p:transition spd="slow">
         <p:cut/>
       </p:transition>
@@ -20913,7 +23175,189 @@
   <p:timing>
     <p:tnLst>
       <p:par>
-        <p:cTn id="1" dur="indefinite" restart="never" nodeType="tmRoot"/>
+        <p:cTn id="1" dur="indefinite" restart="never" nodeType="tmRoot">
+          <p:childTnLst>
+            <p:seq concurrent="1" nextAc="seek">
+              <p:cTn id="2" dur="indefinite" nodeType="mainSeq">
+                <p:childTnLst>
+                  <p:par>
+                    <p:cTn id="3" fill="hold">
+                      <p:stCondLst>
+                        <p:cond delay="indefinite"/>
+                      </p:stCondLst>
+                      <p:childTnLst>
+                        <p:par>
+                          <p:cTn id="4" fill="hold">
+                            <p:stCondLst>
+                              <p:cond delay="0"/>
+                            </p:stCondLst>
+                            <p:childTnLst>
+                              <p:par>
+                                <p:cTn id="5" presetID="10" presetClass="entr" presetSubtype="0" fill="hold" nodeType="clickEffect">
+                                  <p:stCondLst>
+                                    <p:cond delay="0"/>
+                                  </p:stCondLst>
+                                  <p:childTnLst>
+                                    <p:set>
+                                      <p:cBhvr>
+                                        <p:cTn id="6" dur="1" fill="hold">
+                                          <p:stCondLst>
+                                            <p:cond delay="0"/>
+                                          </p:stCondLst>
+                                        </p:cTn>
+                                        <p:tgtEl>
+                                          <p:spTgt spid="246"/>
+                                        </p:tgtEl>
+                                        <p:attrNameLst>
+                                          <p:attrName>style.visibility</p:attrName>
+                                        </p:attrNameLst>
+                                      </p:cBhvr>
+                                      <p:to>
+                                        <p:strVal val="visible"/>
+                                      </p:to>
+                                    </p:set>
+                                    <p:animEffect transition="in" filter="fade">
+                                      <p:cBhvr>
+                                        <p:cTn id="7" dur="500"/>
+                                        <p:tgtEl>
+                                          <p:spTgt spid="246"/>
+                                        </p:tgtEl>
+                                      </p:cBhvr>
+                                    </p:animEffect>
+                                  </p:childTnLst>
+                                </p:cTn>
+                              </p:par>
+                            </p:childTnLst>
+                          </p:cTn>
+                        </p:par>
+                      </p:childTnLst>
+                    </p:cTn>
+                  </p:par>
+                  <p:par>
+                    <p:cTn id="8" fill="hold">
+                      <p:stCondLst>
+                        <p:cond delay="indefinite"/>
+                      </p:stCondLst>
+                      <p:childTnLst>
+                        <p:par>
+                          <p:cTn id="9" fill="hold">
+                            <p:stCondLst>
+                              <p:cond delay="0"/>
+                            </p:stCondLst>
+                            <p:childTnLst>
+                              <p:par>
+                                <p:cTn id="10" presetID="10" presetClass="entr" presetSubtype="0" fill="hold" nodeType="clickEffect">
+                                  <p:stCondLst>
+                                    <p:cond delay="0"/>
+                                  </p:stCondLst>
+                                  <p:childTnLst>
+                                    <p:set>
+                                      <p:cBhvr>
+                                        <p:cTn id="11" dur="1" fill="hold">
+                                          <p:stCondLst>
+                                            <p:cond delay="0"/>
+                                          </p:stCondLst>
+                                        </p:cTn>
+                                        <p:tgtEl>
+                                          <p:spTgt spid="264"/>
+                                        </p:tgtEl>
+                                        <p:attrNameLst>
+                                          <p:attrName>style.visibility</p:attrName>
+                                        </p:attrNameLst>
+                                      </p:cBhvr>
+                                      <p:to>
+                                        <p:strVal val="visible"/>
+                                      </p:to>
+                                    </p:set>
+                                    <p:animEffect transition="in" filter="fade">
+                                      <p:cBhvr>
+                                        <p:cTn id="12" dur="500"/>
+                                        <p:tgtEl>
+                                          <p:spTgt spid="264"/>
+                                        </p:tgtEl>
+                                      </p:cBhvr>
+                                    </p:animEffect>
+                                  </p:childTnLst>
+                                </p:cTn>
+                              </p:par>
+                            </p:childTnLst>
+                          </p:cTn>
+                        </p:par>
+                      </p:childTnLst>
+                    </p:cTn>
+                  </p:par>
+                  <p:par>
+                    <p:cTn id="13" fill="hold">
+                      <p:stCondLst>
+                        <p:cond delay="indefinite"/>
+                      </p:stCondLst>
+                      <p:childTnLst>
+                        <p:par>
+                          <p:cTn id="14" fill="hold">
+                            <p:stCondLst>
+                              <p:cond delay="0"/>
+                            </p:stCondLst>
+                            <p:childTnLst>
+                              <p:par>
+                                <p:cTn id="15" presetID="10" presetClass="entr" presetSubtype="0" fill="hold" nodeType="clickEffect">
+                                  <p:stCondLst>
+                                    <p:cond delay="0"/>
+                                  </p:stCondLst>
+                                  <p:childTnLst>
+                                    <p:set>
+                                      <p:cBhvr>
+                                        <p:cTn id="16" dur="1" fill="hold">
+                                          <p:stCondLst>
+                                            <p:cond delay="0"/>
+                                          </p:stCondLst>
+                                        </p:cTn>
+                                        <p:tgtEl>
+                                          <p:spTgt spid="267"/>
+                                        </p:tgtEl>
+                                        <p:attrNameLst>
+                                          <p:attrName>style.visibility</p:attrName>
+                                        </p:attrNameLst>
+                                      </p:cBhvr>
+                                      <p:to>
+                                        <p:strVal val="visible"/>
+                                      </p:to>
+                                    </p:set>
+                                    <p:animEffect transition="in" filter="fade">
+                                      <p:cBhvr>
+                                        <p:cTn id="17" dur="500"/>
+                                        <p:tgtEl>
+                                          <p:spTgt spid="267"/>
+                                        </p:tgtEl>
+                                      </p:cBhvr>
+                                    </p:animEffect>
+                                  </p:childTnLst>
+                                </p:cTn>
+                              </p:par>
+                            </p:childTnLst>
+                          </p:cTn>
+                        </p:par>
+                      </p:childTnLst>
+                    </p:cTn>
+                  </p:par>
+                </p:childTnLst>
+              </p:cTn>
+              <p:prevCondLst>
+                <p:cond evt="onPrev" delay="0">
+                  <p:tgtEl>
+                    <p:sldTgt/>
+                  </p:tgtEl>
+                </p:cond>
+              </p:prevCondLst>
+              <p:nextCondLst>
+                <p:cond evt="onNext" delay="0">
+                  <p:tgtEl>
+                    <p:sldTgt/>
+                  </p:tgtEl>
+                </p:cond>
+              </p:nextCondLst>
+            </p:seq>
+          </p:childTnLst>
+        </p:cTn>
       </p:par>
     </p:tnLst>
   </p:timing>
@@ -21731,13 +24175,13 @@
   <p:clrMapOvr>
     <a:masterClrMapping/>
   </p:clrMapOvr>
-  <mc:AlternateContent xmlns:mc="http://schemas.openxmlformats.org/markup-compatibility/2006">
-    <mc:Choice xmlns:p14="http://schemas.microsoft.com/office/powerpoint/2010/main" Requires="p14">
+  <mc:AlternateContent xmlns:mc="http://schemas.openxmlformats.org/markup-compatibility/2006" xmlns:p14="http://schemas.microsoft.com/office/powerpoint/2010/main">
+    <mc:Choice Requires="p14">
       <p:transition spd="slow" p14:dur="2000">
         <p:cut/>
       </p:transition>
     </mc:Choice>
-    <mc:Fallback>
+    <mc:Fallback xmlns="">
       <p:transition spd="slow">
         <p:cut/>
       </p:transition>
@@ -21746,9 +24190,247 @@
   <p:timing>
     <p:tnLst>
       <p:par>
-        <p:cTn id="1" dur="indefinite" restart="never" nodeType="tmRoot"/>
+        <p:cTn id="1" dur="indefinite" restart="never" nodeType="tmRoot">
+          <p:childTnLst>
+            <p:seq concurrent="1" nextAc="seek">
+              <p:cTn id="2" dur="indefinite" nodeType="mainSeq">
+                <p:childTnLst>
+                  <p:par>
+                    <p:cTn id="3" fill="hold">
+                      <p:stCondLst>
+                        <p:cond delay="indefinite"/>
+                      </p:stCondLst>
+                      <p:childTnLst>
+                        <p:par>
+                          <p:cTn id="4" fill="hold">
+                            <p:stCondLst>
+                              <p:cond delay="0"/>
+                            </p:stCondLst>
+                            <p:childTnLst>
+                              <p:par>
+                                <p:cTn id="5" presetID="10" presetClass="entr" presetSubtype="0" fill="hold" nodeType="clickEffect">
+                                  <p:stCondLst>
+                                    <p:cond delay="0"/>
+                                  </p:stCondLst>
+                                  <p:childTnLst>
+                                    <p:set>
+                                      <p:cBhvr>
+                                        <p:cTn id="6" dur="1" fill="hold">
+                                          <p:stCondLst>
+                                            <p:cond delay="0"/>
+                                          </p:stCondLst>
+                                        </p:cTn>
+                                        <p:tgtEl>
+                                          <p:spTgt spid="284"/>
+                                        </p:tgtEl>
+                                        <p:attrNameLst>
+                                          <p:attrName>style.visibility</p:attrName>
+                                        </p:attrNameLst>
+                                      </p:cBhvr>
+                                      <p:to>
+                                        <p:strVal val="visible"/>
+                                      </p:to>
+                                    </p:set>
+                                    <p:animEffect transition="in" filter="fade">
+                                      <p:cBhvr>
+                                        <p:cTn id="7" dur="500"/>
+                                        <p:tgtEl>
+                                          <p:spTgt spid="284"/>
+                                        </p:tgtEl>
+                                      </p:cBhvr>
+                                    </p:animEffect>
+                                  </p:childTnLst>
+                                </p:cTn>
+                              </p:par>
+                            </p:childTnLst>
+                          </p:cTn>
+                        </p:par>
+                      </p:childTnLst>
+                    </p:cTn>
+                  </p:par>
+                  <p:par>
+                    <p:cTn id="8" fill="hold">
+                      <p:stCondLst>
+                        <p:cond delay="indefinite"/>
+                      </p:stCondLst>
+                      <p:childTnLst>
+                        <p:par>
+                          <p:cTn id="9" fill="hold">
+                            <p:stCondLst>
+                              <p:cond delay="0"/>
+                            </p:stCondLst>
+                            <p:childTnLst>
+                              <p:par>
+                                <p:cTn id="10" presetID="10" presetClass="entr" presetSubtype="0" fill="hold" nodeType="clickEffect">
+                                  <p:stCondLst>
+                                    <p:cond delay="0"/>
+                                  </p:stCondLst>
+                                  <p:childTnLst>
+                                    <p:set>
+                                      <p:cBhvr>
+                                        <p:cTn id="11" dur="1" fill="hold">
+                                          <p:stCondLst>
+                                            <p:cond delay="0"/>
+                                          </p:stCondLst>
+                                        </p:cTn>
+                                        <p:tgtEl>
+                                          <p:spTgt spid="287"/>
+                                        </p:tgtEl>
+                                        <p:attrNameLst>
+                                          <p:attrName>style.visibility</p:attrName>
+                                        </p:attrNameLst>
+                                      </p:cBhvr>
+                                      <p:to>
+                                        <p:strVal val="visible"/>
+                                      </p:to>
+                                    </p:set>
+                                    <p:animEffect transition="in" filter="fade">
+                                      <p:cBhvr>
+                                        <p:cTn id="12" dur="500"/>
+                                        <p:tgtEl>
+                                          <p:spTgt spid="287"/>
+                                        </p:tgtEl>
+                                      </p:cBhvr>
+                                    </p:animEffect>
+                                  </p:childTnLst>
+                                </p:cTn>
+                              </p:par>
+                            </p:childTnLst>
+                          </p:cTn>
+                        </p:par>
+                      </p:childTnLst>
+                    </p:cTn>
+                  </p:par>
+                  <p:par>
+                    <p:cTn id="13" fill="hold">
+                      <p:stCondLst>
+                        <p:cond delay="indefinite"/>
+                      </p:stCondLst>
+                      <p:childTnLst>
+                        <p:par>
+                          <p:cTn id="14" fill="hold">
+                            <p:stCondLst>
+                              <p:cond delay="0"/>
+                            </p:stCondLst>
+                            <p:childTnLst>
+                              <p:par>
+                                <p:cTn id="15" presetID="10" presetClass="entr" presetSubtype="0" fill="hold" grpId="0" nodeType="clickEffect">
+                                  <p:stCondLst>
+                                    <p:cond delay="0"/>
+                                  </p:stCondLst>
+                                  <p:childTnLst>
+                                    <p:set>
+                                      <p:cBhvr>
+                                        <p:cTn id="16" dur="1" fill="hold">
+                                          <p:stCondLst>
+                                            <p:cond delay="0"/>
+                                          </p:stCondLst>
+                                        </p:cTn>
+                                        <p:tgtEl>
+                                          <p:spTgt spid="276"/>
+                                        </p:tgtEl>
+                                        <p:attrNameLst>
+                                          <p:attrName>style.visibility</p:attrName>
+                                        </p:attrNameLst>
+                                      </p:cBhvr>
+                                      <p:to>
+                                        <p:strVal val="visible"/>
+                                      </p:to>
+                                    </p:set>
+                                    <p:animEffect transition="in" filter="fade">
+                                      <p:cBhvr>
+                                        <p:cTn id="17" dur="500"/>
+                                        <p:tgtEl>
+                                          <p:spTgt spid="276"/>
+                                        </p:tgtEl>
+                                      </p:cBhvr>
+                                    </p:animEffect>
+                                  </p:childTnLst>
+                                </p:cTn>
+                              </p:par>
+                            </p:childTnLst>
+                          </p:cTn>
+                        </p:par>
+                      </p:childTnLst>
+                    </p:cTn>
+                  </p:par>
+                  <p:par>
+                    <p:cTn id="18" fill="hold">
+                      <p:stCondLst>
+                        <p:cond delay="indefinite"/>
+                      </p:stCondLst>
+                      <p:childTnLst>
+                        <p:par>
+                          <p:cTn id="19" fill="hold">
+                            <p:stCondLst>
+                              <p:cond delay="0"/>
+                            </p:stCondLst>
+                            <p:childTnLst>
+                              <p:par>
+                                <p:cTn id="20" presetID="10" presetClass="entr" presetSubtype="0" fill="hold" nodeType="clickEffect">
+                                  <p:stCondLst>
+                                    <p:cond delay="0"/>
+                                  </p:stCondLst>
+                                  <p:childTnLst>
+                                    <p:set>
+                                      <p:cBhvr>
+                                        <p:cTn id="21" dur="1" fill="hold">
+                                          <p:stCondLst>
+                                            <p:cond delay="0"/>
+                                          </p:stCondLst>
+                                        </p:cTn>
+                                        <p:tgtEl>
+                                          <p:spTgt spid="291"/>
+                                        </p:tgtEl>
+                                        <p:attrNameLst>
+                                          <p:attrName>style.visibility</p:attrName>
+                                        </p:attrNameLst>
+                                      </p:cBhvr>
+                                      <p:to>
+                                        <p:strVal val="visible"/>
+                                      </p:to>
+                                    </p:set>
+                                    <p:animEffect transition="in" filter="fade">
+                                      <p:cBhvr>
+                                        <p:cTn id="22" dur="500"/>
+                                        <p:tgtEl>
+                                          <p:spTgt spid="291"/>
+                                        </p:tgtEl>
+                                      </p:cBhvr>
+                                    </p:animEffect>
+                                  </p:childTnLst>
+                                </p:cTn>
+                              </p:par>
+                            </p:childTnLst>
+                          </p:cTn>
+                        </p:par>
+                      </p:childTnLst>
+                    </p:cTn>
+                  </p:par>
+                </p:childTnLst>
+              </p:cTn>
+              <p:prevCondLst>
+                <p:cond evt="onPrev" delay="0">
+                  <p:tgtEl>
+                    <p:sldTgt/>
+                  </p:tgtEl>
+                </p:cond>
+              </p:prevCondLst>
+              <p:nextCondLst>
+                <p:cond evt="onNext" delay="0">
+                  <p:tgtEl>
+                    <p:sldTgt/>
+                  </p:tgtEl>
+                </p:cond>
+              </p:nextCondLst>
+            </p:seq>
+          </p:childTnLst>
+        </p:cTn>
       </p:par>
     </p:tnLst>
+    <p:bldLst>
+      <p:bldP spid="276" grpId="0" animBg="1"/>
+    </p:bldLst>
   </p:timing>
 </p:sld>
 </file>
@@ -23080,13 +25762,13 @@
   <p:clrMapOvr>
     <a:masterClrMapping/>
   </p:clrMapOvr>
-  <mc:AlternateContent xmlns:mc="http://schemas.openxmlformats.org/markup-compatibility/2006">
-    <mc:Choice xmlns:p14="http://schemas.microsoft.com/office/powerpoint/2010/main" Requires="p14">
+  <mc:AlternateContent xmlns:mc="http://schemas.openxmlformats.org/markup-compatibility/2006" xmlns:p14="http://schemas.microsoft.com/office/powerpoint/2010/main">
+    <mc:Choice Requires="p14">
       <p:transition spd="slow" p14:dur="2000">
         <p:cut/>
       </p:transition>
     </mc:Choice>
-    <mc:Fallback>
+    <mc:Fallback xmlns="">
       <p:transition spd="slow">
         <p:cut/>
       </p:transition>
@@ -23095,7 +25777,295 @@
   <p:timing>
     <p:tnLst>
       <p:par>
-        <p:cTn id="1" dur="indefinite" restart="never" nodeType="tmRoot"/>
+        <p:cTn id="1" dur="indefinite" restart="never" nodeType="tmRoot">
+          <p:childTnLst>
+            <p:seq concurrent="1" nextAc="seek">
+              <p:cTn id="2" dur="indefinite" nodeType="mainSeq">
+                <p:childTnLst>
+                  <p:par>
+                    <p:cTn id="3" fill="hold">
+                      <p:stCondLst>
+                        <p:cond delay="indefinite"/>
+                      </p:stCondLst>
+                      <p:childTnLst>
+                        <p:par>
+                          <p:cTn id="4" fill="hold">
+                            <p:stCondLst>
+                              <p:cond delay="0"/>
+                            </p:stCondLst>
+                            <p:childTnLst>
+                              <p:par>
+                                <p:cTn id="5" presetID="10" presetClass="entr" presetSubtype="0" fill="hold" nodeType="clickEffect">
+                                  <p:stCondLst>
+                                    <p:cond delay="0"/>
+                                  </p:stCondLst>
+                                  <p:childTnLst>
+                                    <p:set>
+                                      <p:cBhvr>
+                                        <p:cTn id="6" dur="1" fill="hold">
+                                          <p:stCondLst>
+                                            <p:cond delay="0"/>
+                                          </p:stCondLst>
+                                        </p:cTn>
+                                        <p:tgtEl>
+                                          <p:spTgt spid="308"/>
+                                        </p:tgtEl>
+                                        <p:attrNameLst>
+                                          <p:attrName>style.visibility</p:attrName>
+                                        </p:attrNameLst>
+                                      </p:cBhvr>
+                                      <p:to>
+                                        <p:strVal val="visible"/>
+                                      </p:to>
+                                    </p:set>
+                                    <p:animEffect transition="in" filter="fade">
+                                      <p:cBhvr>
+                                        <p:cTn id="7" dur="500"/>
+                                        <p:tgtEl>
+                                          <p:spTgt spid="308"/>
+                                        </p:tgtEl>
+                                      </p:cBhvr>
+                                    </p:animEffect>
+                                  </p:childTnLst>
+                                </p:cTn>
+                              </p:par>
+                            </p:childTnLst>
+                          </p:cTn>
+                        </p:par>
+                      </p:childTnLst>
+                    </p:cTn>
+                  </p:par>
+                  <p:par>
+                    <p:cTn id="8" fill="hold">
+                      <p:stCondLst>
+                        <p:cond delay="indefinite"/>
+                      </p:stCondLst>
+                      <p:childTnLst>
+                        <p:par>
+                          <p:cTn id="9" fill="hold">
+                            <p:stCondLst>
+                              <p:cond delay="0"/>
+                            </p:stCondLst>
+                            <p:childTnLst>
+                              <p:par>
+                                <p:cTn id="10" presetID="10" presetClass="entr" presetSubtype="0" fill="hold" nodeType="clickEffect">
+                                  <p:stCondLst>
+                                    <p:cond delay="0"/>
+                                  </p:stCondLst>
+                                  <p:childTnLst>
+                                    <p:set>
+                                      <p:cBhvr>
+                                        <p:cTn id="11" dur="1" fill="hold">
+                                          <p:stCondLst>
+                                            <p:cond delay="0"/>
+                                          </p:stCondLst>
+                                        </p:cTn>
+                                        <p:tgtEl>
+                                          <p:spTgt spid="312"/>
+                                        </p:tgtEl>
+                                        <p:attrNameLst>
+                                          <p:attrName>style.visibility</p:attrName>
+                                        </p:attrNameLst>
+                                      </p:cBhvr>
+                                      <p:to>
+                                        <p:strVal val="visible"/>
+                                      </p:to>
+                                    </p:set>
+                                    <p:animEffect transition="in" filter="fade">
+                                      <p:cBhvr>
+                                        <p:cTn id="12" dur="500"/>
+                                        <p:tgtEl>
+                                          <p:spTgt spid="312"/>
+                                        </p:tgtEl>
+                                      </p:cBhvr>
+                                    </p:animEffect>
+                                  </p:childTnLst>
+                                </p:cTn>
+                              </p:par>
+                            </p:childTnLst>
+                          </p:cTn>
+                        </p:par>
+                      </p:childTnLst>
+                    </p:cTn>
+                  </p:par>
+                  <p:par>
+                    <p:cTn id="13" fill="hold">
+                      <p:stCondLst>
+                        <p:cond delay="indefinite"/>
+                      </p:stCondLst>
+                      <p:childTnLst>
+                        <p:par>
+                          <p:cTn id="14" fill="hold">
+                            <p:stCondLst>
+                              <p:cond delay="0"/>
+                            </p:stCondLst>
+                            <p:childTnLst>
+                              <p:par>
+                                <p:cTn id="15" presetID="10" presetClass="entr" presetSubtype="0" fill="hold" nodeType="clickEffect">
+                                  <p:stCondLst>
+                                    <p:cond delay="0"/>
+                                  </p:stCondLst>
+                                  <p:childTnLst>
+                                    <p:set>
+                                      <p:cBhvr>
+                                        <p:cTn id="16" dur="1" fill="hold">
+                                          <p:stCondLst>
+                                            <p:cond delay="0"/>
+                                          </p:stCondLst>
+                                        </p:cTn>
+                                        <p:tgtEl>
+                                          <p:spTgt spid="299"/>
+                                        </p:tgtEl>
+                                        <p:attrNameLst>
+                                          <p:attrName>style.visibility</p:attrName>
+                                        </p:attrNameLst>
+                                      </p:cBhvr>
+                                      <p:to>
+                                        <p:strVal val="visible"/>
+                                      </p:to>
+                                    </p:set>
+                                    <p:animEffect transition="in" filter="fade">
+                                      <p:cBhvr>
+                                        <p:cTn id="17" dur="500"/>
+                                        <p:tgtEl>
+                                          <p:spTgt spid="299"/>
+                                        </p:tgtEl>
+                                      </p:cBhvr>
+                                    </p:animEffect>
+                                  </p:childTnLst>
+                                </p:cTn>
+                              </p:par>
+                            </p:childTnLst>
+                          </p:cTn>
+                        </p:par>
+                      </p:childTnLst>
+                    </p:cTn>
+                  </p:par>
+                  <p:par>
+                    <p:cTn id="18" fill="hold">
+                      <p:stCondLst>
+                        <p:cond delay="indefinite"/>
+                      </p:stCondLst>
+                      <p:childTnLst>
+                        <p:par>
+                          <p:cTn id="19" fill="hold">
+                            <p:stCondLst>
+                              <p:cond delay="0"/>
+                            </p:stCondLst>
+                            <p:childTnLst>
+                              <p:par>
+                                <p:cTn id="20" presetID="10" presetClass="entr" presetSubtype="0" fill="hold" nodeType="clickEffect">
+                                  <p:stCondLst>
+                                    <p:cond delay="0"/>
+                                  </p:stCondLst>
+                                  <p:childTnLst>
+                                    <p:set>
+                                      <p:cBhvr>
+                                        <p:cTn id="21" dur="1" fill="hold">
+                                          <p:stCondLst>
+                                            <p:cond delay="0"/>
+                                          </p:stCondLst>
+                                        </p:cTn>
+                                        <p:tgtEl>
+                                          <p:spTgt spid="316"/>
+                                        </p:tgtEl>
+                                        <p:attrNameLst>
+                                          <p:attrName>style.visibility</p:attrName>
+                                        </p:attrNameLst>
+                                      </p:cBhvr>
+                                      <p:to>
+                                        <p:strVal val="visible"/>
+                                      </p:to>
+                                    </p:set>
+                                    <p:animEffect transition="in" filter="fade">
+                                      <p:cBhvr>
+                                        <p:cTn id="22" dur="500"/>
+                                        <p:tgtEl>
+                                          <p:spTgt spid="316"/>
+                                        </p:tgtEl>
+                                      </p:cBhvr>
+                                    </p:animEffect>
+                                  </p:childTnLst>
+                                </p:cTn>
+                              </p:par>
+                            </p:childTnLst>
+                          </p:cTn>
+                        </p:par>
+                      </p:childTnLst>
+                    </p:cTn>
+                  </p:par>
+                  <p:par>
+                    <p:cTn id="23" fill="hold">
+                      <p:stCondLst>
+                        <p:cond delay="indefinite"/>
+                      </p:stCondLst>
+                      <p:childTnLst>
+                        <p:par>
+                          <p:cTn id="24" fill="hold">
+                            <p:stCondLst>
+                              <p:cond delay="0"/>
+                            </p:stCondLst>
+                            <p:childTnLst>
+                              <p:par>
+                                <p:cTn id="25" presetID="10" presetClass="entr" presetSubtype="0" fill="hold" nodeType="clickEffect">
+                                  <p:stCondLst>
+                                    <p:cond delay="0"/>
+                                  </p:stCondLst>
+                                  <p:childTnLst>
+                                    <p:set>
+                                      <p:cBhvr>
+                                        <p:cTn id="26" dur="1" fill="hold">
+                                          <p:stCondLst>
+                                            <p:cond delay="0"/>
+                                          </p:stCondLst>
+                                        </p:cTn>
+                                        <p:tgtEl>
+                                          <p:spTgt spid="320"/>
+                                        </p:tgtEl>
+                                        <p:attrNameLst>
+                                          <p:attrName>style.visibility</p:attrName>
+                                        </p:attrNameLst>
+                                      </p:cBhvr>
+                                      <p:to>
+                                        <p:strVal val="visible"/>
+                                      </p:to>
+                                    </p:set>
+                                    <p:animEffect transition="in" filter="fade">
+                                      <p:cBhvr>
+                                        <p:cTn id="27" dur="500"/>
+                                        <p:tgtEl>
+                                          <p:spTgt spid="320"/>
+                                        </p:tgtEl>
+                                      </p:cBhvr>
+                                    </p:animEffect>
+                                  </p:childTnLst>
+                                </p:cTn>
+                              </p:par>
+                            </p:childTnLst>
+                          </p:cTn>
+                        </p:par>
+                      </p:childTnLst>
+                    </p:cTn>
+                  </p:par>
+                </p:childTnLst>
+              </p:cTn>
+              <p:prevCondLst>
+                <p:cond evt="onPrev" delay="0">
+                  <p:tgtEl>
+                    <p:sldTgt/>
+                  </p:tgtEl>
+                </p:cond>
+              </p:prevCondLst>
+              <p:nextCondLst>
+                <p:cond evt="onNext" delay="0">
+                  <p:tgtEl>
+                    <p:sldTgt/>
+                  </p:tgtEl>
+                </p:cond>
+              </p:nextCondLst>
+            </p:seq>
+          </p:childTnLst>
+        </p:cTn>
       </p:par>
     </p:tnLst>
   </p:timing>
